--- a/documentos/arquitetura/Apresentação Arquitetura de Solução.pptx
+++ b/documentos/arquitetura/Apresentação Arquitetura de Solução.pptx
@@ -4,6 +4,9 @@
   <p:sldMasterIdLst>
     <p:sldMasterId id="2147483648" r:id="rId1"/>
   </p:sldMasterIdLst>
+  <p:notesMasterIdLst>
+    <p:notesMasterId r:id="rId13"/>
+  </p:notesMasterIdLst>
   <p:sldIdLst>
     <p:sldId id="256" r:id="rId2"/>
     <p:sldId id="257" r:id="rId3"/>
@@ -17,10 +20,7 @@
     <p:sldId id="265" r:id="rId11"/>
     <p:sldId id="266" r:id="rId12"/>
   </p:sldIdLst>
-  <p:notesMasterIdLst>
-    <p:notesMasterId r:id="rId13"/>
-  </p:notesMasterIdLst>
-  <p:sldSz cx="9144000" cy="5143500"/>
+  <p:sldSz cx="9144000" cy="5143500" type="screen16x9"/>
   <p:notesSz cx="5143500" cy="9144000"/>
   <p:defaultTextStyle>
     <a:lvl1pPr marL="0" algn="l" defTabSz="914400" rtl="0" eaLnBrk="1" latinLnBrk="0" hangingPunct="1">
@@ -114,6 +114,11 @@
       </a:defRPr>
     </a:lvl9pPr>
   </p:defaultTextStyle>
+  <p:extLst>
+    <p:ext uri="{EFAFB233-063F-42B5-8137-9DF3F51BA10A}">
+      <p15:sldGuideLst xmlns:p15="http://schemas.microsoft.com/office/powerpoint/2012/main"/>
+    </p:ext>
+  </p:extLst>
 </p:presentation>
 </file>
 
@@ -139,234 +144,10 @@
           <a:chExt cx="0" cy="0"/>
         </a:xfrm>
       </p:grpSpPr>
-      <p:sp>
-        <p:nvSpPr>
-          <p:cNvPr id="2" name="Header Placeholder 1"/>
-          <p:cNvSpPr>
-            <a:spLocks noGrp="1"/>
-          </p:cNvSpPr>
-          <p:nvPr>
-            <p:ph type="hdr" sz="quarter"/>
-          </p:nvPr>
-        </p:nvSpPr>
-        <p:spPr>
-          <a:xfrm>
-            <a:off x="0" y="0"/>
-            <a:ext cx="2971800" cy="458788"/>
-          </a:xfrm>
-          <a:prstGeom prst="rect">
-            <a:avLst/>
-          </a:prstGeom>
-        </p:spPr>
-        <p:txBody>
-          <a:bodyPr vert="horz" lIns="91440" tIns="45720" rIns="91440" bIns="45720" rtlCol="0"/>
-          <a:lstStyle>
-            <a:lvl1pPr algn="l">
-              <a:defRPr sz="1200"/>
-            </a:lvl1pPr>
-          </a:lstStyle>
-          <a:p>
-            <a:endParaRPr lang="en-US"/>
-          </a:p>
-        </p:txBody>
-      </p:sp>
-      <p:sp>
-        <p:nvSpPr>
-          <p:cNvPr id="3" name="Date Placeholder 2"/>
-          <p:cNvSpPr>
-            <a:spLocks noGrp="1"/>
-          </p:cNvSpPr>
-          <p:nvPr>
-            <p:ph type="dt" idx="1"/>
-          </p:nvPr>
-        </p:nvSpPr>
-        <p:spPr>
-          <a:xfrm>
-            <a:off x="3884613" y="0"/>
-            <a:ext cx="2971800" cy="458788"/>
-          </a:xfrm>
-          <a:prstGeom prst="rect">
-            <a:avLst/>
-          </a:prstGeom>
-        </p:spPr>
-        <p:txBody>
-          <a:bodyPr vert="horz" lIns="91440" tIns="45720" rIns="91440" bIns="45720" rtlCol="0"/>
-          <a:lstStyle>
-            <a:lvl1pPr algn="r">
-              <a:defRPr sz="1200"/>
-            </a:lvl1pPr>
-          </a:lstStyle>
-          <a:p>
-            <a:fld id="{5282F153-3F37-0F45-9E97-73ACFA13230C}" type="datetimeFigureOut">
-              <a:rPr lang="en-US"/>
-              <a:t>7/23/19</a:t>
-            </a:fld>
-            <a:endParaRPr lang="en-US"/>
-          </a:p>
-        </p:txBody>
-      </p:sp>
-      <p:sp>
-        <p:nvSpPr>
-          <p:cNvPr id="4" name="Slide Image Placeholder 3"/>
-          <p:cNvSpPr>
-            <a:spLocks noGrp="1" noRot="1" noChangeAspect="1"/>
-          </p:cNvSpPr>
-          <p:nvPr>
-            <p:ph type="sldImg" idx="2"/>
-          </p:nvPr>
-        </p:nvSpPr>
-        <p:spPr>
-          <a:xfrm>
-            <a:off x="685800" y="1143000"/>
-            <a:ext cx="5486400" cy="3086100"/>
-          </a:xfrm>
-          <a:prstGeom prst="rect">
-            <a:avLst/>
-          </a:prstGeom>
-          <a:noFill/>
-          <a:ln w="12700">
-            <a:solidFill>
-              <a:prstClr val="black"/>
-            </a:solidFill>
-          </a:ln>
-        </p:spPr>
-        <p:txBody>
-          <a:bodyPr vert="horz" lIns="91440" tIns="45720" rIns="91440" bIns="45720" rtlCol="0" anchor="ctr"/>
-          <a:lstStyle/>
-          <a:p>
-            <a:endParaRPr lang="en-US"/>
-          </a:p>
-        </p:txBody>
-      </p:sp>
-      <p:sp>
-        <p:nvSpPr>
-          <p:cNvPr id="5" name="Notes Placeholder 4"/>
-          <p:cNvSpPr>
-            <a:spLocks noGrp="1"/>
-          </p:cNvSpPr>
-          <p:nvPr>
-            <p:ph type="body" sz="quarter" idx="3"/>
-          </p:nvPr>
-        </p:nvSpPr>
-        <p:spPr>
-          <a:xfrm>
-            <a:off x="685800" y="4400550"/>
-            <a:ext cx="5486400" cy="3600450"/>
-          </a:xfrm>
-          <a:prstGeom prst="rect">
-            <a:avLst/>
-          </a:prstGeom>
-        </p:spPr>
-        <p:txBody>
-          <a:bodyPr vert="horz" lIns="91440" tIns="45720" rIns="91440" bIns="45720" rtlCol="0"/>
-          <a:lstStyle/>
-          <a:p>
-            <a:pPr lvl="0"/>
-            <a:r>
-              <a:rPr lang="en-US"/>
-              <a:t>Click to edit Master text styles</a:t>
-            </a:r>
-          </a:p>
-          <a:p>
-            <a:pPr lvl="1"/>
-            <a:r>
-              <a:rPr lang="en-US"/>
-              <a:t>Second level</a:t>
-            </a:r>
-          </a:p>
-          <a:p>
-            <a:pPr lvl="2"/>
-            <a:r>
-              <a:rPr lang="en-US"/>
-              <a:t>Third level</a:t>
-            </a:r>
-          </a:p>
-          <a:p>
-            <a:pPr lvl="3"/>
-            <a:r>
-              <a:rPr lang="en-US"/>
-              <a:t>Fourth level</a:t>
-            </a:r>
-          </a:p>
-          <a:p>
-            <a:pPr lvl="4"/>
-            <a:r>
-              <a:rPr lang="en-US"/>
-              <a:t>Fifth level</a:t>
-            </a:r>
-          </a:p>
-        </p:txBody>
-      </p:sp>
-      <p:sp>
-        <p:nvSpPr>
-          <p:cNvPr id="6" name="Footer Placeholder 5"/>
-          <p:cNvSpPr>
-            <a:spLocks noGrp="1"/>
-          </p:cNvSpPr>
-          <p:nvPr>
-            <p:ph type="ftr" sz="quarter" idx="4"/>
-          </p:nvPr>
-        </p:nvSpPr>
-        <p:spPr>
-          <a:xfrm>
-            <a:off x="0" y="8685213"/>
-            <a:ext cx="2971800" cy="458787"/>
-          </a:xfrm>
-          <a:prstGeom prst="rect">
-            <a:avLst/>
-          </a:prstGeom>
-        </p:spPr>
-        <p:txBody>
-          <a:bodyPr vert="horz" lIns="91440" tIns="45720" rIns="91440" bIns="45720" rtlCol="0" anchor="b"/>
-          <a:lstStyle>
-            <a:lvl1pPr algn="l">
-              <a:defRPr sz="1200"/>
-            </a:lvl1pPr>
-          </a:lstStyle>
-          <a:p>
-            <a:endParaRPr lang="en-US"/>
-          </a:p>
-        </p:txBody>
-      </p:sp>
-      <p:sp>
-        <p:nvSpPr>
-          <p:cNvPr id="7" name="Slide Number Placeholder 6"/>
-          <p:cNvSpPr>
-            <a:spLocks noGrp="1"/>
-          </p:cNvSpPr>
-          <p:nvPr>
-            <p:ph type="sldNum" sz="quarter" idx="5"/>
-          </p:nvPr>
-        </p:nvSpPr>
-        <p:spPr>
-          <a:xfrm>
-            <a:off x="3884613" y="8685213"/>
-            <a:ext cx="2971800" cy="458787"/>
-          </a:xfrm>
-          <a:prstGeom prst="rect">
-            <a:avLst/>
-          </a:prstGeom>
-        </p:spPr>
-        <p:txBody>
-          <a:bodyPr vert="horz" lIns="91440" tIns="45720" rIns="91440" bIns="45720" rtlCol="0" anchor="b"/>
-          <a:lstStyle>
-            <a:lvl1pPr algn="r">
-              <a:defRPr sz="1200"/>
-            </a:lvl1pPr>
-          </a:lstStyle>
-          <a:p>
-            <a:fld id="{CE5E9CC1-C706-0F49-92D6-E571CC5EEA8F}" type="slidenum">
-              <a:rPr lang="en-US"/>
-              <a:t>‹#›</a:t>
-            </a:fld>
-            <a:endParaRPr lang="en-US"/>
-          </a:p>
-        </p:txBody>
-      </p:sp>
     </p:spTree>
     <p:extLst>
       <p:ext uri="{BB962C8B-B14F-4D97-AF65-F5344CB8AC3E}">
-        <p14:creationId xmlns:p14="http://schemas.microsoft.com/office/powerpoint/2010/main" val="1024086991"/>
+        <p14:creationId xmlns:p14="http://schemas.microsoft.com/office/powerpoint/2010/main" val="3591813815"/>
       </p:ext>
     </p:extLst>
   </p:cSld>
@@ -510,10 +291,6 @@
           <a:bodyPr/>
           <a:lstStyle/>
           <a:p>
-            <a:r>
-              <a:rPr lang="en-US" dirty="0"/>
-              <a:t/>
-            </a:r>
             <a:endParaRPr lang="en-US" dirty="0"/>
           </a:p>
         </p:txBody>
@@ -598,10 +375,6 @@
           <a:bodyPr/>
           <a:lstStyle/>
           <a:p>
-            <a:r>
-              <a:rPr lang="en-US" dirty="0"/>
-              <a:t/>
-            </a:r>
             <a:endParaRPr lang="en-US" dirty="0"/>
           </a:p>
         </p:txBody>
@@ -686,10 +459,6 @@
           <a:bodyPr/>
           <a:lstStyle/>
           <a:p>
-            <a:r>
-              <a:rPr lang="en-US" dirty="0"/>
-              <a:t/>
-            </a:r>
             <a:endParaRPr lang="en-US" dirty="0"/>
           </a:p>
         </p:txBody>
@@ -774,10 +543,6 @@
           <a:bodyPr/>
           <a:lstStyle/>
           <a:p>
-            <a:r>
-              <a:rPr lang="en-US" dirty="0"/>
-              <a:t/>
-            </a:r>
             <a:endParaRPr lang="en-US" dirty="0"/>
           </a:p>
         </p:txBody>
@@ -862,10 +627,6 @@
           <a:bodyPr/>
           <a:lstStyle/>
           <a:p>
-            <a:r>
-              <a:rPr lang="en-US" dirty="0"/>
-              <a:t/>
-            </a:r>
             <a:endParaRPr lang="en-US" dirty="0"/>
           </a:p>
         </p:txBody>
@@ -950,10 +711,6 @@
           <a:bodyPr/>
           <a:lstStyle/>
           <a:p>
-            <a:r>
-              <a:rPr lang="en-US" dirty="0"/>
-              <a:t/>
-            </a:r>
             <a:endParaRPr lang="en-US" dirty="0"/>
           </a:p>
         </p:txBody>
@@ -1038,10 +795,6 @@
           <a:bodyPr/>
           <a:lstStyle/>
           <a:p>
-            <a:r>
-              <a:rPr lang="en-US" dirty="0"/>
-              <a:t/>
-            </a:r>
             <a:endParaRPr lang="en-US" dirty="0"/>
           </a:p>
         </p:txBody>
@@ -1126,10 +879,6 @@
           <a:bodyPr/>
           <a:lstStyle/>
           <a:p>
-            <a:r>
-              <a:rPr lang="en-US" dirty="0"/>
-              <a:t/>
-            </a:r>
             <a:endParaRPr lang="en-US" dirty="0"/>
           </a:p>
         </p:txBody>
@@ -1214,10 +963,6 @@
           <a:bodyPr/>
           <a:lstStyle/>
           <a:p>
-            <a:r>
-              <a:rPr lang="en-US" dirty="0"/>
-              <a:t/>
-            </a:r>
             <a:endParaRPr lang="en-US" dirty="0"/>
           </a:p>
         </p:txBody>
@@ -1302,10 +1047,6 @@
           <a:bodyPr/>
           <a:lstStyle/>
           <a:p>
-            <a:r>
-              <a:rPr lang="en-US" dirty="0"/>
-              <a:t/>
-            </a:r>
             <a:endParaRPr lang="en-US" dirty="0"/>
           </a:p>
         </p:txBody>
@@ -1390,10 +1131,6 @@
           <a:bodyPr/>
           <a:lstStyle/>
           <a:p>
-            <a:r>
-              <a:rPr lang="en-US" dirty="0"/>
-              <a:t/>
-            </a:r>
             <a:endParaRPr lang="en-US" dirty="0"/>
           </a:p>
         </p:txBody>
@@ -1467,6 +1204,11 @@
 <file path=ppt/slideMasters/slideMaster1.xml><?xml version="1.0" encoding="utf-8"?>
 <p:sldMaster xmlns:a="http://schemas.openxmlformats.org/drawingml/2006/main" xmlns:r="http://schemas.openxmlformats.org/officeDocument/2006/relationships" xmlns:p="http://schemas.openxmlformats.org/presentationml/2006/main">
   <p:cSld>
+    <p:bg>
+      <p:bgRef idx="1001">
+        <a:schemeClr val="bg1"/>
+      </p:bgRef>
+    </p:bg>
     <p:spTree>
       <p:nvGrpSpPr>
         <p:cNvPr id="1" name=""/>
@@ -1760,14 +1502,14 @@
       </p:grpSpPr>
       <p:pic>
         <p:nvPicPr>
-          <p:cNvPr id="2" name="Image 0" descr="preencoded.png">    </p:cNvPr>
+          <p:cNvPr id="2" name="Image 0" descr="preencoded.png"/>
           <p:cNvPicPr>
             <a:picLocks noChangeAspect="1"/>
           </p:cNvPicPr>
           <p:nvPr/>
         </p:nvPicPr>
         <p:blipFill>
-          <a:blip r:embed="rId1"/>
+          <a:blip r:embed="rId3"/>
           <a:stretch>
             <a:fillRect/>
           </a:stretch>
@@ -1805,7 +1547,7 @@
           </a:bodyPr>
           <a:lstStyle/>
           <a:p>
-            <a:pPr algn="l" indent="0" marL="0">
+            <a:pPr marL="0" indent="0" algn="l">
               <a:lnSpc>
                 <a:spcPct val="80000"/>
               </a:lnSpc>
@@ -1851,7 +1593,7 @@
           </a:bodyPr>
           <a:lstStyle/>
           <a:p>
-            <a:pPr algn="l" indent="0" marL="0">
+            <a:pPr marL="0" indent="0" algn="l">
               <a:lnSpc>
                 <a:spcPct val="88000"/>
               </a:lnSpc>
@@ -1866,52 +1608,8 @@
                 <a:ea typeface="Montserrat Black" pitchFamily="34" charset="-122"/>
                 <a:cs typeface="Montserrat Black" pitchFamily="34" charset="-120"/>
               </a:rPr>
-              <a:t>DEFESA DE </a:t>
-            </a:r>
-            <a:r>
-              <a:rPr lang="en-US" sz="3300" b="1" dirty="0">
-                <a:solidFill>
-                  <a:srgbClr val="212529"/>
-                </a:solidFill>
-                <a:latin typeface="Montserrat Black" pitchFamily="34" charset="0"/>
-                <a:ea typeface="Montserrat Black" pitchFamily="34" charset="-122"/>
-                <a:cs typeface="Montserrat Black" pitchFamily="34" charset="-120"/>
-              </a:rPr>
-              <a:t>ARQUITETURA:</a:t>
-            </a:r>
-            <a:r>
-              <a:rPr lang="en-US" sz="3300" b="1" dirty="0">
-                <a:solidFill>
-                  <a:srgbClr val="212529"/>
-                </a:solidFill>
-                <a:latin typeface="Montserrat Black" pitchFamily="34" charset="0"/>
-                <a:ea typeface="Montserrat Black" pitchFamily="34" charset="-122"/>
-                <a:cs typeface="Montserrat Black" pitchFamily="34" charset="-120"/>
-              </a:rPr>
-              <a:t>
-</a:t>
-            </a:r>
-            <a:r>
-              <a:rPr lang="en-US" sz="3300" b="1" dirty="0">
-                <a:solidFill>
-                  <a:srgbClr val="212529"/>
-                </a:solidFill>
-                <a:latin typeface="Montserrat Black" pitchFamily="34" charset="0"/>
-                <a:ea typeface="Montserrat Black" pitchFamily="34" charset="-122"/>
-                <a:cs typeface="Montserrat Black" pitchFamily="34" charset="-120"/>
-              </a:rPr>
-              <a:t>SISTEMA DE FLUXO DE </a:t>
-            </a:r>
-            <a:r>
-              <a:rPr lang="en-US" sz="3300" b="1" dirty="0">
-                <a:solidFill>
-                  <a:srgbClr val="212529"/>
-                </a:solidFill>
-                <a:latin typeface="Montserrat Black" pitchFamily="34" charset="0"/>
-                <a:ea typeface="Montserrat Black" pitchFamily="34" charset="-122"/>
-                <a:cs typeface="Montserrat Black" pitchFamily="34" charset="-120"/>
-              </a:rPr>
-              <a:t>CAIXA</a:t>
+              <a:t>DEFESA DE ARQUITETURA:
+SISTEMA DE FLUXO DE CAIXA</a:t>
             </a:r>
             <a:endParaRPr lang="en-US" sz="3300" dirty="0"/>
           </a:p>
@@ -1940,7 +1638,7 @@
           </a:bodyPr>
           <a:lstStyle/>
           <a:p>
-            <a:pPr algn="l" indent="0" marL="0">
+            <a:pPr marL="0" indent="0" algn="l">
               <a:buNone/>
             </a:pPr>
             <a:r>
@@ -1967,7 +1665,7 @@
         <p:spPr>
           <a:xfrm>
             <a:off x="714375" y="3757947"/>
-            <a:ext cx="8429625" cy="173236"/>
+            <a:ext cx="8429625" cy="484748"/>
           </a:xfrm>
           <a:prstGeom prst="rect">
             <a:avLst/>
@@ -1981,7 +1679,7 @@
           </a:bodyPr>
           <a:lstStyle/>
           <a:p>
-            <a:pPr algn="l" indent="0" marL="0">
+            <a:pPr marL="0" indent="0" algn="l">
               <a:buNone/>
             </a:pPr>
             <a:r>
@@ -1993,7 +1691,82 @@
                 <a:ea typeface="Montserrat Medium" pitchFamily="34" charset="-122"/>
                 <a:cs typeface="Montserrat Medium" pitchFamily="34" charset="-120"/>
               </a:rPr>
-              <a:t>Arquiteto de Soluções Sênior</a:t>
+              <a:t>Arquiteto de </a:t>
+            </a:r>
+            <a:r>
+              <a:rPr lang="en-US" sz="1050" dirty="0" err="1">
+                <a:solidFill>
+                  <a:srgbClr val="495057"/>
+                </a:solidFill>
+                <a:latin typeface="Montserrat Medium" pitchFamily="34" charset="0"/>
+                <a:ea typeface="Montserrat Medium" pitchFamily="34" charset="-122"/>
+                <a:cs typeface="Montserrat Medium" pitchFamily="34" charset="-120"/>
+              </a:rPr>
+              <a:t>Soluções</a:t>
+            </a:r>
+            <a:r>
+              <a:rPr lang="en-US" sz="1050" dirty="0">
+                <a:solidFill>
+                  <a:srgbClr val="495057"/>
+                </a:solidFill>
+                <a:latin typeface="Montserrat Medium" pitchFamily="34" charset="0"/>
+                <a:ea typeface="Montserrat Medium" pitchFamily="34" charset="-122"/>
+                <a:cs typeface="Montserrat Medium" pitchFamily="34" charset="-120"/>
+              </a:rPr>
+              <a:t> </a:t>
+            </a:r>
+            <a:r>
+              <a:rPr lang="en-US" sz="1050" dirty="0" err="1">
+                <a:solidFill>
+                  <a:srgbClr val="495057"/>
+                </a:solidFill>
+                <a:latin typeface="Montserrat Medium" pitchFamily="34" charset="0"/>
+                <a:ea typeface="Montserrat Medium" pitchFamily="34" charset="-122"/>
+                <a:cs typeface="Montserrat Medium" pitchFamily="34" charset="-120"/>
+              </a:rPr>
+              <a:t>Sênior</a:t>
+            </a:r>
+            <a:br>
+              <a:rPr lang="en-US" sz="1050" dirty="0">
+                <a:solidFill>
+                  <a:srgbClr val="495057"/>
+                </a:solidFill>
+                <a:latin typeface="Montserrat Medium" pitchFamily="34" charset="0"/>
+                <a:ea typeface="Montserrat Medium" pitchFamily="34" charset="-122"/>
+                <a:cs typeface="Montserrat Medium" pitchFamily="34" charset="-120"/>
+              </a:rPr>
+            </a:br>
+            <a:br>
+              <a:rPr lang="en-US" sz="1050" dirty="0">
+                <a:solidFill>
+                  <a:srgbClr val="495057"/>
+                </a:solidFill>
+                <a:latin typeface="Montserrat Medium" pitchFamily="34" charset="0"/>
+                <a:ea typeface="Montserrat Medium" pitchFamily="34" charset="-122"/>
+                <a:cs typeface="Montserrat Medium" pitchFamily="34" charset="-120"/>
+              </a:rPr>
+            </a:br>
+            <a:r>
+              <a:rPr lang="en-US" sz="1050" dirty="0" err="1">
+                <a:solidFill>
+                  <a:srgbClr val="495057"/>
+                </a:solidFill>
+                <a:latin typeface="Montserrat Medium" pitchFamily="34" charset="0"/>
+                <a:ea typeface="Montserrat Medium" pitchFamily="34" charset="-122"/>
+                <a:cs typeface="Montserrat Medium" pitchFamily="34" charset="-120"/>
+              </a:rPr>
+              <a:t>Desafio</a:t>
+            </a:r>
+            <a:r>
+              <a:rPr lang="en-US" sz="1050" dirty="0">
+                <a:solidFill>
+                  <a:srgbClr val="495057"/>
+                </a:solidFill>
+                <a:latin typeface="Montserrat Medium" pitchFamily="34" charset="0"/>
+                <a:ea typeface="Montserrat Medium" pitchFamily="34" charset="-122"/>
+                <a:cs typeface="Montserrat Medium" pitchFamily="34" charset="-120"/>
+              </a:rPr>
+              <a:t> Banco Carrefour</a:t>
             </a:r>
             <a:endParaRPr lang="en-US" sz="1050" dirty="0"/>
           </a:p>
@@ -2022,7 +1795,7 @@
           </a:bodyPr>
           <a:lstStyle/>
           <a:p>
-            <a:pPr algn="l" indent="0" marL="0">
+            <a:pPr marL="0" indent="0" algn="l">
               <a:buNone/>
             </a:pPr>
             <a:r>
@@ -2067,349 +1840,7 @@
       </p:grpSpPr>
       <p:pic>
         <p:nvPicPr>
-          <p:cNvPr id="2" name="Image 0" descr="preencoded.png">    </p:cNvPr>
-          <p:cNvPicPr>
-            <a:picLocks noChangeAspect="1"/>
-          </p:cNvPicPr>
-          <p:nvPr/>
-        </p:nvPicPr>
-        <p:blipFill>
-          <a:blip r:embed="rId1"/>
-          <a:stretch>
-            <a:fillRect/>
-          </a:stretch>
-        </p:blipFill>
-        <p:spPr>
-          <a:xfrm>
-            <a:off x="0" y="0"/>
-            <a:ext cx="9144000" cy="5143500"/>
-          </a:xfrm>
-          <a:prstGeom prst="rect">
-            <a:avLst/>
-          </a:prstGeom>
-        </p:spPr>
-      </p:pic>
-      <p:sp>
-        <p:nvSpPr>
-          <p:cNvPr id="3" name="Text 0"/>
-          <p:cNvSpPr/>
-          <p:nvPr/>
-        </p:nvSpPr>
-        <p:spPr>
-          <a:xfrm>
-            <a:off x="6527602" y="428625"/>
-            <a:ext cx="1902023" cy="1714500"/>
-          </a:xfrm>
-          <a:prstGeom prst="rect">
-            <a:avLst/>
-          </a:prstGeom>
-          <a:noFill/>
-          <a:ln/>
-        </p:spPr>
-        <p:txBody>
-          <a:bodyPr wrap="none" lIns="0" tIns="0" rIns="0" bIns="0" rtlCol="0" anchor="t">
-            <a:spAutoFit/>
-          </a:bodyPr>
-          <a:lstStyle/>
-          <a:p>
-            <a:pPr algn="l" indent="0" marL="0">
-              <a:lnSpc>
-                <a:spcPct val="80000"/>
-              </a:lnSpc>
-              <a:buNone/>
-            </a:pPr>
-            <a:r>
-              <a:rPr lang="en-US" sz="12450" b="1" dirty="0">
-                <a:solidFill>
-                  <a:srgbClr val="212529">
-                    <a:alpha val="5000"/>
-                  </a:srgbClr>
-                </a:solidFill>
-                <a:latin typeface="Montserrat Black" pitchFamily="34" charset="0"/>
-                <a:ea typeface="Montserrat Black" pitchFamily="34" charset="-122"/>
-                <a:cs typeface="Montserrat Black" pitchFamily="34" charset="-120"/>
-              </a:rPr>
-              <a:t>10</a:t>
-            </a:r>
-            <a:endParaRPr lang="en-US" sz="12450" dirty="0"/>
-          </a:p>
-        </p:txBody>
-      </p:sp>
-      <p:sp>
-        <p:nvSpPr>
-          <p:cNvPr id="4" name="Text 1"/>
-          <p:cNvSpPr/>
-          <p:nvPr/>
-        </p:nvSpPr>
-        <p:spPr>
-          <a:xfrm>
-            <a:off x="714375" y="714375"/>
-            <a:ext cx="7715250" cy="557213"/>
-          </a:xfrm>
-          <a:prstGeom prst="rect">
-            <a:avLst/>
-          </a:prstGeom>
-          <a:noFill/>
-          <a:ln/>
-        </p:spPr>
-        <p:txBody>
-          <a:bodyPr wrap="square" lIns="0" tIns="0" rIns="0" bIns="0" rtlCol="0" anchor="t">
-            <a:spAutoFit/>
-          </a:bodyPr>
-          <a:lstStyle/>
-          <a:p>
-            <a:pPr algn="l" indent="0" marL="0">
-              <a:buNone/>
-            </a:pPr>
-            <a:r>
-              <a:rPr lang="en-US" sz="3300" b="1" dirty="0">
-                <a:solidFill>
-                  <a:srgbClr val="212529"/>
-                </a:solidFill>
-                <a:latin typeface="Montserrat Black" pitchFamily="34" charset="0"/>
-                <a:ea typeface="Montserrat Black" pitchFamily="34" charset="-122"/>
-                <a:cs typeface="Montserrat Black" pitchFamily="34" charset="-120"/>
-              </a:rPr>
-              <a:t>RISCOS E MITIGAÇÃO</a:t>
-            </a:r>
-            <a:endParaRPr lang="en-US" sz="3300" dirty="0"/>
-          </a:p>
-        </p:txBody>
-      </p:sp>
-      <p:sp>
-        <p:nvSpPr>
-          <p:cNvPr id="5" name="Shape 2"/>
-          <p:cNvSpPr/>
-          <p:nvPr/>
-        </p:nvSpPr>
-        <p:spPr>
-          <a:xfrm>
-            <a:off x="714375" y="1557338"/>
-            <a:ext cx="2814638" cy="442913"/>
-          </a:xfrm>
-          <a:prstGeom prst="rect">
-            <a:avLst/>
-          </a:prstGeom>
-          <a:solidFill>
-            <a:srgbClr val="212529"/>
-          </a:solidFill>
-          <a:ln/>
-        </p:spPr>
-      </p:sp>
-      <p:sp>
-        <p:nvSpPr>
-          <p:cNvPr id="6" name="Text 3"/>
-          <p:cNvSpPr/>
-          <p:nvPr/>
-        </p:nvSpPr>
-        <p:spPr>
-          <a:xfrm>
-            <a:off x="714375" y="1557338"/>
-            <a:ext cx="2814638" cy="442913"/>
-          </a:xfrm>
-          <a:prstGeom prst="rect">
-            <a:avLst/>
-          </a:prstGeom>
-          <a:noFill/>
-          <a:ln/>
-        </p:spPr>
-        <p:txBody>
-          <a:bodyPr wrap="square" lIns="170053" tIns="170053" rIns="170053" bIns="170053" rtlCol="0" anchor="ctr">
-            <a:spAutoFit/>
-          </a:bodyPr>
-          <a:lstStyle/>
-          <a:p>
-            <a:pPr algn="l" indent="0" marL="0">
-              <a:buNone/>
-            </a:pPr>
-            <a:r>
-              <a:rPr lang="en-US" sz="900" b="1" spc="1" kern="0" dirty="0">
-                <a:solidFill>
-                  <a:srgbClr val="F8F9FA"/>
-                </a:solidFill>
-                <a:latin typeface="Montserrat Black" pitchFamily="34" charset="0"/>
-                <a:ea typeface="Montserrat Black" pitchFamily="34" charset="-122"/>
-                <a:cs typeface="Montserrat Black" pitchFamily="34" charset="-120"/>
-              </a:rPr>
-              <a:t>RISCO IDENTIFICADO</a:t>
-            </a:r>
-            <a:endParaRPr lang="en-US" sz="900" dirty="0"/>
-          </a:p>
-        </p:txBody>
-      </p:sp>
-      <p:sp>
-        <p:nvSpPr>
-          <p:cNvPr id="7" name="Shape 4"/>
-          <p:cNvSpPr/>
-          <p:nvPr/>
-        </p:nvSpPr>
-        <p:spPr>
-          <a:xfrm>
-            <a:off x="3529013" y="1557338"/>
-            <a:ext cx="4900613" cy="442913"/>
-          </a:xfrm>
-          <a:prstGeom prst="rect">
-            <a:avLst/>
-          </a:prstGeom>
-          <a:solidFill>
-            <a:srgbClr val="212529"/>
-          </a:solidFill>
-          <a:ln/>
-        </p:spPr>
-      </p:sp>
-      <p:sp>
-        <p:nvSpPr>
-          <p:cNvPr id="8" name="Text 5"/>
-          <p:cNvSpPr/>
-          <p:nvPr/>
-        </p:nvSpPr>
-        <p:spPr>
-          <a:xfrm>
-            <a:off x="3529013" y="1557338"/>
-            <a:ext cx="4900613" cy="442913"/>
-          </a:xfrm>
-          <a:prstGeom prst="rect">
-            <a:avLst/>
-          </a:prstGeom>
-          <a:noFill/>
-          <a:ln/>
-        </p:spPr>
-        <p:txBody>
-          <a:bodyPr wrap="square" lIns="170053" tIns="170053" rIns="170053" bIns="170053" rtlCol="0" anchor="ctr">
-            <a:spAutoFit/>
-          </a:bodyPr>
-          <a:lstStyle/>
-          <a:p>
-            <a:pPr algn="l" indent="0" marL="0">
-              <a:buNone/>
-            </a:pPr>
-            <a:r>
-              <a:rPr lang="en-US" sz="900" b="1" spc="1" kern="0" dirty="0">
-                <a:solidFill>
-                  <a:srgbClr val="F8F9FA"/>
-                </a:solidFill>
-                <a:latin typeface="Montserrat Black" pitchFamily="34" charset="0"/>
-                <a:ea typeface="Montserrat Black" pitchFamily="34" charset="-122"/>
-                <a:cs typeface="Montserrat Black" pitchFamily="34" charset="-120"/>
-              </a:rPr>
-              <a:t>ESTRATÉGIA DE MITIGAÇÃO</a:t>
-            </a:r>
-            <a:endParaRPr lang="en-US" sz="900" dirty="0"/>
-          </a:p>
-        </p:txBody>
-      </p:sp>
-      <p:pic>
-        <p:nvPicPr>
-          <p:cNvPr id="9" name="Image 1" descr="preencoded.png">    </p:cNvPr>
-          <p:cNvPicPr>
-            <a:picLocks noChangeAspect="1"/>
-          </p:cNvPicPr>
-          <p:nvPr/>
-        </p:nvPicPr>
-        <p:blipFill>
-          <a:blip r:embed="rId2"/>
-          <a:stretch>
-            <a:fillRect/>
-          </a:stretch>
-        </p:blipFill>
-        <p:spPr>
-          <a:xfrm>
-            <a:off x="878681" y="2159198"/>
-            <a:ext cx="171450" cy="171450"/>
-          </a:xfrm>
-          <a:prstGeom prst="rect">
-            <a:avLst/>
-          </a:prstGeom>
-        </p:spPr>
-      </p:pic>
-      <p:sp>
-        <p:nvSpPr>
-          <p:cNvPr id="10" name="Text 6"/>
-          <p:cNvSpPr/>
-          <p:nvPr/>
-        </p:nvSpPr>
-        <p:spPr>
-          <a:xfrm>
-            <a:off x="1214438" y="2000250"/>
-            <a:ext cx="2314575" cy="675084"/>
-          </a:xfrm>
-          <a:prstGeom prst="rect">
-            <a:avLst/>
-          </a:prstGeom>
-          <a:noFill/>
-          <a:ln/>
-        </p:spPr>
-        <p:txBody>
-          <a:bodyPr wrap="square" lIns="170053" tIns="170053" rIns="170053" bIns="170053" rtlCol="0" anchor="t">
-            <a:spAutoFit/>
-          </a:bodyPr>
-          <a:lstStyle/>
-          <a:p>
-            <a:pPr algn="l" indent="0" marL="0">
-              <a:buNone/>
-            </a:pPr>
-            <a:r>
-              <a:rPr lang="en-US" sz="900" b="1" dirty="0">
-                <a:solidFill>
-                  <a:srgbClr val="E63946"/>
-                </a:solidFill>
-                <a:latin typeface="Montserrat Black" pitchFamily="34" charset="0"/>
-                <a:ea typeface="Montserrat Black" pitchFamily="34" charset="-122"/>
-                <a:cs typeface="Montserrat Black" pitchFamily="34" charset="-120"/>
-              </a:rPr>
-              <a:t>Inconsistência Eventual</a:t>
-            </a:r>
-            <a:endParaRPr lang="en-US" sz="900" dirty="0"/>
-          </a:p>
-        </p:txBody>
-      </p:sp>
-      <p:sp>
-        <p:nvSpPr>
-          <p:cNvPr id="11" name="Text 7"/>
-          <p:cNvSpPr/>
-          <p:nvPr/>
-        </p:nvSpPr>
-        <p:spPr>
-          <a:xfrm>
-            <a:off x="3529013" y="2000250"/>
-            <a:ext cx="4900613" cy="675084"/>
-          </a:xfrm>
-          <a:prstGeom prst="rect">
-            <a:avLst/>
-          </a:prstGeom>
-          <a:noFill/>
-          <a:ln/>
-        </p:spPr>
-        <p:txBody>
-          <a:bodyPr wrap="square" lIns="170053" tIns="170053" rIns="170053" bIns="170053" rtlCol="0" anchor="t">
-            <a:spAutoFit/>
-          </a:bodyPr>
-          <a:lstStyle/>
-          <a:p>
-            <a:pPr algn="l" indent="0" marL="0">
-              <a:lnSpc>
-                <a:spcPct val="120000"/>
-              </a:lnSpc>
-              <a:buNone/>
-            </a:pPr>
-            <a:r>
-              <a:rPr lang="en-US" sz="950" dirty="0">
-                <a:solidFill>
-                  <a:srgbClr val="212529"/>
-                </a:solidFill>
-                <a:latin typeface="Montserrat Medium" pitchFamily="34" charset="0"/>
-                <a:ea typeface="Montserrat Medium" pitchFamily="34" charset="-122"/>
-                <a:cs typeface="Montserrat Medium" pitchFamily="34" charset="-120"/>
-              </a:rPr>
-              <a:t>Implementação de UPSERT atômico no banco de dados e futura adoção do Outbox Pattern para garantir entrega "at-least-once".</a:t>
-            </a:r>
-            <a:endParaRPr lang="en-US" sz="950" dirty="0"/>
-          </a:p>
-        </p:txBody>
-      </p:sp>
-      <p:pic>
-        <p:nvPicPr>
-          <p:cNvPr id="12" name="Image 2" descr="preencoded.png">    </p:cNvPr>
+          <p:cNvPr id="2" name="Image 0" descr="preencoded.png"/>
           <p:cNvPicPr>
             <a:picLocks noChangeAspect="1"/>
           </p:cNvPicPr>
@@ -2423,8 +1854,8 @@
         </p:blipFill>
         <p:spPr>
           <a:xfrm>
-            <a:off x="867966" y="2837855"/>
-            <a:ext cx="192881" cy="171450"/>
+            <a:off x="0" y="0"/>
+            <a:ext cx="9144000" cy="5143500"/>
           </a:xfrm>
           <a:prstGeom prst="rect">
             <a:avLst/>
@@ -2433,40 +1864,154 @@
       </p:pic>
       <p:sp>
         <p:nvSpPr>
-          <p:cNvPr id="13" name="Text 8"/>
-          <p:cNvSpPr/>
-          <p:nvPr/>
-        </p:nvSpPr>
-        <p:spPr>
-          <a:xfrm>
-            <a:off x="1214438" y="2675334"/>
-            <a:ext cx="2314575" cy="678656"/>
-          </a:xfrm>
-          <a:prstGeom prst="rect">
-            <a:avLst/>
-          </a:prstGeom>
-          <a:noFill/>
-          <a:ln/>
-        </p:spPr>
-        <p:txBody>
-          <a:bodyPr wrap="square" lIns="170053" tIns="170053" rIns="170053" bIns="170053" rtlCol="0" anchor="t">
-            <a:spAutoFit/>
-          </a:bodyPr>
-          <a:lstStyle/>
-          <a:p>
-            <a:pPr algn="l" indent="0" marL="0">
-              <a:buNone/>
-            </a:pPr>
-            <a:r>
-              <a:rPr lang="en-US" sz="900" b="1" dirty="0">
-                <a:solidFill>
-                  <a:srgbClr val="E63946"/>
+          <p:cNvPr id="3" name="Text 0"/>
+          <p:cNvSpPr/>
+          <p:nvPr/>
+        </p:nvSpPr>
+        <p:spPr>
+          <a:xfrm>
+            <a:off x="6527602" y="428625"/>
+            <a:ext cx="1902023" cy="1714500"/>
+          </a:xfrm>
+          <a:prstGeom prst="rect">
+            <a:avLst/>
+          </a:prstGeom>
+          <a:noFill/>
+          <a:ln/>
+        </p:spPr>
+        <p:txBody>
+          <a:bodyPr wrap="none" lIns="0" tIns="0" rIns="0" bIns="0" rtlCol="0" anchor="t">
+            <a:spAutoFit/>
+          </a:bodyPr>
+          <a:lstStyle/>
+          <a:p>
+            <a:pPr marL="0" indent="0" algn="l">
+              <a:lnSpc>
+                <a:spcPct val="80000"/>
+              </a:lnSpc>
+              <a:buNone/>
+            </a:pPr>
+            <a:r>
+              <a:rPr lang="en-US" sz="12450" b="1" dirty="0">
+                <a:solidFill>
+                  <a:srgbClr val="212529">
+                    <a:alpha val="5000"/>
+                  </a:srgbClr>
                 </a:solidFill>
                 <a:latin typeface="Montserrat Black" pitchFamily="34" charset="0"/>
                 <a:ea typeface="Montserrat Black" pitchFamily="34" charset="-122"/>
                 <a:cs typeface="Montserrat Black" pitchFamily="34" charset="-120"/>
               </a:rPr>
-              <a:t>Saturação do Banco</a:t>
+              <a:t>10</a:t>
+            </a:r>
+            <a:endParaRPr lang="en-US" sz="12450" dirty="0"/>
+          </a:p>
+        </p:txBody>
+      </p:sp>
+      <p:sp>
+        <p:nvSpPr>
+          <p:cNvPr id="4" name="Text 1"/>
+          <p:cNvSpPr/>
+          <p:nvPr/>
+        </p:nvSpPr>
+        <p:spPr>
+          <a:xfrm>
+            <a:off x="714375" y="714375"/>
+            <a:ext cx="7715250" cy="557213"/>
+          </a:xfrm>
+          <a:prstGeom prst="rect">
+            <a:avLst/>
+          </a:prstGeom>
+          <a:noFill/>
+          <a:ln/>
+        </p:spPr>
+        <p:txBody>
+          <a:bodyPr wrap="square" lIns="0" tIns="0" rIns="0" bIns="0" rtlCol="0" anchor="t">
+            <a:spAutoFit/>
+          </a:bodyPr>
+          <a:lstStyle/>
+          <a:p>
+            <a:pPr marL="0" indent="0" algn="l">
+              <a:buNone/>
+            </a:pPr>
+            <a:r>
+              <a:rPr lang="en-US" sz="3300" b="1" dirty="0">
+                <a:solidFill>
+                  <a:srgbClr val="212529"/>
+                </a:solidFill>
+                <a:latin typeface="Montserrat Black" pitchFamily="34" charset="0"/>
+                <a:ea typeface="Montserrat Black" pitchFamily="34" charset="-122"/>
+                <a:cs typeface="Montserrat Black" pitchFamily="34" charset="-120"/>
+              </a:rPr>
+              <a:t>RISCOS E MITIGAÇÃO</a:t>
+            </a:r>
+            <a:endParaRPr lang="en-US" sz="3300" dirty="0"/>
+          </a:p>
+        </p:txBody>
+      </p:sp>
+      <p:sp>
+        <p:nvSpPr>
+          <p:cNvPr id="5" name="Shape 2"/>
+          <p:cNvSpPr/>
+          <p:nvPr/>
+        </p:nvSpPr>
+        <p:spPr>
+          <a:xfrm>
+            <a:off x="714375" y="1557338"/>
+            <a:ext cx="2814638" cy="442913"/>
+          </a:xfrm>
+          <a:prstGeom prst="rect">
+            <a:avLst/>
+          </a:prstGeom>
+          <a:solidFill>
+            <a:srgbClr val="212529"/>
+          </a:solidFill>
+          <a:ln/>
+        </p:spPr>
+        <p:txBody>
+          <a:bodyPr/>
+          <a:lstStyle/>
+          <a:p>
+            <a:endParaRPr lang="pt-BR"/>
+          </a:p>
+        </p:txBody>
+      </p:sp>
+      <p:sp>
+        <p:nvSpPr>
+          <p:cNvPr id="6" name="Text 3"/>
+          <p:cNvSpPr/>
+          <p:nvPr/>
+        </p:nvSpPr>
+        <p:spPr>
+          <a:xfrm>
+            <a:off x="714375" y="1557338"/>
+            <a:ext cx="2814638" cy="442913"/>
+          </a:xfrm>
+          <a:prstGeom prst="rect">
+            <a:avLst/>
+          </a:prstGeom>
+          <a:noFill/>
+          <a:ln/>
+        </p:spPr>
+        <p:txBody>
+          <a:bodyPr wrap="square" lIns="170053" tIns="170053" rIns="170053" bIns="170053" rtlCol="0" anchor="ctr">
+            <a:spAutoFit/>
+          </a:bodyPr>
+          <a:lstStyle/>
+          <a:p>
+            <a:pPr marL="0" indent="0" algn="l">
+              <a:buNone/>
+            </a:pPr>
+            <a:r>
+              <a:rPr lang="en-US" sz="900" b="1" kern="0" spc="1" dirty="0">
+                <a:solidFill>
+                  <a:srgbClr val="F8F9FA"/>
+                </a:solidFill>
+                <a:latin typeface="Montserrat Black" pitchFamily="34" charset="0"/>
+                <a:ea typeface="Montserrat Black" pitchFamily="34" charset="-122"/>
+                <a:cs typeface="Montserrat Black" pitchFamily="34" charset="-120"/>
+              </a:rPr>
+              <a:t>RISCO IDENTIFICADO</a:t>
             </a:r>
             <a:endParaRPr lang="en-US" sz="900" dirty="0"/>
           </a:p>
@@ -2474,51 +2019,75 @@
       </p:sp>
       <p:sp>
         <p:nvSpPr>
-          <p:cNvPr id="14" name="Text 9"/>
-          <p:cNvSpPr/>
-          <p:nvPr/>
-        </p:nvSpPr>
-        <p:spPr>
-          <a:xfrm>
-            <a:off x="3529013" y="2675334"/>
-            <a:ext cx="4900613" cy="678656"/>
-          </a:xfrm>
-          <a:prstGeom prst="rect">
-            <a:avLst/>
-          </a:prstGeom>
-          <a:noFill/>
-          <a:ln/>
-        </p:spPr>
-        <p:txBody>
-          <a:bodyPr wrap="square" lIns="170053" tIns="170053" rIns="170053" bIns="170053" rtlCol="0" anchor="t">
-            <a:spAutoFit/>
-          </a:bodyPr>
-          <a:lstStyle/>
-          <a:p>
-            <a:pPr algn="l" indent="0" marL="0">
-              <a:lnSpc>
-                <a:spcPct val="120000"/>
-              </a:lnSpc>
-              <a:buNone/>
-            </a:pPr>
-            <a:r>
-              <a:rPr lang="en-US" sz="950" dirty="0">
-                <a:solidFill>
-                  <a:srgbClr val="212529"/>
-                </a:solidFill>
-                <a:latin typeface="Montserrat Medium" pitchFamily="34" charset="0"/>
-                <a:ea typeface="Montserrat Medium" pitchFamily="34" charset="-122"/>
-                <a:cs typeface="Montserrat Medium" pitchFamily="34" charset="-120"/>
-              </a:rPr>
-              <a:t>Uso intensivo de Cache Redis para leituras e escalabilidade vertical/horizontal do SQL Server conforme demanda.</a:t>
-            </a:r>
-            <a:endParaRPr lang="en-US" sz="950" dirty="0"/>
+          <p:cNvPr id="7" name="Shape 4"/>
+          <p:cNvSpPr/>
+          <p:nvPr/>
+        </p:nvSpPr>
+        <p:spPr>
+          <a:xfrm>
+            <a:off x="3529013" y="1557338"/>
+            <a:ext cx="4900613" cy="442913"/>
+          </a:xfrm>
+          <a:prstGeom prst="rect">
+            <a:avLst/>
+          </a:prstGeom>
+          <a:solidFill>
+            <a:srgbClr val="212529"/>
+          </a:solidFill>
+          <a:ln/>
+        </p:spPr>
+        <p:txBody>
+          <a:bodyPr/>
+          <a:lstStyle/>
+          <a:p>
+            <a:endParaRPr lang="pt-BR"/>
+          </a:p>
+        </p:txBody>
+      </p:sp>
+      <p:sp>
+        <p:nvSpPr>
+          <p:cNvPr id="8" name="Text 5"/>
+          <p:cNvSpPr/>
+          <p:nvPr/>
+        </p:nvSpPr>
+        <p:spPr>
+          <a:xfrm>
+            <a:off x="3529013" y="1557338"/>
+            <a:ext cx="4900613" cy="442913"/>
+          </a:xfrm>
+          <a:prstGeom prst="rect">
+            <a:avLst/>
+          </a:prstGeom>
+          <a:noFill/>
+          <a:ln/>
+        </p:spPr>
+        <p:txBody>
+          <a:bodyPr wrap="square" lIns="170053" tIns="170053" rIns="170053" bIns="170053" rtlCol="0" anchor="ctr">
+            <a:spAutoFit/>
+          </a:bodyPr>
+          <a:lstStyle/>
+          <a:p>
+            <a:pPr marL="0" indent="0" algn="l">
+              <a:buNone/>
+            </a:pPr>
+            <a:r>
+              <a:rPr lang="en-US" sz="900" b="1" kern="0" spc="1" dirty="0">
+                <a:solidFill>
+                  <a:srgbClr val="F8F9FA"/>
+                </a:solidFill>
+                <a:latin typeface="Montserrat Black" pitchFamily="34" charset="0"/>
+                <a:ea typeface="Montserrat Black" pitchFamily="34" charset="-122"/>
+                <a:cs typeface="Montserrat Black" pitchFamily="34" charset="-120"/>
+              </a:rPr>
+              <a:t>ESTRATÉGIA DE MITIGAÇÃO</a:t>
+            </a:r>
+            <a:endParaRPr lang="en-US" sz="900" dirty="0"/>
           </a:p>
         </p:txBody>
       </p:sp>
       <p:pic>
         <p:nvPicPr>
-          <p:cNvPr id="15" name="Image 3" descr="preencoded.png">    </p:cNvPr>
+          <p:cNvPr id="9" name="Image 1" descr="preencoded.png"/>
           <p:cNvPicPr>
             <a:picLocks noChangeAspect="1"/>
           </p:cNvPicPr>
@@ -2532,8 +2101,8 @@
         </p:blipFill>
         <p:spPr>
           <a:xfrm>
-            <a:off x="867966" y="3516511"/>
-            <a:ext cx="192881" cy="171450"/>
+            <a:off x="878681" y="2159198"/>
+            <a:ext cx="171450" cy="171450"/>
           </a:xfrm>
           <a:prstGeom prst="rect">
             <a:avLst/>
@@ -2542,14 +2111,14 @@
       </p:pic>
       <p:sp>
         <p:nvSpPr>
-          <p:cNvPr id="16" name="Text 10"/>
-          <p:cNvSpPr/>
-          <p:nvPr/>
-        </p:nvSpPr>
-        <p:spPr>
-          <a:xfrm>
-            <a:off x="1214438" y="3353991"/>
-            <a:ext cx="2314575" cy="678656"/>
+          <p:cNvPr id="10" name="Text 6"/>
+          <p:cNvSpPr/>
+          <p:nvPr/>
+        </p:nvSpPr>
+        <p:spPr>
+          <a:xfrm>
+            <a:off x="1214438" y="2000250"/>
+            <a:ext cx="2314575" cy="675084"/>
           </a:xfrm>
           <a:prstGeom prst="rect">
             <a:avLst/>
@@ -2563,7 +2132,7 @@
           </a:bodyPr>
           <a:lstStyle/>
           <a:p>
-            <a:pPr algn="l" indent="0" marL="0">
+            <a:pPr marL="0" indent="0" algn="l">
               <a:buNone/>
             </a:pPr>
             <a:r>
@@ -2575,7 +2144,7 @@
                 <a:ea typeface="Montserrat Black" pitchFamily="34" charset="-122"/>
                 <a:cs typeface="Montserrat Black" pitchFamily="34" charset="-120"/>
               </a:rPr>
-              <a:t>Complexidade Distribuída</a:t>
+              <a:t>Inconsistência Eventual</a:t>
             </a:r>
             <a:endParaRPr lang="en-US" sz="900" dirty="0"/>
           </a:p>
@@ -2583,14 +2152,14 @@
       </p:sp>
       <p:sp>
         <p:nvSpPr>
-          <p:cNvPr id="17" name="Text 11"/>
-          <p:cNvSpPr/>
-          <p:nvPr/>
-        </p:nvSpPr>
-        <p:spPr>
-          <a:xfrm>
-            <a:off x="3529013" y="3353991"/>
-            <a:ext cx="4900613" cy="678656"/>
+          <p:cNvPr id="11" name="Text 7"/>
+          <p:cNvSpPr/>
+          <p:nvPr/>
+        </p:nvSpPr>
+        <p:spPr>
+          <a:xfrm>
+            <a:off x="3529013" y="2000250"/>
+            <a:ext cx="4900613" cy="675084"/>
           </a:xfrm>
           <a:prstGeom prst="rect">
             <a:avLst/>
@@ -2604,7 +2173,7 @@
           </a:bodyPr>
           <a:lstStyle/>
           <a:p>
-            <a:pPr algn="l" indent="0" marL="0">
+            <a:pPr marL="0" indent="0" algn="l">
               <a:lnSpc>
                 <a:spcPct val="120000"/>
               </a:lnSpc>
@@ -2619,7 +2188,7 @@
                 <a:ea typeface="Montserrat Medium" pitchFamily="34" charset="-122"/>
                 <a:cs typeface="Montserrat Medium" pitchFamily="34" charset="-120"/>
               </a:rPr>
-              <a:t>Adoção de Clean Architecture estrita, padronização de contratos via Swagger e automação completa de CI/CD.</a:t>
+              <a:t>Implementação de UPSERT atômico no banco de dados e futura adoção do Outbox Pattern para garantir entrega "at-least-once".</a:t>
             </a:r>
             <a:endParaRPr lang="en-US" sz="950" dirty="0"/>
           </a:p>
@@ -2627,7 +2196,7 @@
       </p:sp>
       <p:pic>
         <p:nvPicPr>
-          <p:cNvPr id="18" name="Image 4" descr="preencoded.png">    </p:cNvPr>
+          <p:cNvPr id="12" name="Image 2" descr="preencoded.png"/>
           <p:cNvPicPr>
             <a:picLocks noChangeAspect="1"/>
           </p:cNvPicPr>
@@ -2641,8 +2210,8 @@
         </p:blipFill>
         <p:spPr>
           <a:xfrm>
-            <a:off x="857250" y="4195167"/>
-            <a:ext cx="214313" cy="171450"/>
+            <a:off x="867966" y="2837855"/>
+            <a:ext cx="192881" cy="171450"/>
           </a:xfrm>
           <a:prstGeom prst="rect">
             <a:avLst/>
@@ -2651,13 +2220,13 @@
       </p:pic>
       <p:sp>
         <p:nvSpPr>
-          <p:cNvPr id="19" name="Text 12"/>
-          <p:cNvSpPr/>
-          <p:nvPr/>
-        </p:nvSpPr>
-        <p:spPr>
-          <a:xfrm>
-            <a:off x="1214438" y="4032647"/>
+          <p:cNvPr id="13" name="Text 8"/>
+          <p:cNvSpPr/>
+          <p:nvPr/>
+        </p:nvSpPr>
+        <p:spPr>
+          <a:xfrm>
+            <a:off x="1214438" y="2675334"/>
             <a:ext cx="2314575" cy="678656"/>
           </a:xfrm>
           <a:prstGeom prst="rect">
@@ -2672,7 +2241,7 @@
           </a:bodyPr>
           <a:lstStyle/>
           <a:p>
-            <a:pPr algn="l" indent="0" marL="0">
+            <a:pPr marL="0" indent="0" algn="l">
               <a:buNone/>
             </a:pPr>
             <a:r>
@@ -2684,6 +2253,224 @@
                 <a:ea typeface="Montserrat Black" pitchFamily="34" charset="-122"/>
                 <a:cs typeface="Montserrat Black" pitchFamily="34" charset="-120"/>
               </a:rPr>
+              <a:t>Saturação do Banco</a:t>
+            </a:r>
+            <a:endParaRPr lang="en-US" sz="900" dirty="0"/>
+          </a:p>
+        </p:txBody>
+      </p:sp>
+      <p:sp>
+        <p:nvSpPr>
+          <p:cNvPr id="14" name="Text 9"/>
+          <p:cNvSpPr/>
+          <p:nvPr/>
+        </p:nvSpPr>
+        <p:spPr>
+          <a:xfrm>
+            <a:off x="3529013" y="2675334"/>
+            <a:ext cx="4900613" cy="678656"/>
+          </a:xfrm>
+          <a:prstGeom prst="rect">
+            <a:avLst/>
+          </a:prstGeom>
+          <a:noFill/>
+          <a:ln/>
+        </p:spPr>
+        <p:txBody>
+          <a:bodyPr wrap="square" lIns="170053" tIns="170053" rIns="170053" bIns="170053" rtlCol="0" anchor="t">
+            <a:spAutoFit/>
+          </a:bodyPr>
+          <a:lstStyle/>
+          <a:p>
+            <a:pPr marL="0" indent="0" algn="l">
+              <a:lnSpc>
+                <a:spcPct val="120000"/>
+              </a:lnSpc>
+              <a:buNone/>
+            </a:pPr>
+            <a:r>
+              <a:rPr lang="en-US" sz="950" dirty="0">
+                <a:solidFill>
+                  <a:srgbClr val="212529"/>
+                </a:solidFill>
+                <a:latin typeface="Montserrat Medium" pitchFamily="34" charset="0"/>
+                <a:ea typeface="Montserrat Medium" pitchFamily="34" charset="-122"/>
+                <a:cs typeface="Montserrat Medium" pitchFamily="34" charset="-120"/>
+              </a:rPr>
+              <a:t>Uso intensivo de Cache Redis para leituras e escalabilidade vertical/horizontal do SQL Server conforme demanda.</a:t>
+            </a:r>
+            <a:endParaRPr lang="en-US" sz="950" dirty="0"/>
+          </a:p>
+        </p:txBody>
+      </p:sp>
+      <p:pic>
+        <p:nvPicPr>
+          <p:cNvPr id="15" name="Image 3" descr="preencoded.png"/>
+          <p:cNvPicPr>
+            <a:picLocks noChangeAspect="1"/>
+          </p:cNvPicPr>
+          <p:nvPr/>
+        </p:nvPicPr>
+        <p:blipFill>
+          <a:blip r:embed="rId6"/>
+          <a:stretch>
+            <a:fillRect/>
+          </a:stretch>
+        </p:blipFill>
+        <p:spPr>
+          <a:xfrm>
+            <a:off x="867966" y="3516511"/>
+            <a:ext cx="192881" cy="171450"/>
+          </a:xfrm>
+          <a:prstGeom prst="rect">
+            <a:avLst/>
+          </a:prstGeom>
+        </p:spPr>
+      </p:pic>
+      <p:sp>
+        <p:nvSpPr>
+          <p:cNvPr id="16" name="Text 10"/>
+          <p:cNvSpPr/>
+          <p:nvPr/>
+        </p:nvSpPr>
+        <p:spPr>
+          <a:xfrm>
+            <a:off x="1214438" y="3353991"/>
+            <a:ext cx="2314575" cy="678656"/>
+          </a:xfrm>
+          <a:prstGeom prst="rect">
+            <a:avLst/>
+          </a:prstGeom>
+          <a:noFill/>
+          <a:ln/>
+        </p:spPr>
+        <p:txBody>
+          <a:bodyPr wrap="square" lIns="170053" tIns="170053" rIns="170053" bIns="170053" rtlCol="0" anchor="t">
+            <a:spAutoFit/>
+          </a:bodyPr>
+          <a:lstStyle/>
+          <a:p>
+            <a:pPr marL="0" indent="0" algn="l">
+              <a:buNone/>
+            </a:pPr>
+            <a:r>
+              <a:rPr lang="en-US" sz="900" b="1" dirty="0">
+                <a:solidFill>
+                  <a:srgbClr val="E63946"/>
+                </a:solidFill>
+                <a:latin typeface="Montserrat Black" pitchFamily="34" charset="0"/>
+                <a:ea typeface="Montserrat Black" pitchFamily="34" charset="-122"/>
+                <a:cs typeface="Montserrat Black" pitchFamily="34" charset="-120"/>
+              </a:rPr>
+              <a:t>Complexidade Distribuída</a:t>
+            </a:r>
+            <a:endParaRPr lang="en-US" sz="900" dirty="0"/>
+          </a:p>
+        </p:txBody>
+      </p:sp>
+      <p:sp>
+        <p:nvSpPr>
+          <p:cNvPr id="17" name="Text 11"/>
+          <p:cNvSpPr/>
+          <p:nvPr/>
+        </p:nvSpPr>
+        <p:spPr>
+          <a:xfrm>
+            <a:off x="3529013" y="3353991"/>
+            <a:ext cx="4900613" cy="678656"/>
+          </a:xfrm>
+          <a:prstGeom prst="rect">
+            <a:avLst/>
+          </a:prstGeom>
+          <a:noFill/>
+          <a:ln/>
+        </p:spPr>
+        <p:txBody>
+          <a:bodyPr wrap="square" lIns="170053" tIns="170053" rIns="170053" bIns="170053" rtlCol="0" anchor="t">
+            <a:spAutoFit/>
+          </a:bodyPr>
+          <a:lstStyle/>
+          <a:p>
+            <a:pPr marL="0" indent="0" algn="l">
+              <a:lnSpc>
+                <a:spcPct val="120000"/>
+              </a:lnSpc>
+              <a:buNone/>
+            </a:pPr>
+            <a:r>
+              <a:rPr lang="en-US" sz="950" dirty="0">
+                <a:solidFill>
+                  <a:srgbClr val="212529"/>
+                </a:solidFill>
+                <a:latin typeface="Montserrat Medium" pitchFamily="34" charset="0"/>
+                <a:ea typeface="Montserrat Medium" pitchFamily="34" charset="-122"/>
+                <a:cs typeface="Montserrat Medium" pitchFamily="34" charset="-120"/>
+              </a:rPr>
+              <a:t>Adoção de Clean Architecture estrita, padronização de contratos via Swagger e automação completa de CI/CD.</a:t>
+            </a:r>
+            <a:endParaRPr lang="en-US" sz="950" dirty="0"/>
+          </a:p>
+        </p:txBody>
+      </p:sp>
+      <p:pic>
+        <p:nvPicPr>
+          <p:cNvPr id="18" name="Image 4" descr="preencoded.png"/>
+          <p:cNvPicPr>
+            <a:picLocks noChangeAspect="1"/>
+          </p:cNvPicPr>
+          <p:nvPr/>
+        </p:nvPicPr>
+        <p:blipFill>
+          <a:blip r:embed="rId7"/>
+          <a:stretch>
+            <a:fillRect/>
+          </a:stretch>
+        </p:blipFill>
+        <p:spPr>
+          <a:xfrm>
+            <a:off x="857250" y="4195167"/>
+            <a:ext cx="214313" cy="171450"/>
+          </a:xfrm>
+          <a:prstGeom prst="rect">
+            <a:avLst/>
+          </a:prstGeom>
+        </p:spPr>
+      </p:pic>
+      <p:sp>
+        <p:nvSpPr>
+          <p:cNvPr id="19" name="Text 12"/>
+          <p:cNvSpPr/>
+          <p:nvPr/>
+        </p:nvSpPr>
+        <p:spPr>
+          <a:xfrm>
+            <a:off x="1214438" y="4032647"/>
+            <a:ext cx="2314575" cy="678656"/>
+          </a:xfrm>
+          <a:prstGeom prst="rect">
+            <a:avLst/>
+          </a:prstGeom>
+          <a:noFill/>
+          <a:ln/>
+        </p:spPr>
+        <p:txBody>
+          <a:bodyPr wrap="square" lIns="170053" tIns="170053" rIns="170053" bIns="170053" rtlCol="0" anchor="t">
+            <a:spAutoFit/>
+          </a:bodyPr>
+          <a:lstStyle/>
+          <a:p>
+            <a:pPr marL="0" indent="0" algn="l">
+              <a:buNone/>
+            </a:pPr>
+            <a:r>
+              <a:rPr lang="en-US" sz="900" b="1" dirty="0">
+                <a:solidFill>
+                  <a:srgbClr val="E63946"/>
+                </a:solidFill>
+                <a:latin typeface="Montserrat Black" pitchFamily="34" charset="0"/>
+                <a:ea typeface="Montserrat Black" pitchFamily="34" charset="-122"/>
+                <a:cs typeface="Montserrat Black" pitchFamily="34" charset="-120"/>
+              </a:rPr>
               <a:t>Vazamento de Dados</a:t>
             </a:r>
             <a:endParaRPr lang="en-US" sz="900" dirty="0"/>
@@ -2713,7 +2500,7 @@
           </a:bodyPr>
           <a:lstStyle/>
           <a:p>
-            <a:pPr algn="l" indent="0" marL="0">
+            <a:pPr marL="0" indent="0" algn="l">
               <a:lnSpc>
                 <a:spcPct val="120000"/>
               </a:lnSpc>
@@ -2761,224 +2548,7 @@
       </p:grpSpPr>
       <p:pic>
         <p:nvPicPr>
-          <p:cNvPr id="2" name="Image 0" descr="preencoded.png">    </p:cNvPr>
-          <p:cNvPicPr>
-            <a:picLocks noChangeAspect="1"/>
-          </p:cNvPicPr>
-          <p:nvPr/>
-        </p:nvPicPr>
-        <p:blipFill>
-          <a:blip r:embed="rId1"/>
-          <a:stretch>
-            <a:fillRect/>
-          </a:stretch>
-        </p:blipFill>
-        <p:spPr>
-          <a:xfrm>
-            <a:off x="0" y="0"/>
-            <a:ext cx="9144000" cy="5143500"/>
-          </a:xfrm>
-          <a:prstGeom prst="rect">
-            <a:avLst/>
-          </a:prstGeom>
-        </p:spPr>
-      </p:pic>
-      <p:sp>
-        <p:nvSpPr>
-          <p:cNvPr id="3" name="Text 0"/>
-          <p:cNvSpPr/>
-          <p:nvPr/>
-        </p:nvSpPr>
-        <p:spPr>
-          <a:xfrm>
-            <a:off x="6997303" y="428625"/>
-            <a:ext cx="1432322" cy="1714500"/>
-          </a:xfrm>
-          <a:prstGeom prst="rect">
-            <a:avLst/>
-          </a:prstGeom>
-          <a:noFill/>
-          <a:ln/>
-        </p:spPr>
-        <p:txBody>
-          <a:bodyPr wrap="none" lIns="0" tIns="0" rIns="0" bIns="0" rtlCol="0" anchor="t">
-            <a:spAutoFit/>
-          </a:bodyPr>
-          <a:lstStyle/>
-          <a:p>
-            <a:pPr algn="l" indent="0" marL="0">
-              <a:lnSpc>
-                <a:spcPct val="80000"/>
-              </a:lnSpc>
-              <a:buNone/>
-            </a:pPr>
-            <a:r>
-              <a:rPr lang="en-US" sz="12450" b="1" dirty="0">
-                <a:solidFill>
-                  <a:srgbClr val="212529">
-                    <a:alpha val="5000"/>
-                  </a:srgbClr>
-                </a:solidFill>
-                <a:latin typeface="Montserrat Black" pitchFamily="34" charset="0"/>
-                <a:ea typeface="Montserrat Black" pitchFamily="34" charset="-122"/>
-                <a:cs typeface="Montserrat Black" pitchFamily="34" charset="-120"/>
-              </a:rPr>
-              <a:t>11</a:t>
-            </a:r>
-            <a:endParaRPr lang="en-US" sz="12450" dirty="0"/>
-          </a:p>
-        </p:txBody>
-      </p:sp>
-      <p:sp>
-        <p:nvSpPr>
-          <p:cNvPr id="4" name="Text 1"/>
-          <p:cNvSpPr/>
-          <p:nvPr/>
-        </p:nvSpPr>
-        <p:spPr>
-          <a:xfrm>
-            <a:off x="714375" y="714375"/>
-            <a:ext cx="7715250" cy="557213"/>
-          </a:xfrm>
-          <a:prstGeom prst="rect">
-            <a:avLst/>
-          </a:prstGeom>
-          <a:noFill/>
-          <a:ln/>
-        </p:spPr>
-        <p:txBody>
-          <a:bodyPr wrap="square" lIns="0" tIns="0" rIns="0" bIns="0" rtlCol="0" anchor="t">
-            <a:spAutoFit/>
-          </a:bodyPr>
-          <a:lstStyle/>
-          <a:p>
-            <a:pPr algn="l" indent="0" marL="0">
-              <a:buNone/>
-            </a:pPr>
-            <a:r>
-              <a:rPr lang="en-US" sz="3300" b="1" dirty="0">
-                <a:solidFill>
-                  <a:srgbClr val="212529"/>
-                </a:solidFill>
-                <a:latin typeface="Montserrat Black" pitchFamily="34" charset="0"/>
-                <a:ea typeface="Montserrat Black" pitchFamily="34" charset="-122"/>
-                <a:cs typeface="Montserrat Black" pitchFamily="34" charset="-120"/>
-              </a:rPr>
-              <a:t>CONCLUSÃO E ROADMAP</a:t>
-            </a:r>
-            <a:endParaRPr lang="en-US" sz="3300" dirty="0"/>
-          </a:p>
-        </p:txBody>
-      </p:sp>
-      <p:sp>
-        <p:nvSpPr>
-          <p:cNvPr id="5" name="Text 2"/>
-          <p:cNvSpPr/>
-          <p:nvPr/>
-        </p:nvSpPr>
-        <p:spPr>
-          <a:xfrm>
-            <a:off x="714375" y="1557338"/>
-            <a:ext cx="1903809" cy="364331"/>
-          </a:xfrm>
-          <a:prstGeom prst="rect">
-            <a:avLst/>
-          </a:prstGeom>
-          <a:noFill/>
-          <a:ln/>
-        </p:spPr>
-        <p:txBody>
-          <a:bodyPr wrap="square" lIns="0" tIns="0" rIns="0" bIns="85090" rtlCol="0" anchor="t">
-            <a:spAutoFit/>
-          </a:bodyPr>
-          <a:lstStyle/>
-          <a:p>
-            <a:pPr algn="l" indent="0" marL="0">
-              <a:buNone/>
-            </a:pPr>
-            <a:r>
-              <a:rPr lang="en-US" sz="1600" b="1" dirty="0">
-                <a:solidFill>
-                  <a:srgbClr val="E63946"/>
-                </a:solidFill>
-                <a:latin typeface="Montserrat Black" pitchFamily="34" charset="0"/>
-                <a:ea typeface="Montserrat Black" pitchFamily="34" charset="-122"/>
-                <a:cs typeface="Montserrat Black" pitchFamily="34" charset="-120"/>
-              </a:rPr>
-              <a:t>ESTADO ATUAL</a:t>
-            </a:r>
-            <a:endParaRPr lang="en-US" sz="1600" dirty="0"/>
-          </a:p>
-        </p:txBody>
-      </p:sp>
-      <p:pic>
-        <p:nvPicPr>
-          <p:cNvPr id="6" name="Image 1" descr="preencoded.png">    </p:cNvPr>
-          <p:cNvPicPr>
-            <a:picLocks noChangeAspect="1"/>
-          </p:cNvPicPr>
-          <p:nvPr/>
-        </p:nvPicPr>
-        <p:blipFill>
-          <a:blip r:embed="rId2"/>
-          <a:stretch>
-            <a:fillRect/>
-          </a:stretch>
-        </p:blipFill>
-        <p:spPr>
-          <a:xfrm>
-            <a:off x="714375" y="2145804"/>
-            <a:ext cx="171450" cy="171450"/>
-          </a:xfrm>
-          <a:prstGeom prst="rect">
-            <a:avLst/>
-          </a:prstGeom>
-        </p:spPr>
-      </p:pic>
-      <p:sp>
-        <p:nvSpPr>
-          <p:cNvPr id="7" name="Text 3"/>
-          <p:cNvSpPr/>
-          <p:nvPr/>
-        </p:nvSpPr>
-        <p:spPr>
-          <a:xfrm>
-            <a:off x="992981" y="2135981"/>
-            <a:ext cx="2369939" cy="191095"/>
-          </a:xfrm>
-          <a:prstGeom prst="rect">
-            <a:avLst/>
-          </a:prstGeom>
-          <a:noFill/>
-          <a:ln/>
-        </p:spPr>
-        <p:txBody>
-          <a:bodyPr wrap="square" lIns="0" tIns="0" rIns="0" bIns="0" rtlCol="0" anchor="t">
-            <a:spAutoFit/>
-          </a:bodyPr>
-          <a:lstStyle/>
-          <a:p>
-            <a:pPr algn="l" indent="0" marL="0">
-              <a:buNone/>
-            </a:pPr>
-            <a:r>
-              <a:rPr lang="en-US" sz="1150" dirty="0">
-                <a:solidFill>
-                  <a:srgbClr val="495057"/>
-                </a:solidFill>
-                <a:latin typeface="Montserrat Medium" pitchFamily="34" charset="0"/>
-                <a:ea typeface="Montserrat Medium" pitchFamily="34" charset="-122"/>
-                <a:cs typeface="Montserrat Medium" pitchFamily="34" charset="-120"/>
-              </a:rPr>
-              <a:t>Arquitetura de Microsserviços</a:t>
-            </a:r>
-            <a:endParaRPr lang="en-US" sz="1150" dirty="0"/>
-          </a:p>
-        </p:txBody>
-      </p:sp>
-      <p:pic>
-        <p:nvPicPr>
-          <p:cNvPr id="8" name="Image 2" descr="preencoded.png">    </p:cNvPr>
+          <p:cNvPr id="2" name="Image 0" descr="preencoded.png"/>
           <p:cNvPicPr>
             <a:picLocks noChangeAspect="1"/>
           </p:cNvPicPr>
@@ -2992,8 +2562,8 @@
         </p:blipFill>
         <p:spPr>
           <a:xfrm>
-            <a:off x="714375" y="2479774"/>
-            <a:ext cx="171450" cy="171450"/>
+            <a:off x="0" y="0"/>
+            <a:ext cx="9144000" cy="5143500"/>
           </a:xfrm>
           <a:prstGeom prst="rect">
             <a:avLst/>
@@ -3002,14 +2572,60 @@
       </p:pic>
       <p:sp>
         <p:nvSpPr>
-          <p:cNvPr id="9" name="Text 4"/>
-          <p:cNvSpPr/>
-          <p:nvPr/>
-        </p:nvSpPr>
-        <p:spPr>
-          <a:xfrm>
-            <a:off x="992981" y="2469952"/>
-            <a:ext cx="2523530" cy="191095"/>
+          <p:cNvPr id="3" name="Text 0"/>
+          <p:cNvSpPr/>
+          <p:nvPr/>
+        </p:nvSpPr>
+        <p:spPr>
+          <a:xfrm>
+            <a:off x="6997303" y="428625"/>
+            <a:ext cx="1432322" cy="1714500"/>
+          </a:xfrm>
+          <a:prstGeom prst="rect">
+            <a:avLst/>
+          </a:prstGeom>
+          <a:noFill/>
+          <a:ln/>
+        </p:spPr>
+        <p:txBody>
+          <a:bodyPr wrap="none" lIns="0" tIns="0" rIns="0" bIns="0" rtlCol="0" anchor="t">
+            <a:spAutoFit/>
+          </a:bodyPr>
+          <a:lstStyle/>
+          <a:p>
+            <a:pPr marL="0" indent="0" algn="l">
+              <a:lnSpc>
+                <a:spcPct val="80000"/>
+              </a:lnSpc>
+              <a:buNone/>
+            </a:pPr>
+            <a:r>
+              <a:rPr lang="en-US" sz="12450" b="1" dirty="0">
+                <a:solidFill>
+                  <a:srgbClr val="212529">
+                    <a:alpha val="5000"/>
+                  </a:srgbClr>
+                </a:solidFill>
+                <a:latin typeface="Montserrat Black" pitchFamily="34" charset="0"/>
+                <a:ea typeface="Montserrat Black" pitchFamily="34" charset="-122"/>
+                <a:cs typeface="Montserrat Black" pitchFamily="34" charset="-120"/>
+              </a:rPr>
+              <a:t>11</a:t>
+            </a:r>
+            <a:endParaRPr lang="en-US" sz="12450" dirty="0"/>
+          </a:p>
+        </p:txBody>
+      </p:sp>
+      <p:sp>
+        <p:nvSpPr>
+          <p:cNvPr id="4" name="Text 1"/>
+          <p:cNvSpPr/>
+          <p:nvPr/>
+        </p:nvSpPr>
+        <p:spPr>
+          <a:xfrm>
+            <a:off x="714375" y="714375"/>
+            <a:ext cx="7715250" cy="557213"/>
           </a:xfrm>
           <a:prstGeom prst="rect">
             <a:avLst/>
@@ -3023,27 +2639,68 @@
           </a:bodyPr>
           <a:lstStyle/>
           <a:p>
-            <a:pPr algn="l" indent="0" marL="0">
-              <a:buNone/>
-            </a:pPr>
-            <a:r>
-              <a:rPr lang="en-US" sz="1150" dirty="0">
-                <a:solidFill>
-                  <a:srgbClr val="495057"/>
-                </a:solidFill>
-                <a:latin typeface="Montserrat Medium" pitchFamily="34" charset="0"/>
-                <a:ea typeface="Montserrat Medium" pitchFamily="34" charset="-122"/>
-                <a:cs typeface="Montserrat Medium" pitchFamily="34" charset="-120"/>
-              </a:rPr>
-              <a:t>Resiliência com RabbitMQ/DLQ</a:t>
-            </a:r>
-            <a:endParaRPr lang="en-US" sz="1150" dirty="0"/>
+            <a:pPr marL="0" indent="0" algn="l">
+              <a:buNone/>
+            </a:pPr>
+            <a:r>
+              <a:rPr lang="en-US" sz="3300" b="1" dirty="0">
+                <a:solidFill>
+                  <a:srgbClr val="212529"/>
+                </a:solidFill>
+                <a:latin typeface="Montserrat Black" pitchFamily="34" charset="0"/>
+                <a:ea typeface="Montserrat Black" pitchFamily="34" charset="-122"/>
+                <a:cs typeface="Montserrat Black" pitchFamily="34" charset="-120"/>
+              </a:rPr>
+              <a:t>CONCLUSÃO E ROADMAP</a:t>
+            </a:r>
+            <a:endParaRPr lang="en-US" sz="3300" dirty="0"/>
+          </a:p>
+        </p:txBody>
+      </p:sp>
+      <p:sp>
+        <p:nvSpPr>
+          <p:cNvPr id="5" name="Text 2"/>
+          <p:cNvSpPr/>
+          <p:nvPr/>
+        </p:nvSpPr>
+        <p:spPr>
+          <a:xfrm>
+            <a:off x="714375" y="1557338"/>
+            <a:ext cx="1903809" cy="364331"/>
+          </a:xfrm>
+          <a:prstGeom prst="rect">
+            <a:avLst/>
+          </a:prstGeom>
+          <a:noFill/>
+          <a:ln/>
+        </p:spPr>
+        <p:txBody>
+          <a:bodyPr wrap="square" lIns="0" tIns="0" rIns="0" bIns="85090" rtlCol="0" anchor="t">
+            <a:spAutoFit/>
+          </a:bodyPr>
+          <a:lstStyle/>
+          <a:p>
+            <a:pPr marL="0" indent="0" algn="l">
+              <a:buNone/>
+            </a:pPr>
+            <a:r>
+              <a:rPr lang="en-US" sz="1600" b="1" dirty="0">
+                <a:solidFill>
+                  <a:srgbClr val="E63946"/>
+                </a:solidFill>
+                <a:latin typeface="Montserrat Black" pitchFamily="34" charset="0"/>
+                <a:ea typeface="Montserrat Black" pitchFamily="34" charset="-122"/>
+                <a:cs typeface="Montserrat Black" pitchFamily="34" charset="-120"/>
+              </a:rPr>
+              <a:t>ESTADO ATUAL</a:t>
+            </a:r>
+            <a:endParaRPr lang="en-US" sz="1600" dirty="0"/>
           </a:p>
         </p:txBody>
       </p:sp>
       <p:pic>
         <p:nvPicPr>
-          <p:cNvPr id="10" name="Image 3" descr="preencoded.png">    </p:cNvPr>
+          <p:cNvPr id="6" name="Image 1" descr="preencoded.png"/>
           <p:cNvPicPr>
             <a:picLocks noChangeAspect="1"/>
           </p:cNvPicPr>
@@ -3057,7 +2714,7 @@
         </p:blipFill>
         <p:spPr>
           <a:xfrm>
-            <a:off x="714375" y="2813745"/>
+            <a:off x="714375" y="2145804"/>
             <a:ext cx="171450" cy="171450"/>
           </a:xfrm>
           <a:prstGeom prst="rect">
@@ -3067,14 +2724,14 @@
       </p:pic>
       <p:sp>
         <p:nvSpPr>
-          <p:cNvPr id="11" name="Text 5"/>
-          <p:cNvSpPr/>
-          <p:nvPr/>
-        </p:nvSpPr>
-        <p:spPr>
-          <a:xfrm>
-            <a:off x="992981" y="2803922"/>
-            <a:ext cx="2461022" cy="191095"/>
+          <p:cNvPr id="7" name="Text 3"/>
+          <p:cNvSpPr/>
+          <p:nvPr/>
+        </p:nvSpPr>
+        <p:spPr>
+          <a:xfrm>
+            <a:off x="992981" y="2135981"/>
+            <a:ext cx="2369939" cy="191095"/>
           </a:xfrm>
           <a:prstGeom prst="rect">
             <a:avLst/>
@@ -3088,7 +2745,7 @@
           </a:bodyPr>
           <a:lstStyle/>
           <a:p>
-            <a:pPr algn="l" indent="0" marL="0">
+            <a:pPr marL="0" indent="0" algn="l">
               <a:buNone/>
             </a:pPr>
             <a:r>
@@ -3100,7 +2757,7 @@
                 <a:ea typeface="Montserrat Medium" pitchFamily="34" charset="-122"/>
                 <a:cs typeface="Montserrat Medium" pitchFamily="34" charset="-120"/>
               </a:rPr>
-              <a:t>Performance com Redis Cache</a:t>
+              <a:t>Arquitetura de Microsserviços</a:t>
             </a:r>
             <a:endParaRPr lang="en-US" sz="1150" dirty="0"/>
           </a:p>
@@ -3108,7 +2765,7 @@
       </p:sp>
       <p:pic>
         <p:nvPicPr>
-          <p:cNvPr id="12" name="Image 4" descr="preencoded.png">    </p:cNvPr>
+          <p:cNvPr id="8" name="Image 2" descr="preencoded.png"/>
           <p:cNvPicPr>
             <a:picLocks noChangeAspect="1"/>
           </p:cNvPicPr>
@@ -3122,7 +2779,7 @@
         </p:blipFill>
         <p:spPr>
           <a:xfrm>
-            <a:off x="714375" y="3147715"/>
+            <a:off x="714375" y="2479774"/>
             <a:ext cx="171450" cy="171450"/>
           </a:xfrm>
           <a:prstGeom prst="rect">
@@ -3132,14 +2789,14 @@
       </p:pic>
       <p:sp>
         <p:nvSpPr>
-          <p:cNvPr id="13" name="Text 6"/>
-          <p:cNvSpPr/>
-          <p:nvPr/>
-        </p:nvSpPr>
-        <p:spPr>
-          <a:xfrm>
-            <a:off x="992981" y="3137892"/>
-            <a:ext cx="2723555" cy="191095"/>
+          <p:cNvPr id="9" name="Text 4"/>
+          <p:cNvSpPr/>
+          <p:nvPr/>
+        </p:nvSpPr>
+        <p:spPr>
+          <a:xfrm>
+            <a:off x="992981" y="2469952"/>
+            <a:ext cx="2523530" cy="191095"/>
           </a:xfrm>
           <a:prstGeom prst="rect">
             <a:avLst/>
@@ -3153,7 +2810,7 @@
           </a:bodyPr>
           <a:lstStyle/>
           <a:p>
-            <a:pPr algn="l" indent="0" marL="0">
+            <a:pPr marL="0" indent="0" algn="l">
               <a:buNone/>
             </a:pPr>
             <a:r>
@@ -3165,56 +2822,15 @@
                 <a:ea typeface="Montserrat Medium" pitchFamily="34" charset="-122"/>
                 <a:cs typeface="Montserrat Medium" pitchFamily="34" charset="-120"/>
               </a:rPr>
-              <a:t>Clean Architecture Implementada</a:t>
+              <a:t>Resiliência com RabbitMQ/DLQ</a:t>
             </a:r>
             <a:endParaRPr lang="en-US" sz="1150" dirty="0"/>
-          </a:p>
-        </p:txBody>
-      </p:sp>
-      <p:sp>
-        <p:nvSpPr>
-          <p:cNvPr id="14" name="Text 7"/>
-          <p:cNvSpPr/>
-          <p:nvPr/>
-        </p:nvSpPr>
-        <p:spPr>
-          <a:xfrm>
-            <a:off x="4786313" y="1557338"/>
-            <a:ext cx="2394942" cy="364331"/>
-          </a:xfrm>
-          <a:prstGeom prst="rect">
-            <a:avLst/>
-          </a:prstGeom>
-          <a:noFill/>
-          <a:ln/>
-        </p:spPr>
-        <p:txBody>
-          <a:bodyPr wrap="square" lIns="0" tIns="0" rIns="0" bIns="85090" rtlCol="0" anchor="t">
-            <a:spAutoFit/>
-          </a:bodyPr>
-          <a:lstStyle/>
-          <a:p>
-            <a:pPr algn="l" indent="0" marL="0">
-              <a:buNone/>
-            </a:pPr>
-            <a:r>
-              <a:rPr lang="en-US" sz="1600" b="1" dirty="0">
-                <a:solidFill>
-                  <a:srgbClr val="E63946"/>
-                </a:solidFill>
-                <a:latin typeface="Montserrat Black" pitchFamily="34" charset="0"/>
-                <a:ea typeface="Montserrat Black" pitchFamily="34" charset="-122"/>
-                <a:cs typeface="Montserrat Black" pitchFamily="34" charset="-120"/>
-              </a:rPr>
-              <a:t>PRÓXIMOS PASSOS</a:t>
-            </a:r>
-            <a:endParaRPr lang="en-US" sz="1600" dirty="0"/>
           </a:p>
         </p:txBody>
       </p:sp>
       <p:pic>
         <p:nvPicPr>
-          <p:cNvPr id="15" name="Image 5" descr="preencoded.png">    </p:cNvPr>
+          <p:cNvPr id="10" name="Image 3" descr="preencoded.png"/>
           <p:cNvPicPr>
             <a:picLocks noChangeAspect="1"/>
           </p:cNvPicPr>
@@ -3228,8 +2844,8 @@
         </p:blipFill>
         <p:spPr>
           <a:xfrm>
-            <a:off x="4786313" y="2145804"/>
-            <a:ext cx="150019" cy="171450"/>
+            <a:off x="714375" y="2813745"/>
+            <a:ext cx="171450" cy="171450"/>
           </a:xfrm>
           <a:prstGeom prst="rect">
             <a:avLst/>
@@ -3238,14 +2854,14 @@
       </p:pic>
       <p:sp>
         <p:nvSpPr>
-          <p:cNvPr id="16" name="Text 8"/>
-          <p:cNvSpPr/>
-          <p:nvPr/>
-        </p:nvSpPr>
-        <p:spPr>
-          <a:xfrm>
-            <a:off x="5043488" y="2135981"/>
-            <a:ext cx="2421731" cy="191095"/>
+          <p:cNvPr id="11" name="Text 5"/>
+          <p:cNvSpPr/>
+          <p:nvPr/>
+        </p:nvSpPr>
+        <p:spPr>
+          <a:xfrm>
+            <a:off x="992981" y="2803922"/>
+            <a:ext cx="2461022" cy="191095"/>
           </a:xfrm>
           <a:prstGeom prst="rect">
             <a:avLst/>
@@ -3259,7 +2875,7 @@
           </a:bodyPr>
           <a:lstStyle/>
           <a:p>
-            <a:pPr algn="l" indent="0" marL="0">
+            <a:pPr marL="0" indent="0" algn="l">
               <a:buNone/>
             </a:pPr>
             <a:r>
@@ -3271,7 +2887,7 @@
                 <a:ea typeface="Montserrat Medium" pitchFamily="34" charset="-122"/>
                 <a:cs typeface="Montserrat Medium" pitchFamily="34" charset="-120"/>
               </a:rPr>
-              <a:t>OAuth2/JWT &amp; WAF Completo</a:t>
+              <a:t>Performance com Redis Cache</a:t>
             </a:r>
             <a:endParaRPr lang="en-US" sz="1150" dirty="0"/>
           </a:p>
@@ -3279,7 +2895,7 @@
       </p:sp>
       <p:pic>
         <p:nvPicPr>
-          <p:cNvPr id="17" name="Image 6" descr="preencoded.png">    </p:cNvPr>
+          <p:cNvPr id="12" name="Image 4" descr="preencoded.png"/>
           <p:cNvPicPr>
             <a:picLocks noChangeAspect="1"/>
           </p:cNvPicPr>
@@ -3293,8 +2909,8 @@
         </p:blipFill>
         <p:spPr>
           <a:xfrm>
-            <a:off x="4786313" y="2479774"/>
-            <a:ext cx="150019" cy="171450"/>
+            <a:off x="714375" y="3147715"/>
+            <a:ext cx="171450" cy="171450"/>
           </a:xfrm>
           <a:prstGeom prst="rect">
             <a:avLst/>
@@ -3303,14 +2919,14 @@
       </p:pic>
       <p:sp>
         <p:nvSpPr>
-          <p:cNvPr id="18" name="Text 9"/>
-          <p:cNvSpPr/>
-          <p:nvPr/>
-        </p:nvSpPr>
-        <p:spPr>
-          <a:xfrm>
-            <a:off x="5043488" y="2469952"/>
-            <a:ext cx="2698552" cy="191095"/>
+          <p:cNvPr id="13" name="Text 6"/>
+          <p:cNvSpPr/>
+          <p:nvPr/>
+        </p:nvSpPr>
+        <p:spPr>
+          <a:xfrm>
+            <a:off x="992981" y="3137892"/>
+            <a:ext cx="2723555" cy="191095"/>
           </a:xfrm>
           <a:prstGeom prst="rect">
             <a:avLst/>
@@ -3324,7 +2940,7 @@
           </a:bodyPr>
           <a:lstStyle/>
           <a:p>
-            <a:pPr algn="l" indent="0" marL="0">
+            <a:pPr marL="0" indent="0" algn="l">
               <a:buNone/>
             </a:pPr>
             <a:r>
@@ -3336,15 +2952,56 @@
                 <a:ea typeface="Montserrat Medium" pitchFamily="34" charset="-122"/>
                 <a:cs typeface="Montserrat Medium" pitchFamily="34" charset="-120"/>
               </a:rPr>
-              <a:t>Observabilidade (OpenTelemetry)</a:t>
+              <a:t>Clean Architecture Implementada</a:t>
             </a:r>
             <a:endParaRPr lang="en-US" sz="1150" dirty="0"/>
+          </a:p>
+        </p:txBody>
+      </p:sp>
+      <p:sp>
+        <p:nvSpPr>
+          <p:cNvPr id="14" name="Text 7"/>
+          <p:cNvSpPr/>
+          <p:nvPr/>
+        </p:nvSpPr>
+        <p:spPr>
+          <a:xfrm>
+            <a:off x="4786313" y="1557338"/>
+            <a:ext cx="2394942" cy="364331"/>
+          </a:xfrm>
+          <a:prstGeom prst="rect">
+            <a:avLst/>
+          </a:prstGeom>
+          <a:noFill/>
+          <a:ln/>
+        </p:spPr>
+        <p:txBody>
+          <a:bodyPr wrap="square" lIns="0" tIns="0" rIns="0" bIns="85090" rtlCol="0" anchor="t">
+            <a:spAutoFit/>
+          </a:bodyPr>
+          <a:lstStyle/>
+          <a:p>
+            <a:pPr marL="0" indent="0" algn="l">
+              <a:buNone/>
+            </a:pPr>
+            <a:r>
+              <a:rPr lang="en-US" sz="1600" b="1" dirty="0">
+                <a:solidFill>
+                  <a:srgbClr val="E63946"/>
+                </a:solidFill>
+                <a:latin typeface="Montserrat Black" pitchFamily="34" charset="0"/>
+                <a:ea typeface="Montserrat Black" pitchFamily="34" charset="-122"/>
+                <a:cs typeface="Montserrat Black" pitchFamily="34" charset="-120"/>
+              </a:rPr>
+              <a:t>PRÓXIMOS PASSOS</a:t>
+            </a:r>
+            <a:endParaRPr lang="en-US" sz="1600" dirty="0"/>
           </a:p>
         </p:txBody>
       </p:sp>
       <p:pic>
         <p:nvPicPr>
-          <p:cNvPr id="19" name="Image 7" descr="preencoded.png">    </p:cNvPr>
+          <p:cNvPr id="15" name="Image 5" descr="preencoded.png"/>
           <p:cNvPicPr>
             <a:picLocks noChangeAspect="1"/>
           </p:cNvPicPr>
@@ -3358,7 +3015,7 @@
         </p:blipFill>
         <p:spPr>
           <a:xfrm>
-            <a:off x="4786313" y="2813745"/>
+            <a:off x="4786313" y="2145804"/>
             <a:ext cx="150019" cy="171450"/>
           </a:xfrm>
           <a:prstGeom prst="rect">
@@ -3368,14 +3025,14 @@
       </p:pic>
       <p:sp>
         <p:nvSpPr>
-          <p:cNvPr id="20" name="Text 10"/>
-          <p:cNvSpPr/>
-          <p:nvPr/>
-        </p:nvSpPr>
-        <p:spPr>
-          <a:xfrm>
-            <a:off x="5043488" y="2803922"/>
-            <a:ext cx="2461022" cy="191095"/>
+          <p:cNvPr id="16" name="Text 8"/>
+          <p:cNvSpPr/>
+          <p:nvPr/>
+        </p:nvSpPr>
+        <p:spPr>
+          <a:xfrm>
+            <a:off x="5043488" y="2135981"/>
+            <a:ext cx="2421731" cy="191095"/>
           </a:xfrm>
           <a:prstGeom prst="rect">
             <a:avLst/>
@@ -3389,7 +3046,7 @@
           </a:bodyPr>
           <a:lstStyle/>
           <a:p>
-            <a:pPr algn="l" indent="0" marL="0">
+            <a:pPr marL="0" indent="0" algn="l">
               <a:buNone/>
             </a:pPr>
             <a:r>
@@ -3401,7 +3058,7 @@
                 <a:ea typeface="Montserrat Medium" pitchFamily="34" charset="-122"/>
                 <a:cs typeface="Montserrat Medium" pitchFamily="34" charset="-120"/>
               </a:rPr>
-              <a:t>Integração com Open Banking</a:t>
+              <a:t>OAuth2/JWT &amp; WAF Completo</a:t>
             </a:r>
             <a:endParaRPr lang="en-US" sz="1150" dirty="0"/>
           </a:p>
@@ -3409,7 +3066,7 @@
       </p:sp>
       <p:pic>
         <p:nvPicPr>
-          <p:cNvPr id="21" name="Image 8" descr="preencoded.png">    </p:cNvPr>
+          <p:cNvPr id="17" name="Image 6" descr="preencoded.png"/>
           <p:cNvPicPr>
             <a:picLocks noChangeAspect="1"/>
           </p:cNvPicPr>
@@ -3423,7 +3080,7 @@
         </p:blipFill>
         <p:spPr>
           <a:xfrm>
-            <a:off x="4786313" y="3147715"/>
+            <a:off x="4786313" y="2479774"/>
             <a:ext cx="150019" cy="171450"/>
           </a:xfrm>
           <a:prstGeom prst="rect">
@@ -3433,14 +3090,14 @@
       </p:pic>
       <p:sp>
         <p:nvSpPr>
-          <p:cNvPr id="22" name="Text 11"/>
-          <p:cNvSpPr/>
-          <p:nvPr/>
-        </p:nvSpPr>
-        <p:spPr>
-          <a:xfrm>
-            <a:off x="5043488" y="3137892"/>
-            <a:ext cx="1987748" cy="191095"/>
+          <p:cNvPr id="18" name="Text 9"/>
+          <p:cNvSpPr/>
+          <p:nvPr/>
+        </p:nvSpPr>
+        <p:spPr>
+          <a:xfrm>
+            <a:off x="5043488" y="2469952"/>
+            <a:ext cx="2698552" cy="191095"/>
           </a:xfrm>
           <a:prstGeom prst="rect">
             <a:avLst/>
@@ -3454,7 +3111,7 @@
           </a:bodyPr>
           <a:lstStyle/>
           <a:p>
-            <a:pPr algn="l" indent="0" marL="0">
+            <a:pPr marL="0" indent="0" algn="l">
               <a:buNone/>
             </a:pPr>
             <a:r>
@@ -3466,6 +3123,136 @@
                 <a:ea typeface="Montserrat Medium" pitchFamily="34" charset="-122"/>
                 <a:cs typeface="Montserrat Medium" pitchFamily="34" charset="-120"/>
               </a:rPr>
+              <a:t>Observabilidade (OpenTelemetry)</a:t>
+            </a:r>
+            <a:endParaRPr lang="en-US" sz="1150" dirty="0"/>
+          </a:p>
+        </p:txBody>
+      </p:sp>
+      <p:pic>
+        <p:nvPicPr>
+          <p:cNvPr id="19" name="Image 7" descr="preencoded.png"/>
+          <p:cNvPicPr>
+            <a:picLocks noChangeAspect="1"/>
+          </p:cNvPicPr>
+          <p:nvPr/>
+        </p:nvPicPr>
+        <p:blipFill>
+          <a:blip r:embed="rId10"/>
+          <a:stretch>
+            <a:fillRect/>
+          </a:stretch>
+        </p:blipFill>
+        <p:spPr>
+          <a:xfrm>
+            <a:off x="4786313" y="2813745"/>
+            <a:ext cx="150019" cy="171450"/>
+          </a:xfrm>
+          <a:prstGeom prst="rect">
+            <a:avLst/>
+          </a:prstGeom>
+        </p:spPr>
+      </p:pic>
+      <p:sp>
+        <p:nvSpPr>
+          <p:cNvPr id="20" name="Text 10"/>
+          <p:cNvSpPr/>
+          <p:nvPr/>
+        </p:nvSpPr>
+        <p:spPr>
+          <a:xfrm>
+            <a:off x="5043488" y="2803922"/>
+            <a:ext cx="2461022" cy="191095"/>
+          </a:xfrm>
+          <a:prstGeom prst="rect">
+            <a:avLst/>
+          </a:prstGeom>
+          <a:noFill/>
+          <a:ln/>
+        </p:spPr>
+        <p:txBody>
+          <a:bodyPr wrap="square" lIns="0" tIns="0" rIns="0" bIns="0" rtlCol="0" anchor="t">
+            <a:spAutoFit/>
+          </a:bodyPr>
+          <a:lstStyle/>
+          <a:p>
+            <a:pPr marL="0" indent="0" algn="l">
+              <a:buNone/>
+            </a:pPr>
+            <a:r>
+              <a:rPr lang="en-US" sz="1150" dirty="0">
+                <a:solidFill>
+                  <a:srgbClr val="495057"/>
+                </a:solidFill>
+                <a:latin typeface="Montserrat Medium" pitchFamily="34" charset="0"/>
+                <a:ea typeface="Montserrat Medium" pitchFamily="34" charset="-122"/>
+                <a:cs typeface="Montserrat Medium" pitchFamily="34" charset="-120"/>
+              </a:rPr>
+              <a:t>Integração com Open Banking</a:t>
+            </a:r>
+            <a:endParaRPr lang="en-US" sz="1150" dirty="0"/>
+          </a:p>
+        </p:txBody>
+      </p:sp>
+      <p:pic>
+        <p:nvPicPr>
+          <p:cNvPr id="21" name="Image 8" descr="preencoded.png"/>
+          <p:cNvPicPr>
+            <a:picLocks noChangeAspect="1"/>
+          </p:cNvPicPr>
+          <p:nvPr/>
+        </p:nvPicPr>
+        <p:blipFill>
+          <a:blip r:embed="rId11"/>
+          <a:stretch>
+            <a:fillRect/>
+          </a:stretch>
+        </p:blipFill>
+        <p:spPr>
+          <a:xfrm>
+            <a:off x="4786313" y="3147715"/>
+            <a:ext cx="150019" cy="171450"/>
+          </a:xfrm>
+          <a:prstGeom prst="rect">
+            <a:avLst/>
+          </a:prstGeom>
+        </p:spPr>
+      </p:pic>
+      <p:sp>
+        <p:nvSpPr>
+          <p:cNvPr id="22" name="Text 11"/>
+          <p:cNvSpPr/>
+          <p:nvPr/>
+        </p:nvSpPr>
+        <p:spPr>
+          <a:xfrm>
+            <a:off x="5043488" y="3137892"/>
+            <a:ext cx="1987748" cy="191095"/>
+          </a:xfrm>
+          <a:prstGeom prst="rect">
+            <a:avLst/>
+          </a:prstGeom>
+          <a:noFill/>
+          <a:ln/>
+        </p:spPr>
+        <p:txBody>
+          <a:bodyPr wrap="square" lIns="0" tIns="0" rIns="0" bIns="0" rtlCol="0" anchor="t">
+            <a:spAutoFit/>
+          </a:bodyPr>
+          <a:lstStyle/>
+          <a:p>
+            <a:pPr marL="0" indent="0" algn="l">
+              <a:buNone/>
+            </a:pPr>
+            <a:r>
+              <a:rPr lang="en-US" sz="1150" dirty="0">
+                <a:solidFill>
+                  <a:srgbClr val="495057"/>
+                </a:solidFill>
+                <a:latin typeface="Montserrat Medium" pitchFamily="34" charset="0"/>
+                <a:ea typeface="Montserrat Medium" pitchFamily="34" charset="-122"/>
+                <a:cs typeface="Montserrat Medium" pitchFamily="34" charset="-120"/>
+              </a:rPr>
               <a:t>Predição de Fluxo via ML</a:t>
             </a:r>
             <a:endParaRPr lang="en-US" sz="1150" dirty="0"/>
@@ -3495,7 +3282,7 @@
           </a:bodyPr>
           <a:lstStyle/>
           <a:p>
-            <a:pPr algn="l" indent="0" marL="0">
+            <a:pPr marL="0" indent="0" algn="l">
               <a:buNone/>
             </a:pPr>
             <a:r>
@@ -3540,227 +3327,7 @@
       </p:grpSpPr>
       <p:pic>
         <p:nvPicPr>
-          <p:cNvPr id="2" name="Image 0" descr="preencoded.png">    </p:cNvPr>
-          <p:cNvPicPr>
-            <a:picLocks noChangeAspect="1"/>
-          </p:cNvPicPr>
-          <p:nvPr/>
-        </p:nvPicPr>
-        <p:blipFill>
-          <a:blip r:embed="rId1"/>
-          <a:stretch>
-            <a:fillRect/>
-          </a:stretch>
-        </p:blipFill>
-        <p:spPr>
-          <a:xfrm>
-            <a:off x="0" y="0"/>
-            <a:ext cx="9144000" cy="5143500"/>
-          </a:xfrm>
-          <a:prstGeom prst="rect">
-            <a:avLst/>
-          </a:prstGeom>
-        </p:spPr>
-      </p:pic>
-      <p:sp>
-        <p:nvSpPr>
-          <p:cNvPr id="3" name="Text 0"/>
-          <p:cNvSpPr/>
-          <p:nvPr/>
-        </p:nvSpPr>
-        <p:spPr>
-          <a:xfrm>
-            <a:off x="6218634" y="428625"/>
-            <a:ext cx="2210991" cy="1714500"/>
-          </a:xfrm>
-          <a:prstGeom prst="rect">
-            <a:avLst/>
-          </a:prstGeom>
-          <a:noFill/>
-          <a:ln/>
-        </p:spPr>
-        <p:txBody>
-          <a:bodyPr wrap="none" lIns="0" tIns="0" rIns="0" bIns="0" rtlCol="0" anchor="t">
-            <a:spAutoFit/>
-          </a:bodyPr>
-          <a:lstStyle/>
-          <a:p>
-            <a:pPr algn="l" indent="0" marL="0">
-              <a:lnSpc>
-                <a:spcPct val="80000"/>
-              </a:lnSpc>
-              <a:buNone/>
-            </a:pPr>
-            <a:r>
-              <a:rPr lang="en-US" sz="12450" b="1" dirty="0">
-                <a:solidFill>
-                  <a:srgbClr val="212529">
-                    <a:alpha val="5000"/>
-                  </a:srgbClr>
-                </a:solidFill>
-                <a:latin typeface="Montserrat Black" pitchFamily="34" charset="0"/>
-                <a:ea typeface="Montserrat Black" pitchFamily="34" charset="-122"/>
-                <a:cs typeface="Montserrat Black" pitchFamily="34" charset="-120"/>
-              </a:rPr>
-              <a:t>02</a:t>
-            </a:r>
-            <a:endParaRPr lang="en-US" sz="12450" dirty="0"/>
-          </a:p>
-        </p:txBody>
-      </p:sp>
-      <p:sp>
-        <p:nvSpPr>
-          <p:cNvPr id="4" name="Text 1"/>
-          <p:cNvSpPr/>
-          <p:nvPr/>
-        </p:nvSpPr>
-        <p:spPr>
-          <a:xfrm>
-            <a:off x="714375" y="714375"/>
-            <a:ext cx="7715250" cy="557213"/>
-          </a:xfrm>
-          <a:prstGeom prst="rect">
-            <a:avLst/>
-          </a:prstGeom>
-          <a:noFill/>
-          <a:ln/>
-        </p:spPr>
-        <p:txBody>
-          <a:bodyPr wrap="square" lIns="0" tIns="0" rIns="0" bIns="0" rtlCol="0" anchor="t">
-            <a:spAutoFit/>
-          </a:bodyPr>
-          <a:lstStyle/>
-          <a:p>
-            <a:pPr algn="l" indent="0" marL="0">
-              <a:buNone/>
-            </a:pPr>
-            <a:r>
-              <a:rPr lang="en-US" sz="3300" b="1" dirty="0">
-                <a:solidFill>
-                  <a:srgbClr val="212529"/>
-                </a:solidFill>
-                <a:latin typeface="Montserrat Black" pitchFamily="34" charset="0"/>
-                <a:ea typeface="Montserrat Black" pitchFamily="34" charset="-122"/>
-                <a:cs typeface="Montserrat Black" pitchFamily="34" charset="-120"/>
-              </a:rPr>
-              <a:t>O PROBLEMA DE NEGÓCIO</a:t>
-            </a:r>
-            <a:endParaRPr lang="en-US" sz="3300" dirty="0"/>
-          </a:p>
-        </p:txBody>
-      </p:sp>
-      <p:pic>
-        <p:nvPicPr>
-          <p:cNvPr id="5" name="Image 1" descr="preencoded.png">    </p:cNvPr>
-          <p:cNvPicPr>
-            <a:picLocks noChangeAspect="1"/>
-          </p:cNvPicPr>
-          <p:nvPr/>
-        </p:nvPicPr>
-        <p:blipFill>
-          <a:blip r:embed="rId2"/>
-          <a:stretch>
-            <a:fillRect/>
-          </a:stretch>
-        </p:blipFill>
-        <p:spPr>
-          <a:xfrm>
-            <a:off x="714375" y="1762720"/>
-            <a:ext cx="285750" cy="285750"/>
-          </a:xfrm>
-          <a:prstGeom prst="rect">
-            <a:avLst/>
-          </a:prstGeom>
-        </p:spPr>
-      </p:pic>
-      <p:sp>
-        <p:nvSpPr>
-          <p:cNvPr id="6" name="Text 2"/>
-          <p:cNvSpPr/>
-          <p:nvPr/>
-        </p:nvSpPr>
-        <p:spPr>
-          <a:xfrm>
-            <a:off x="1178719" y="1700213"/>
-            <a:ext cx="3178969" cy="278606"/>
-          </a:xfrm>
-          <a:prstGeom prst="rect">
-            <a:avLst/>
-          </a:prstGeom>
-          <a:noFill/>
-          <a:ln/>
-        </p:spPr>
-        <p:txBody>
-          <a:bodyPr wrap="square" lIns="0" tIns="0" rIns="0" bIns="0" rtlCol="0" anchor="t">
-            <a:spAutoFit/>
-          </a:bodyPr>
-          <a:lstStyle/>
-          <a:p>
-            <a:pPr algn="l" indent="0" marL="0">
-              <a:buNone/>
-            </a:pPr>
-            <a:r>
-              <a:rPr lang="en-US" sz="1600" b="1" dirty="0">
-                <a:solidFill>
-                  <a:srgbClr val="212529"/>
-                </a:solidFill>
-                <a:latin typeface="Montserrat Black" pitchFamily="34" charset="0"/>
-                <a:ea typeface="Montserrat Black" pitchFamily="34" charset="-122"/>
-                <a:cs typeface="Montserrat Black" pitchFamily="34" charset="-120"/>
-              </a:rPr>
-              <a:t>Visibilidade Financeira</a:t>
-            </a:r>
-            <a:endParaRPr lang="en-US" sz="1600" dirty="0"/>
-          </a:p>
-        </p:txBody>
-      </p:sp>
-      <p:sp>
-        <p:nvSpPr>
-          <p:cNvPr id="7" name="Text 3"/>
-          <p:cNvSpPr/>
-          <p:nvPr/>
-        </p:nvSpPr>
-        <p:spPr>
-          <a:xfrm>
-            <a:off x="1178719" y="2050256"/>
-            <a:ext cx="3178969" cy="642938"/>
-          </a:xfrm>
-          <a:prstGeom prst="rect">
-            <a:avLst/>
-          </a:prstGeom>
-          <a:noFill/>
-          <a:ln/>
-        </p:spPr>
-        <p:txBody>
-          <a:bodyPr wrap="square" lIns="0" tIns="0" rIns="0" bIns="0" rtlCol="0" anchor="t">
-            <a:spAutoFit/>
-          </a:bodyPr>
-          <a:lstStyle/>
-          <a:p>
-            <a:pPr algn="l" indent="0" marL="0">
-              <a:lnSpc>
-                <a:spcPct val="120000"/>
-              </a:lnSpc>
-              <a:buNone/>
-            </a:pPr>
-            <a:r>
-              <a:rPr lang="en-US" sz="1050" dirty="0">
-                <a:solidFill>
-                  <a:srgbClr val="495057"/>
-                </a:solidFill>
-                <a:latin typeface="Montserrat Medium" pitchFamily="34" charset="0"/>
-                <a:ea typeface="Montserrat Medium" pitchFamily="34" charset="-122"/>
-                <a:cs typeface="Montserrat Medium" pitchFamily="34" charset="-120"/>
-              </a:rPr>
-              <a:t>Dificuldade em consolidar saldos diários em tempo real para tomada de decisão ágil.</a:t>
-            </a:r>
-            <a:endParaRPr lang="en-US" sz="1050" dirty="0"/>
-          </a:p>
-        </p:txBody>
-      </p:sp>
-      <p:pic>
-        <p:nvPicPr>
-          <p:cNvPr id="8" name="Image 2" descr="preencoded.png">    </p:cNvPr>
+          <p:cNvPr id="2" name="Image 0" descr="preencoded.png"/>
           <p:cNvPicPr>
             <a:picLocks noChangeAspect="1"/>
           </p:cNvPicPr>
@@ -3774,8 +3341,8 @@
         </p:blipFill>
         <p:spPr>
           <a:xfrm>
-            <a:off x="4786313" y="1762720"/>
-            <a:ext cx="285750" cy="285750"/>
+            <a:off x="0" y="0"/>
+            <a:ext cx="9144000" cy="5143500"/>
           </a:xfrm>
           <a:prstGeom prst="rect">
             <a:avLst/>
@@ -3784,55 +3351,60 @@
       </p:pic>
       <p:sp>
         <p:nvSpPr>
-          <p:cNvPr id="9" name="Text 4"/>
-          <p:cNvSpPr/>
-          <p:nvPr/>
-        </p:nvSpPr>
-        <p:spPr>
-          <a:xfrm>
-            <a:off x="5250656" y="1700213"/>
-            <a:ext cx="3178969" cy="278606"/>
-          </a:xfrm>
-          <a:prstGeom prst="rect">
-            <a:avLst/>
-          </a:prstGeom>
-          <a:noFill/>
-          <a:ln/>
-        </p:spPr>
-        <p:txBody>
-          <a:bodyPr wrap="square" lIns="0" tIns="0" rIns="0" bIns="0" rtlCol="0" anchor="t">
-            <a:spAutoFit/>
-          </a:bodyPr>
-          <a:lstStyle/>
-          <a:p>
-            <a:pPr algn="l" indent="0" marL="0">
-              <a:buNone/>
-            </a:pPr>
-            <a:r>
-              <a:rPr lang="en-US" sz="1600" b="1" dirty="0">
-                <a:solidFill>
-                  <a:srgbClr val="212529"/>
+          <p:cNvPr id="3" name="Text 0"/>
+          <p:cNvSpPr/>
+          <p:nvPr/>
+        </p:nvSpPr>
+        <p:spPr>
+          <a:xfrm>
+            <a:off x="6218634" y="428625"/>
+            <a:ext cx="2210991" cy="1714500"/>
+          </a:xfrm>
+          <a:prstGeom prst="rect">
+            <a:avLst/>
+          </a:prstGeom>
+          <a:noFill/>
+          <a:ln/>
+        </p:spPr>
+        <p:txBody>
+          <a:bodyPr wrap="none" lIns="0" tIns="0" rIns="0" bIns="0" rtlCol="0" anchor="t">
+            <a:spAutoFit/>
+          </a:bodyPr>
+          <a:lstStyle/>
+          <a:p>
+            <a:pPr marL="0" indent="0" algn="l">
+              <a:lnSpc>
+                <a:spcPct val="80000"/>
+              </a:lnSpc>
+              <a:buNone/>
+            </a:pPr>
+            <a:r>
+              <a:rPr lang="en-US" sz="12450" b="1" dirty="0">
+                <a:solidFill>
+                  <a:srgbClr val="212529">
+                    <a:alpha val="5000"/>
+                  </a:srgbClr>
                 </a:solidFill>
                 <a:latin typeface="Montserrat Black" pitchFamily="34" charset="0"/>
                 <a:ea typeface="Montserrat Black" pitchFamily="34" charset="-122"/>
                 <a:cs typeface="Montserrat Black" pitchFamily="34" charset="-120"/>
               </a:rPr>
-              <a:t>Erros Manuais</a:t>
-            </a:r>
-            <a:endParaRPr lang="en-US" sz="1600" dirty="0"/>
-          </a:p>
-        </p:txBody>
-      </p:sp>
-      <p:sp>
-        <p:nvSpPr>
-          <p:cNvPr id="10" name="Text 5"/>
-          <p:cNvSpPr/>
-          <p:nvPr/>
-        </p:nvSpPr>
-        <p:spPr>
-          <a:xfrm>
-            <a:off x="5250656" y="2050256"/>
-            <a:ext cx="3178969" cy="642938"/>
+              <a:t>02</a:t>
+            </a:r>
+            <a:endParaRPr lang="en-US" sz="12450" dirty="0"/>
+          </a:p>
+        </p:txBody>
+      </p:sp>
+      <p:sp>
+        <p:nvSpPr>
+          <p:cNvPr id="4" name="Text 1"/>
+          <p:cNvSpPr/>
+          <p:nvPr/>
+        </p:nvSpPr>
+        <p:spPr>
+          <a:xfrm>
+            <a:off x="714375" y="714375"/>
+            <a:ext cx="7715250" cy="557213"/>
           </a:xfrm>
           <a:prstGeom prst="rect">
             <a:avLst/>
@@ -3846,30 +3418,27 @@
           </a:bodyPr>
           <a:lstStyle/>
           <a:p>
-            <a:pPr algn="l" indent="0" marL="0">
-              <a:lnSpc>
-                <a:spcPct val="120000"/>
-              </a:lnSpc>
-              <a:buNone/>
-            </a:pPr>
-            <a:r>
-              <a:rPr lang="en-US" sz="1050" dirty="0">
-                <a:solidFill>
-                  <a:srgbClr val="495057"/>
-                </a:solidFill>
-                <a:latin typeface="Montserrat Medium" pitchFamily="34" charset="0"/>
-                <a:ea typeface="Montserrat Medium" pitchFamily="34" charset="-122"/>
-                <a:cs typeface="Montserrat Medium" pitchFamily="34" charset="-120"/>
-              </a:rPr>
-              <a:t>Processos baseados em planilhas e cadernos sujeitos a falhas críticas e retrabalho.</a:t>
-            </a:r>
-            <a:endParaRPr lang="en-US" sz="1050" dirty="0"/>
+            <a:pPr marL="0" indent="0" algn="l">
+              <a:buNone/>
+            </a:pPr>
+            <a:r>
+              <a:rPr lang="en-US" sz="3300" b="1" dirty="0">
+                <a:solidFill>
+                  <a:srgbClr val="212529"/>
+                </a:solidFill>
+                <a:latin typeface="Montserrat Black" pitchFamily="34" charset="0"/>
+                <a:ea typeface="Montserrat Black" pitchFamily="34" charset="-122"/>
+                <a:cs typeface="Montserrat Black" pitchFamily="34" charset="-120"/>
+              </a:rPr>
+              <a:t>O PROBLEMA DE NEGÓCIO</a:t>
+            </a:r>
+            <a:endParaRPr lang="en-US" sz="3300" dirty="0"/>
           </a:p>
         </p:txBody>
       </p:sp>
       <p:pic>
         <p:nvPicPr>
-          <p:cNvPr id="11" name="Image 3" descr="preencoded.png">    </p:cNvPr>
+          <p:cNvPr id="5" name="Image 1" descr="preencoded.png"/>
           <p:cNvPicPr>
             <a:picLocks noChangeAspect="1"/>
           </p:cNvPicPr>
@@ -3883,7 +3452,7 @@
         </p:blipFill>
         <p:spPr>
           <a:xfrm>
-            <a:off x="714375" y="3184327"/>
+            <a:off x="714375" y="1762720"/>
             <a:ext cx="285750" cy="285750"/>
           </a:xfrm>
           <a:prstGeom prst="rect">
@@ -3893,13 +3462,13 @@
       </p:pic>
       <p:sp>
         <p:nvSpPr>
-          <p:cNvPr id="12" name="Text 6"/>
-          <p:cNvSpPr/>
-          <p:nvPr/>
-        </p:nvSpPr>
-        <p:spPr>
-          <a:xfrm>
-            <a:off x="1178719" y="3121819"/>
+          <p:cNvPr id="6" name="Text 2"/>
+          <p:cNvSpPr/>
+          <p:nvPr/>
+        </p:nvSpPr>
+        <p:spPr>
+          <a:xfrm>
+            <a:off x="1178719" y="1700213"/>
             <a:ext cx="3178969" cy="278606"/>
           </a:xfrm>
           <a:prstGeom prst="rect">
@@ -3914,7 +3483,7 @@
           </a:bodyPr>
           <a:lstStyle/>
           <a:p>
-            <a:pPr algn="l" indent="0" marL="0">
+            <a:pPr marL="0" indent="0" algn="l">
               <a:buNone/>
             </a:pPr>
             <a:r>
@@ -3926,7 +3495,7 @@
                 <a:ea typeface="Montserrat Black" pitchFamily="34" charset="-122"/>
                 <a:cs typeface="Montserrat Black" pitchFamily="34" charset="-120"/>
               </a:rPr>
-              <a:t>Escalabilidade</a:t>
+              <a:t>Visibilidade Financeira</a:t>
             </a:r>
             <a:endParaRPr lang="en-US" sz="1600" dirty="0"/>
           </a:p>
@@ -3934,14 +3503,14 @@
       </p:sp>
       <p:sp>
         <p:nvSpPr>
-          <p:cNvPr id="13" name="Text 7"/>
-          <p:cNvSpPr/>
-          <p:nvPr/>
-        </p:nvSpPr>
-        <p:spPr>
-          <a:xfrm>
-            <a:off x="1178719" y="3471863"/>
-            <a:ext cx="3178969" cy="428625"/>
+          <p:cNvPr id="7" name="Text 3"/>
+          <p:cNvSpPr/>
+          <p:nvPr/>
+        </p:nvSpPr>
+        <p:spPr>
+          <a:xfrm>
+            <a:off x="1178719" y="2050256"/>
+            <a:ext cx="3178969" cy="642938"/>
           </a:xfrm>
           <a:prstGeom prst="rect">
             <a:avLst/>
@@ -3955,7 +3524,7 @@
           </a:bodyPr>
           <a:lstStyle/>
           <a:p>
-            <a:pPr algn="l" indent="0" marL="0">
+            <a:pPr marL="0" indent="0" algn="l">
               <a:lnSpc>
                 <a:spcPct val="120000"/>
               </a:lnSpc>
@@ -3970,7 +3539,7 @@
                 <a:ea typeface="Montserrat Medium" pitchFamily="34" charset="-122"/>
                 <a:cs typeface="Montserrat Medium" pitchFamily="34" charset="-120"/>
               </a:rPr>
-              <a:t>Sistemas legados que não suportam picos de transações em datas comemorativas.</a:t>
+              <a:t>Dificuldade em consolidar saldos diários em tempo real para tomada de decisão ágil.</a:t>
             </a:r>
             <a:endParaRPr lang="en-US" sz="1050" dirty="0"/>
           </a:p>
@@ -3978,7 +3547,7 @@
       </p:sp>
       <p:pic>
         <p:nvPicPr>
-          <p:cNvPr id="14" name="Image 4" descr="preencoded.png">    </p:cNvPr>
+          <p:cNvPr id="8" name="Image 2" descr="preencoded.png"/>
           <p:cNvPicPr>
             <a:picLocks noChangeAspect="1"/>
           </p:cNvPicPr>
@@ -3992,7 +3561,7 @@
         </p:blipFill>
         <p:spPr>
           <a:xfrm>
-            <a:off x="4786313" y="3184327"/>
+            <a:off x="4786313" y="1762720"/>
             <a:ext cx="285750" cy="285750"/>
           </a:xfrm>
           <a:prstGeom prst="rect">
@@ -4002,13 +3571,13 @@
       </p:pic>
       <p:sp>
         <p:nvSpPr>
-          <p:cNvPr id="15" name="Text 8"/>
-          <p:cNvSpPr/>
-          <p:nvPr/>
-        </p:nvSpPr>
-        <p:spPr>
-          <a:xfrm>
-            <a:off x="5250656" y="3121819"/>
+          <p:cNvPr id="9" name="Text 4"/>
+          <p:cNvSpPr/>
+          <p:nvPr/>
+        </p:nvSpPr>
+        <p:spPr>
+          <a:xfrm>
+            <a:off x="5250656" y="1700213"/>
             <a:ext cx="3178969" cy="278606"/>
           </a:xfrm>
           <a:prstGeom prst="rect">
@@ -4023,7 +3592,7 @@
           </a:bodyPr>
           <a:lstStyle/>
           <a:p>
-            <a:pPr algn="l" indent="0" marL="0">
+            <a:pPr marL="0" indent="0" algn="l">
               <a:buNone/>
             </a:pPr>
             <a:r>
@@ -4035,6 +3604,224 @@
                 <a:ea typeface="Montserrat Black" pitchFamily="34" charset="-122"/>
                 <a:cs typeface="Montserrat Black" pitchFamily="34" charset="-120"/>
               </a:rPr>
+              <a:t>Erros Manuais</a:t>
+            </a:r>
+            <a:endParaRPr lang="en-US" sz="1600" dirty="0"/>
+          </a:p>
+        </p:txBody>
+      </p:sp>
+      <p:sp>
+        <p:nvSpPr>
+          <p:cNvPr id="10" name="Text 5"/>
+          <p:cNvSpPr/>
+          <p:nvPr/>
+        </p:nvSpPr>
+        <p:spPr>
+          <a:xfrm>
+            <a:off x="5250656" y="2050256"/>
+            <a:ext cx="3178969" cy="642938"/>
+          </a:xfrm>
+          <a:prstGeom prst="rect">
+            <a:avLst/>
+          </a:prstGeom>
+          <a:noFill/>
+          <a:ln/>
+        </p:spPr>
+        <p:txBody>
+          <a:bodyPr wrap="square" lIns="0" tIns="0" rIns="0" bIns="0" rtlCol="0" anchor="t">
+            <a:spAutoFit/>
+          </a:bodyPr>
+          <a:lstStyle/>
+          <a:p>
+            <a:pPr marL="0" indent="0" algn="l">
+              <a:lnSpc>
+                <a:spcPct val="120000"/>
+              </a:lnSpc>
+              <a:buNone/>
+            </a:pPr>
+            <a:r>
+              <a:rPr lang="en-US" sz="1050" dirty="0">
+                <a:solidFill>
+                  <a:srgbClr val="495057"/>
+                </a:solidFill>
+                <a:latin typeface="Montserrat Medium" pitchFamily="34" charset="0"/>
+                <a:ea typeface="Montserrat Medium" pitchFamily="34" charset="-122"/>
+                <a:cs typeface="Montserrat Medium" pitchFamily="34" charset="-120"/>
+              </a:rPr>
+              <a:t>Processos baseados em planilhas e cadernos sujeitos a falhas críticas e retrabalho.</a:t>
+            </a:r>
+            <a:endParaRPr lang="en-US" sz="1050" dirty="0"/>
+          </a:p>
+        </p:txBody>
+      </p:sp>
+      <p:pic>
+        <p:nvPicPr>
+          <p:cNvPr id="11" name="Image 3" descr="preencoded.png"/>
+          <p:cNvPicPr>
+            <a:picLocks noChangeAspect="1"/>
+          </p:cNvPicPr>
+          <p:nvPr/>
+        </p:nvPicPr>
+        <p:blipFill>
+          <a:blip r:embed="rId6"/>
+          <a:stretch>
+            <a:fillRect/>
+          </a:stretch>
+        </p:blipFill>
+        <p:spPr>
+          <a:xfrm>
+            <a:off x="714375" y="3184327"/>
+            <a:ext cx="285750" cy="285750"/>
+          </a:xfrm>
+          <a:prstGeom prst="rect">
+            <a:avLst/>
+          </a:prstGeom>
+        </p:spPr>
+      </p:pic>
+      <p:sp>
+        <p:nvSpPr>
+          <p:cNvPr id="12" name="Text 6"/>
+          <p:cNvSpPr/>
+          <p:nvPr/>
+        </p:nvSpPr>
+        <p:spPr>
+          <a:xfrm>
+            <a:off x="1178719" y="3121819"/>
+            <a:ext cx="3178969" cy="278606"/>
+          </a:xfrm>
+          <a:prstGeom prst="rect">
+            <a:avLst/>
+          </a:prstGeom>
+          <a:noFill/>
+          <a:ln/>
+        </p:spPr>
+        <p:txBody>
+          <a:bodyPr wrap="square" lIns="0" tIns="0" rIns="0" bIns="0" rtlCol="0" anchor="t">
+            <a:spAutoFit/>
+          </a:bodyPr>
+          <a:lstStyle/>
+          <a:p>
+            <a:pPr marL="0" indent="0" algn="l">
+              <a:buNone/>
+            </a:pPr>
+            <a:r>
+              <a:rPr lang="en-US" sz="1600" b="1" dirty="0">
+                <a:solidFill>
+                  <a:srgbClr val="212529"/>
+                </a:solidFill>
+                <a:latin typeface="Montserrat Black" pitchFamily="34" charset="0"/>
+                <a:ea typeface="Montserrat Black" pitchFamily="34" charset="-122"/>
+                <a:cs typeface="Montserrat Black" pitchFamily="34" charset="-120"/>
+              </a:rPr>
+              <a:t>Escalabilidade</a:t>
+            </a:r>
+            <a:endParaRPr lang="en-US" sz="1600" dirty="0"/>
+          </a:p>
+        </p:txBody>
+      </p:sp>
+      <p:sp>
+        <p:nvSpPr>
+          <p:cNvPr id="13" name="Text 7"/>
+          <p:cNvSpPr/>
+          <p:nvPr/>
+        </p:nvSpPr>
+        <p:spPr>
+          <a:xfrm>
+            <a:off x="1178719" y="3471863"/>
+            <a:ext cx="3178969" cy="428625"/>
+          </a:xfrm>
+          <a:prstGeom prst="rect">
+            <a:avLst/>
+          </a:prstGeom>
+          <a:noFill/>
+          <a:ln/>
+        </p:spPr>
+        <p:txBody>
+          <a:bodyPr wrap="square" lIns="0" tIns="0" rIns="0" bIns="0" rtlCol="0" anchor="t">
+            <a:spAutoFit/>
+          </a:bodyPr>
+          <a:lstStyle/>
+          <a:p>
+            <a:pPr marL="0" indent="0" algn="l">
+              <a:lnSpc>
+                <a:spcPct val="120000"/>
+              </a:lnSpc>
+              <a:buNone/>
+            </a:pPr>
+            <a:r>
+              <a:rPr lang="en-US" sz="1050" dirty="0">
+                <a:solidFill>
+                  <a:srgbClr val="495057"/>
+                </a:solidFill>
+                <a:latin typeface="Montserrat Medium" pitchFamily="34" charset="0"/>
+                <a:ea typeface="Montserrat Medium" pitchFamily="34" charset="-122"/>
+                <a:cs typeface="Montserrat Medium" pitchFamily="34" charset="-120"/>
+              </a:rPr>
+              <a:t>Sistemas legados que não suportam picos de transações em datas comemorativas.</a:t>
+            </a:r>
+            <a:endParaRPr lang="en-US" sz="1050" dirty="0"/>
+          </a:p>
+        </p:txBody>
+      </p:sp>
+      <p:pic>
+        <p:nvPicPr>
+          <p:cNvPr id="14" name="Image 4" descr="preencoded.png"/>
+          <p:cNvPicPr>
+            <a:picLocks noChangeAspect="1"/>
+          </p:cNvPicPr>
+          <p:nvPr/>
+        </p:nvPicPr>
+        <p:blipFill>
+          <a:blip r:embed="rId7"/>
+          <a:stretch>
+            <a:fillRect/>
+          </a:stretch>
+        </p:blipFill>
+        <p:spPr>
+          <a:xfrm>
+            <a:off x="4786313" y="3184327"/>
+            <a:ext cx="285750" cy="285750"/>
+          </a:xfrm>
+          <a:prstGeom prst="rect">
+            <a:avLst/>
+          </a:prstGeom>
+        </p:spPr>
+      </p:pic>
+      <p:sp>
+        <p:nvSpPr>
+          <p:cNvPr id="15" name="Text 8"/>
+          <p:cNvSpPr/>
+          <p:nvPr/>
+        </p:nvSpPr>
+        <p:spPr>
+          <a:xfrm>
+            <a:off x="5250656" y="3121819"/>
+            <a:ext cx="3178969" cy="278606"/>
+          </a:xfrm>
+          <a:prstGeom prst="rect">
+            <a:avLst/>
+          </a:prstGeom>
+          <a:noFill/>
+          <a:ln/>
+        </p:spPr>
+        <p:txBody>
+          <a:bodyPr wrap="square" lIns="0" tIns="0" rIns="0" bIns="0" rtlCol="0" anchor="t">
+            <a:spAutoFit/>
+          </a:bodyPr>
+          <a:lstStyle/>
+          <a:p>
+            <a:pPr marL="0" indent="0" algn="l">
+              <a:buNone/>
+            </a:pPr>
+            <a:r>
+              <a:rPr lang="en-US" sz="1600" b="1" dirty="0">
+                <a:solidFill>
+                  <a:srgbClr val="212529"/>
+                </a:solidFill>
+                <a:latin typeface="Montserrat Black" pitchFamily="34" charset="0"/>
+                <a:ea typeface="Montserrat Black" pitchFamily="34" charset="-122"/>
+                <a:cs typeface="Montserrat Black" pitchFamily="34" charset="-120"/>
+              </a:rPr>
               <a:t>Decisão Lenta</a:t>
             </a:r>
             <a:endParaRPr lang="en-US" sz="1600" dirty="0"/>
@@ -4064,7 +3851,7 @@
           </a:bodyPr>
           <a:lstStyle/>
           <a:p>
-            <a:pPr algn="l" indent="0" marL="0">
+            <a:pPr marL="0" indent="0" algn="l">
               <a:lnSpc>
                 <a:spcPct val="120000"/>
               </a:lnSpc>
@@ -4112,14 +3899,14 @@
       </p:grpSpPr>
       <p:pic>
         <p:nvPicPr>
-          <p:cNvPr id="2" name="Image 0" descr="preencoded.png">    </p:cNvPr>
+          <p:cNvPr id="2" name="Image 0" descr="preencoded.png"/>
           <p:cNvPicPr>
             <a:picLocks noChangeAspect="1"/>
           </p:cNvPicPr>
           <p:nvPr/>
         </p:nvPicPr>
         <p:blipFill>
-          <a:blip r:embed="rId1"/>
+          <a:blip r:embed="rId3"/>
           <a:stretch>
             <a:fillRect/>
           </a:stretch>
@@ -4157,7 +3944,7 @@
           </a:bodyPr>
           <a:lstStyle/>
           <a:p>
-            <a:pPr algn="l" indent="0" marL="0">
+            <a:pPr marL="0" indent="0" algn="l">
               <a:lnSpc>
                 <a:spcPct val="80000"/>
               </a:lnSpc>
@@ -4203,7 +3990,7 @@
           </a:bodyPr>
           <a:lstStyle/>
           <a:p>
-            <a:pPr algn="l" indent="0" marL="0">
+            <a:pPr marL="0" indent="0" algn="l">
               <a:buNone/>
             </a:pPr>
             <a:r>
@@ -4244,7 +4031,7 @@
           </a:bodyPr>
           <a:lstStyle/>
           <a:p>
-            <a:pPr algn="l" indent="0" marL="0">
+            <a:pPr marL="0" indent="0" algn="l">
               <a:buNone/>
             </a:pPr>
             <a:r>
@@ -4285,7 +4072,7 @@
           </a:bodyPr>
           <a:lstStyle/>
           <a:p>
-            <a:pPr algn="l" indent="0" marL="0">
+            <a:pPr marL="0" indent="0" algn="l">
               <a:lnSpc>
                 <a:spcPct val="112000"/>
               </a:lnSpc>
@@ -4329,7 +4116,7 @@
           </a:bodyPr>
           <a:lstStyle/>
           <a:p>
-            <a:pPr algn="l" indent="0" marL="0">
+            <a:pPr marL="0" indent="0" algn="l">
               <a:buNone/>
             </a:pPr>
             <a:r>
@@ -4370,7 +4157,7 @@
           </a:bodyPr>
           <a:lstStyle/>
           <a:p>
-            <a:pPr algn="l" indent="0" marL="0">
+            <a:pPr marL="0" indent="0" algn="l">
               <a:lnSpc>
                 <a:spcPct val="112000"/>
               </a:lnSpc>
@@ -4414,7 +4201,7 @@
           </a:bodyPr>
           <a:lstStyle/>
           <a:p>
-            <a:pPr algn="l" indent="0" marL="0">
+            <a:pPr marL="0" indent="0" algn="l">
               <a:buNone/>
             </a:pPr>
             <a:r>
@@ -4455,7 +4242,7 @@
           </a:bodyPr>
           <a:lstStyle/>
           <a:p>
-            <a:pPr algn="l" indent="0" marL="0">
+            <a:pPr marL="0" indent="0" algn="l">
               <a:lnSpc>
                 <a:spcPct val="112000"/>
               </a:lnSpc>
@@ -4499,7 +4286,7 @@
           </a:bodyPr>
           <a:lstStyle/>
           <a:p>
-            <a:pPr algn="l" indent="0" marL="0">
+            <a:pPr marL="0" indent="0" algn="l">
               <a:buNone/>
             </a:pPr>
             <a:r>
@@ -4540,7 +4327,7 @@
           </a:bodyPr>
           <a:lstStyle/>
           <a:p>
-            <a:pPr algn="l" indent="0" marL="0">
+            <a:pPr marL="0" indent="0" algn="l">
               <a:lnSpc>
                 <a:spcPct val="112000"/>
               </a:lnSpc>
@@ -4584,7 +4371,7 @@
           </a:bodyPr>
           <a:lstStyle/>
           <a:p>
-            <a:pPr algn="l" indent="0" marL="0">
+            <a:pPr marL="0" indent="0" algn="l">
               <a:buNone/>
             </a:pPr>
             <a:r>
@@ -4625,7 +4412,7 @@
           </a:bodyPr>
           <a:lstStyle/>
           <a:p>
-            <a:pPr algn="l" indent="0" marL="0">
+            <a:pPr marL="0" indent="0" algn="l">
               <a:lnSpc>
                 <a:spcPct val="112000"/>
               </a:lnSpc>
@@ -4669,7 +4456,7 @@
           </a:bodyPr>
           <a:lstStyle/>
           <a:p>
-            <a:pPr algn="l" indent="0" marL="0">
+            <a:pPr marL="0" indent="0" algn="l">
               <a:buNone/>
             </a:pPr>
             <a:r>
@@ -4710,7 +4497,7 @@
           </a:bodyPr>
           <a:lstStyle/>
           <a:p>
-            <a:pPr algn="l" indent="0" marL="0">
+            <a:pPr marL="0" indent="0" algn="l">
               <a:lnSpc>
                 <a:spcPct val="112000"/>
               </a:lnSpc>
@@ -4758,14 +4545,14 @@
       </p:grpSpPr>
       <p:pic>
         <p:nvPicPr>
-          <p:cNvPr id="2" name="Image 0" descr="preencoded.png">    </p:cNvPr>
+          <p:cNvPr id="2" name="Image 0" descr="preencoded.png"/>
           <p:cNvPicPr>
             <a:picLocks noChangeAspect="1"/>
           </p:cNvPicPr>
           <p:nvPr/>
         </p:nvPicPr>
         <p:blipFill>
-          <a:blip r:embed="rId1"/>
+          <a:blip r:embed="rId3"/>
           <a:stretch>
             <a:fillRect/>
           </a:stretch>
@@ -4803,7 +4590,7 @@
           </a:bodyPr>
           <a:lstStyle/>
           <a:p>
-            <a:pPr algn="l" indent="0" marL="0">
+            <a:pPr marL="0" indent="0" algn="l">
               <a:lnSpc>
                 <a:spcPct val="80000"/>
               </a:lnSpc>
@@ -4849,7 +4636,7 @@
           </a:bodyPr>
           <a:lstStyle/>
           <a:p>
-            <a:pPr algn="l" indent="0" marL="0">
+            <a:pPr marL="0" indent="0" algn="l">
               <a:buNone/>
             </a:pPr>
             <a:r>
@@ -4886,6 +4673,13 @@
           </a:solidFill>
           <a:ln/>
         </p:spPr>
+        <p:txBody>
+          <a:bodyPr/>
+          <a:lstStyle/>
+          <a:p>
+            <a:endParaRPr lang="pt-BR"/>
+          </a:p>
+        </p:txBody>
       </p:sp>
       <p:sp>
         <p:nvSpPr>
@@ -4910,11 +4704,11 @@
           </a:bodyPr>
           <a:lstStyle/>
           <a:p>
-            <a:pPr algn="l" indent="0" marL="0">
-              <a:buNone/>
-            </a:pPr>
-            <a:r>
-              <a:rPr lang="en-US" sz="1000" b="1" spc="1" kern="0" dirty="0">
+            <a:pPr marL="0" indent="0" algn="l">
+              <a:buNone/>
+            </a:pPr>
+            <a:r>
+              <a:rPr lang="en-US" sz="1000" b="1" kern="0" spc="1" dirty="0">
                 <a:solidFill>
                   <a:srgbClr val="F8F9FA"/>
                 </a:solidFill>
@@ -4947,6 +4741,13 @@
           </a:solidFill>
           <a:ln/>
         </p:spPr>
+        <p:txBody>
+          <a:bodyPr/>
+          <a:lstStyle/>
+          <a:p>
+            <a:endParaRPr lang="pt-BR"/>
+          </a:p>
+        </p:txBody>
       </p:sp>
       <p:sp>
         <p:nvSpPr>
@@ -4971,11 +4772,11 @@
           </a:bodyPr>
           <a:lstStyle/>
           <a:p>
-            <a:pPr algn="l" indent="0" marL="0">
-              <a:buNone/>
-            </a:pPr>
-            <a:r>
-              <a:rPr lang="en-US" sz="1000" b="1" spc="1" kern="0" dirty="0">
+            <a:pPr marL="0" indent="0" algn="l">
+              <a:buNone/>
+            </a:pPr>
+            <a:r>
+              <a:rPr lang="en-US" sz="1000" b="1" kern="0" spc="1" dirty="0">
                 <a:solidFill>
                   <a:srgbClr val="F8F9FA"/>
                 </a:solidFill>
@@ -5008,6 +4809,13 @@
           </a:solidFill>
           <a:ln/>
         </p:spPr>
+        <p:txBody>
+          <a:bodyPr/>
+          <a:lstStyle/>
+          <a:p>
+            <a:endParaRPr lang="pt-BR"/>
+          </a:p>
+        </p:txBody>
       </p:sp>
       <p:sp>
         <p:nvSpPr>
@@ -5032,11 +4840,11 @@
           </a:bodyPr>
           <a:lstStyle/>
           <a:p>
-            <a:pPr algn="l" indent="0" marL="0">
-              <a:buNone/>
-            </a:pPr>
-            <a:r>
-              <a:rPr lang="en-US" sz="1000" b="1" spc="1" kern="0" dirty="0">
+            <a:pPr marL="0" indent="0" algn="l">
+              <a:buNone/>
+            </a:pPr>
+            <a:r>
+              <a:rPr lang="en-US" sz="1000" b="1" kern="0" spc="1" dirty="0">
                 <a:solidFill>
                   <a:srgbClr val="F8F9FA"/>
                 </a:solidFill>
@@ -5073,7 +4881,7 @@
           </a:bodyPr>
           <a:lstStyle/>
           <a:p>
-            <a:pPr algn="l" indent="0" marL="0">
+            <a:pPr marL="0" indent="0" algn="l">
               <a:buNone/>
             </a:pPr>
             <a:r>
@@ -5114,7 +4922,7 @@
           </a:bodyPr>
           <a:lstStyle/>
           <a:p>
-            <a:pPr algn="l" indent="0" marL="0">
+            <a:pPr marL="0" indent="0" algn="l">
               <a:buNone/>
             </a:pPr>
             <a:r>
@@ -5155,7 +4963,7 @@
           </a:bodyPr>
           <a:lstStyle/>
           <a:p>
-            <a:pPr algn="l" indent="0" marL="0">
+            <a:pPr marL="0" indent="0" algn="l">
               <a:buNone/>
             </a:pPr>
             <a:r>
@@ -5196,7 +5004,7 @@
           </a:bodyPr>
           <a:lstStyle/>
           <a:p>
-            <a:pPr algn="l" indent="0" marL="0">
+            <a:pPr marL="0" indent="0" algn="l">
               <a:buNone/>
             </a:pPr>
             <a:r>
@@ -5237,7 +5045,7 @@
           </a:bodyPr>
           <a:lstStyle/>
           <a:p>
-            <a:pPr algn="l" indent="0" marL="0">
+            <a:pPr marL="0" indent="0" algn="l">
               <a:buNone/>
             </a:pPr>
             <a:r>
@@ -5278,7 +5086,7 @@
           </a:bodyPr>
           <a:lstStyle/>
           <a:p>
-            <a:pPr algn="l" indent="0" marL="0">
+            <a:pPr marL="0" indent="0" algn="l">
               <a:buNone/>
             </a:pPr>
             <a:r>
@@ -5319,7 +5127,7 @@
           </a:bodyPr>
           <a:lstStyle/>
           <a:p>
-            <a:pPr algn="l" indent="0" marL="0">
+            <a:pPr marL="0" indent="0" algn="l">
               <a:buNone/>
             </a:pPr>
             <a:r>
@@ -5360,7 +5168,7 @@
           </a:bodyPr>
           <a:lstStyle/>
           <a:p>
-            <a:pPr algn="l" indent="0" marL="0">
+            <a:pPr marL="0" indent="0" algn="l">
               <a:buNone/>
             </a:pPr>
             <a:r>
@@ -5401,7 +5209,7 @@
           </a:bodyPr>
           <a:lstStyle/>
           <a:p>
-            <a:pPr algn="l" indent="0" marL="0">
+            <a:pPr marL="0" indent="0" algn="l">
               <a:buNone/>
             </a:pPr>
             <a:r>
@@ -5442,7 +5250,7 @@
           </a:bodyPr>
           <a:lstStyle/>
           <a:p>
-            <a:pPr algn="l" indent="0" marL="0">
+            <a:pPr marL="0" indent="0" algn="l">
               <a:buNone/>
             </a:pPr>
             <a:r>
@@ -5483,7 +5291,7 @@
           </a:bodyPr>
           <a:lstStyle/>
           <a:p>
-            <a:pPr algn="l" indent="0" marL="0">
+            <a:pPr marL="0" indent="0" algn="l">
               <a:buNone/>
             </a:pPr>
             <a:r>
@@ -5524,7 +5332,7 @@
           </a:bodyPr>
           <a:lstStyle/>
           <a:p>
-            <a:pPr algn="l" indent="0" marL="0">
+            <a:pPr marL="0" indent="0" algn="l">
               <a:buNone/>
             </a:pPr>
             <a:r>
@@ -5565,7 +5373,7 @@
           </a:bodyPr>
           <a:lstStyle/>
           <a:p>
-            <a:pPr algn="l" indent="0" marL="0">
+            <a:pPr marL="0" indent="0" algn="l">
               <a:buNone/>
             </a:pPr>
             <a:r>
@@ -5606,7 +5414,7 @@
           </a:bodyPr>
           <a:lstStyle/>
           <a:p>
-            <a:pPr algn="l" indent="0" marL="0">
+            <a:pPr marL="0" indent="0" algn="l">
               <a:buNone/>
             </a:pPr>
             <a:r>
@@ -5647,7 +5455,7 @@
           </a:bodyPr>
           <a:lstStyle/>
           <a:p>
-            <a:pPr algn="l" indent="0" marL="0">
+            <a:pPr marL="0" indent="0" algn="l">
               <a:buNone/>
             </a:pPr>
             <a:r>
@@ -5692,14 +5500,14 @@
       </p:grpSpPr>
       <p:pic>
         <p:nvPicPr>
-          <p:cNvPr id="2" name="Image 0" descr="preencoded.png">    </p:cNvPr>
+          <p:cNvPr id="2" name="Image 0" descr="preencoded.png"/>
           <p:cNvPicPr>
             <a:picLocks noChangeAspect="1"/>
           </p:cNvPicPr>
           <p:nvPr/>
         </p:nvPicPr>
         <p:blipFill>
-          <a:blip r:embed="rId1"/>
+          <a:blip r:embed="rId3"/>
           <a:stretch>
             <a:fillRect/>
           </a:stretch>
@@ -5737,7 +5545,7 @@
           </a:bodyPr>
           <a:lstStyle/>
           <a:p>
-            <a:pPr algn="l" indent="0" marL="0">
+            <a:pPr marL="0" indent="0" algn="l">
               <a:lnSpc>
                 <a:spcPct val="80000"/>
               </a:lnSpc>
@@ -5783,7 +5591,7 @@
           </a:bodyPr>
           <a:lstStyle/>
           <a:p>
-            <a:pPr algn="l" indent="0" marL="0">
+            <a:pPr marL="0" indent="0" algn="l">
               <a:buNone/>
             </a:pPr>
             <a:r>
@@ -5825,6 +5633,13 @@
             <a:prstDash val="solid"/>
           </a:ln>
         </p:spPr>
+        <p:txBody>
+          <a:bodyPr/>
+          <a:lstStyle/>
+          <a:p>
+            <a:endParaRPr lang="pt-BR"/>
+          </a:p>
+        </p:txBody>
       </p:sp>
       <p:sp>
         <p:nvSpPr>
@@ -5849,7 +5664,7 @@
           </a:bodyPr>
           <a:lstStyle/>
           <a:p>
-            <a:pPr algn="l" indent="0" marL="0">
+            <a:pPr marL="0" indent="0" algn="l">
               <a:buNone/>
             </a:pPr>
             <a:r>
@@ -5869,14 +5684,14 @@
       </p:sp>
       <p:pic>
         <p:nvPicPr>
-          <p:cNvPr id="7" name="Image 1" descr="preencoded.png">    </p:cNvPr>
+          <p:cNvPr id="7" name="Image 1" descr="preencoded.png"/>
           <p:cNvPicPr>
             <a:picLocks noChangeAspect="1"/>
           </p:cNvPicPr>
           <p:nvPr/>
         </p:nvPicPr>
         <p:blipFill>
-          <a:blip r:embed="rId2"/>
+          <a:blip r:embed="rId4"/>
           <a:stretch>
             <a:fillRect/>
           </a:stretch>
@@ -5914,7 +5729,7 @@
           </a:bodyPr>
           <a:lstStyle/>
           <a:p>
-            <a:pPr algn="ctr" indent="0" marL="0">
+            <a:pPr marL="0" indent="0" algn="ctr">
               <a:buNone/>
             </a:pPr>
             <a:r>
@@ -5934,14 +5749,14 @@
       </p:sp>
       <p:pic>
         <p:nvPicPr>
-          <p:cNvPr id="9" name="Image 2" descr="preencoded.png">    </p:cNvPr>
+          <p:cNvPr id="9" name="Image 2" descr="preencoded.png"/>
           <p:cNvPicPr>
             <a:picLocks noChangeAspect="1"/>
           </p:cNvPicPr>
           <p:nvPr/>
         </p:nvPicPr>
         <p:blipFill>
-          <a:blip r:embed="rId3"/>
+          <a:blip r:embed="rId5"/>
           <a:stretch>
             <a:fillRect/>
           </a:stretch>
@@ -5979,7 +5794,7 @@
           </a:bodyPr>
           <a:lstStyle/>
           <a:p>
-            <a:pPr algn="ctr" indent="0" marL="0">
+            <a:pPr marL="0" indent="0" algn="ctr">
               <a:buNone/>
             </a:pPr>
             <a:r>
@@ -5999,14 +5814,14 @@
       </p:sp>
       <p:pic>
         <p:nvPicPr>
-          <p:cNvPr id="11" name="Image 3" descr="preencoded.png">    </p:cNvPr>
+          <p:cNvPr id="11" name="Image 3" descr="preencoded.png"/>
           <p:cNvPicPr>
             <a:picLocks noChangeAspect="1"/>
           </p:cNvPicPr>
           <p:nvPr/>
         </p:nvPicPr>
         <p:blipFill>
-          <a:blip r:embed="rId4"/>
+          <a:blip r:embed="rId6"/>
           <a:stretch>
             <a:fillRect/>
           </a:stretch>
@@ -6045,6 +5860,13 @@
             <a:prstDash val="solid"/>
           </a:ln>
         </p:spPr>
+        <p:txBody>
+          <a:bodyPr/>
+          <a:lstStyle/>
+          <a:p>
+            <a:endParaRPr lang="pt-BR"/>
+          </a:p>
+        </p:txBody>
       </p:sp>
       <p:sp>
         <p:nvSpPr>
@@ -6069,7 +5891,7 @@
           </a:bodyPr>
           <a:lstStyle/>
           <a:p>
-            <a:pPr algn="l" indent="0" marL="0">
+            <a:pPr marL="0" indent="0" algn="l">
               <a:buNone/>
             </a:pPr>
             <a:r>
@@ -6089,137 +5911,7 @@
       </p:sp>
       <p:pic>
         <p:nvPicPr>
-          <p:cNvPr id="14" name="Image 4" descr="preencoded.png">    </p:cNvPr>
-          <p:cNvPicPr>
-            <a:picLocks noChangeAspect="1"/>
-          </p:cNvPicPr>
-          <p:nvPr/>
-        </p:nvPicPr>
-        <p:blipFill>
-          <a:blip r:embed="rId5"/>
-          <a:stretch>
-            <a:fillRect/>
-          </a:stretch>
-        </p:blipFill>
-        <p:spPr>
-          <a:xfrm>
-            <a:off x="3249206" y="2794992"/>
-            <a:ext cx="944761" cy="228600"/>
-          </a:xfrm>
-          <a:prstGeom prst="rect">
-            <a:avLst/>
-          </a:prstGeom>
-        </p:spPr>
-      </p:pic>
-      <p:sp>
-        <p:nvSpPr>
-          <p:cNvPr id="15" name="Text 8"/>
-          <p:cNvSpPr/>
-          <p:nvPr/>
-        </p:nvSpPr>
-        <p:spPr>
-          <a:xfrm>
-            <a:off x="3249206" y="3095030"/>
-            <a:ext cx="944761" cy="157163"/>
-          </a:xfrm>
-          <a:prstGeom prst="rect">
-            <a:avLst/>
-          </a:prstGeom>
-          <a:noFill/>
-          <a:ln/>
-        </p:spPr>
-        <p:txBody>
-          <a:bodyPr wrap="none" lIns="0" tIns="0" rIns="0" bIns="0" rtlCol="0" anchor="t">
-            <a:spAutoFit/>
-          </a:bodyPr>
-          <a:lstStyle/>
-          <a:p>
-            <a:pPr algn="ctr" indent="0" marL="0">
-              <a:buNone/>
-            </a:pPr>
-            <a:r>
-              <a:rPr lang="en-US" sz="900" b="1" dirty="0">
-                <a:solidFill>
-                  <a:srgbClr val="212529"/>
-                </a:solidFill>
-                <a:latin typeface="Montserrat Black" pitchFamily="34" charset="0"/>
-                <a:ea typeface="Montserrat Black" pitchFamily="34" charset="-122"/>
-                <a:cs typeface="Montserrat Black" pitchFamily="34" charset="-120"/>
-              </a:rPr>
-              <a:t>Lançamentos</a:t>
-            </a:r>
-            <a:endParaRPr lang="en-US" sz="900" dirty="0"/>
-          </a:p>
-        </p:txBody>
-      </p:sp>
-      <p:pic>
-        <p:nvPicPr>
-          <p:cNvPr id="16" name="Image 5" descr="preencoded.png">    </p:cNvPr>
-          <p:cNvPicPr>
-            <a:picLocks noChangeAspect="1"/>
-          </p:cNvPicPr>
-          <p:nvPr/>
-        </p:nvPicPr>
-        <p:blipFill>
-          <a:blip r:embed="rId6"/>
-          <a:stretch>
-            <a:fillRect/>
-          </a:stretch>
-        </p:blipFill>
-        <p:spPr>
-          <a:xfrm>
-            <a:off x="5263130" y="2794992"/>
-            <a:ext cx="709017" cy="228600"/>
-          </a:xfrm>
-          <a:prstGeom prst="rect">
-            <a:avLst/>
-          </a:prstGeom>
-        </p:spPr>
-      </p:pic>
-      <p:sp>
-        <p:nvSpPr>
-          <p:cNvPr id="17" name="Text 9"/>
-          <p:cNvSpPr/>
-          <p:nvPr/>
-        </p:nvSpPr>
-        <p:spPr>
-          <a:xfrm>
-            <a:off x="5263130" y="3095030"/>
-            <a:ext cx="709017" cy="157163"/>
-          </a:xfrm>
-          <a:prstGeom prst="rect">
-            <a:avLst/>
-          </a:prstGeom>
-          <a:noFill/>
-          <a:ln/>
-        </p:spPr>
-        <p:txBody>
-          <a:bodyPr wrap="none" lIns="0" tIns="0" rIns="0" bIns="0" rtlCol="0" anchor="t">
-            <a:spAutoFit/>
-          </a:bodyPr>
-          <a:lstStyle/>
-          <a:p>
-            <a:pPr algn="ctr" indent="0" marL="0">
-              <a:buNone/>
-            </a:pPr>
-            <a:r>
-              <a:rPr lang="en-US" sz="900" b="1" dirty="0">
-                <a:solidFill>
-                  <a:srgbClr val="212529"/>
-                </a:solidFill>
-                <a:latin typeface="Montserrat Black" pitchFamily="34" charset="0"/>
-                <a:ea typeface="Montserrat Black" pitchFamily="34" charset="-122"/>
-                <a:cs typeface="Montserrat Black" pitchFamily="34" charset="-120"/>
-              </a:rPr>
-              <a:t>Relatórios</a:t>
-            </a:r>
-            <a:endParaRPr lang="en-US" sz="900" dirty="0"/>
-          </a:p>
-        </p:txBody>
-      </p:sp>
-      <p:pic>
-        <p:nvPicPr>
-          <p:cNvPr id="18" name="Image 6" descr="preencoded.png">    </p:cNvPr>
+          <p:cNvPr id="14" name="Image 4" descr="preencoded.png"/>
           <p:cNvPicPr>
             <a:picLocks noChangeAspect="1"/>
           </p:cNvPicPr>
@@ -6233,8 +5925,8 @@
         </p:blipFill>
         <p:spPr>
           <a:xfrm>
-            <a:off x="7041310" y="2794992"/>
-            <a:ext cx="853678" cy="228600"/>
+            <a:off x="3249206" y="2794992"/>
+            <a:ext cx="944761" cy="228600"/>
           </a:xfrm>
           <a:prstGeom prst="rect">
             <a:avLst/>
@@ -6243,14 +5935,14 @@
       </p:pic>
       <p:sp>
         <p:nvSpPr>
-          <p:cNvPr id="19" name="Text 10"/>
-          <p:cNvSpPr/>
-          <p:nvPr/>
-        </p:nvSpPr>
-        <p:spPr>
-          <a:xfrm>
-            <a:off x="7041310" y="3095030"/>
-            <a:ext cx="853678" cy="157163"/>
+          <p:cNvPr id="15" name="Text 8"/>
+          <p:cNvSpPr/>
+          <p:nvPr/>
+        </p:nvSpPr>
+        <p:spPr>
+          <a:xfrm>
+            <a:off x="3249206" y="3095030"/>
+            <a:ext cx="944761" cy="157163"/>
           </a:xfrm>
           <a:prstGeom prst="rect">
             <a:avLst/>
@@ -6264,7 +5956,7 @@
           </a:bodyPr>
           <a:lstStyle/>
           <a:p>
-            <a:pPr algn="ctr" indent="0" marL="0">
+            <a:pPr marL="0" indent="0" algn="ctr">
               <a:buNone/>
             </a:pPr>
             <a:r>
@@ -6276,7 +5968,7 @@
                 <a:ea typeface="Montserrat Black" pitchFamily="34" charset="-122"/>
                 <a:cs typeface="Montserrat Black" pitchFamily="34" charset="-120"/>
               </a:rPr>
-              <a:t>Worker DLQ</a:t>
+              <a:t>Lançamentos</a:t>
             </a:r>
             <a:endParaRPr lang="en-US" sz="900" dirty="0"/>
           </a:p>
@@ -6284,7 +5976,7 @@
       </p:sp>
       <p:pic>
         <p:nvPicPr>
-          <p:cNvPr id="20" name="Image 7" descr="preencoded.png">    </p:cNvPr>
+          <p:cNvPr id="16" name="Image 5" descr="preencoded.png"/>
           <p:cNvPicPr>
             <a:picLocks noChangeAspect="1"/>
           </p:cNvPicPr>
@@ -6292,6 +5984,136 @@
         </p:nvPicPr>
         <p:blipFill>
           <a:blip r:embed="rId8"/>
+          <a:stretch>
+            <a:fillRect/>
+          </a:stretch>
+        </p:blipFill>
+        <p:spPr>
+          <a:xfrm>
+            <a:off x="5263130" y="2794992"/>
+            <a:ext cx="709017" cy="228600"/>
+          </a:xfrm>
+          <a:prstGeom prst="rect">
+            <a:avLst/>
+          </a:prstGeom>
+        </p:spPr>
+      </p:pic>
+      <p:sp>
+        <p:nvSpPr>
+          <p:cNvPr id="17" name="Text 9"/>
+          <p:cNvSpPr/>
+          <p:nvPr/>
+        </p:nvSpPr>
+        <p:spPr>
+          <a:xfrm>
+            <a:off x="5263130" y="3095030"/>
+            <a:ext cx="709017" cy="157163"/>
+          </a:xfrm>
+          <a:prstGeom prst="rect">
+            <a:avLst/>
+          </a:prstGeom>
+          <a:noFill/>
+          <a:ln/>
+        </p:spPr>
+        <p:txBody>
+          <a:bodyPr wrap="none" lIns="0" tIns="0" rIns="0" bIns="0" rtlCol="0" anchor="t">
+            <a:spAutoFit/>
+          </a:bodyPr>
+          <a:lstStyle/>
+          <a:p>
+            <a:pPr marL="0" indent="0" algn="ctr">
+              <a:buNone/>
+            </a:pPr>
+            <a:r>
+              <a:rPr lang="en-US" sz="900" b="1" dirty="0">
+                <a:solidFill>
+                  <a:srgbClr val="212529"/>
+                </a:solidFill>
+                <a:latin typeface="Montserrat Black" pitchFamily="34" charset="0"/>
+                <a:ea typeface="Montserrat Black" pitchFamily="34" charset="-122"/>
+                <a:cs typeface="Montserrat Black" pitchFamily="34" charset="-120"/>
+              </a:rPr>
+              <a:t>Relatórios</a:t>
+            </a:r>
+            <a:endParaRPr lang="en-US" sz="900" dirty="0"/>
+          </a:p>
+        </p:txBody>
+      </p:sp>
+      <p:pic>
+        <p:nvPicPr>
+          <p:cNvPr id="18" name="Image 6" descr="preencoded.png"/>
+          <p:cNvPicPr>
+            <a:picLocks noChangeAspect="1"/>
+          </p:cNvPicPr>
+          <p:nvPr/>
+        </p:nvPicPr>
+        <p:blipFill>
+          <a:blip r:embed="rId9"/>
+          <a:stretch>
+            <a:fillRect/>
+          </a:stretch>
+        </p:blipFill>
+        <p:spPr>
+          <a:xfrm>
+            <a:off x="7041310" y="2794992"/>
+            <a:ext cx="853678" cy="228600"/>
+          </a:xfrm>
+          <a:prstGeom prst="rect">
+            <a:avLst/>
+          </a:prstGeom>
+        </p:spPr>
+      </p:pic>
+      <p:sp>
+        <p:nvSpPr>
+          <p:cNvPr id="19" name="Text 10"/>
+          <p:cNvSpPr/>
+          <p:nvPr/>
+        </p:nvSpPr>
+        <p:spPr>
+          <a:xfrm>
+            <a:off x="7041310" y="3095030"/>
+            <a:ext cx="853678" cy="157163"/>
+          </a:xfrm>
+          <a:prstGeom prst="rect">
+            <a:avLst/>
+          </a:prstGeom>
+          <a:noFill/>
+          <a:ln/>
+        </p:spPr>
+        <p:txBody>
+          <a:bodyPr wrap="none" lIns="0" tIns="0" rIns="0" bIns="0" rtlCol="0" anchor="t">
+            <a:spAutoFit/>
+          </a:bodyPr>
+          <a:lstStyle/>
+          <a:p>
+            <a:pPr marL="0" indent="0" algn="ctr">
+              <a:buNone/>
+            </a:pPr>
+            <a:r>
+              <a:rPr lang="en-US" sz="900" b="1" dirty="0">
+                <a:solidFill>
+                  <a:srgbClr val="212529"/>
+                </a:solidFill>
+                <a:latin typeface="Montserrat Black" pitchFamily="34" charset="0"/>
+                <a:ea typeface="Montserrat Black" pitchFamily="34" charset="-122"/>
+                <a:cs typeface="Montserrat Black" pitchFamily="34" charset="-120"/>
+              </a:rPr>
+              <a:t>Worker DLQ</a:t>
+            </a:r>
+            <a:endParaRPr lang="en-US" sz="900" dirty="0"/>
+          </a:p>
+        </p:txBody>
+      </p:sp>
+      <p:pic>
+        <p:nvPicPr>
+          <p:cNvPr id="20" name="Image 7" descr="preencoded.png"/>
+          <p:cNvPicPr>
+            <a:picLocks noChangeAspect="1"/>
+          </p:cNvPicPr>
+          <p:nvPr/>
+        </p:nvPicPr>
+        <p:blipFill>
+          <a:blip r:embed="rId10"/>
           <a:stretch>
             <a:fillRect/>
           </a:stretch>
@@ -6330,6 +6152,13 @@
             <a:prstDash val="solid"/>
           </a:ln>
         </p:spPr>
+        <p:txBody>
+          <a:bodyPr/>
+          <a:lstStyle/>
+          <a:p>
+            <a:endParaRPr lang="pt-BR"/>
+          </a:p>
+        </p:txBody>
       </p:sp>
       <p:sp>
         <p:nvSpPr>
@@ -6354,7 +6183,7 @@
           </a:bodyPr>
           <a:lstStyle/>
           <a:p>
-            <a:pPr algn="l" indent="0" marL="0">
+            <a:pPr marL="0" indent="0" algn="l">
               <a:buNone/>
             </a:pPr>
             <a:r>
@@ -6374,137 +6203,7 @@
       </p:sp>
       <p:pic>
         <p:nvPicPr>
-          <p:cNvPr id="23" name="Image 8" descr="preencoded.png">    </p:cNvPr>
-          <p:cNvPicPr>
-            <a:picLocks noChangeAspect="1"/>
-          </p:cNvPicPr>
-          <p:nvPr/>
-        </p:nvPicPr>
-        <p:blipFill>
-          <a:blip r:embed="rId9"/>
-          <a:stretch>
-            <a:fillRect/>
-          </a:stretch>
-        </p:blipFill>
-        <p:spPr>
-          <a:xfrm>
-            <a:off x="3281939" y="3889772"/>
-            <a:ext cx="689372" cy="228600"/>
-          </a:xfrm>
-          <a:prstGeom prst="rect">
-            <a:avLst/>
-          </a:prstGeom>
-        </p:spPr>
-      </p:pic>
-      <p:sp>
-        <p:nvSpPr>
-          <p:cNvPr id="24" name="Text 13"/>
-          <p:cNvSpPr/>
-          <p:nvPr/>
-        </p:nvSpPr>
-        <p:spPr>
-          <a:xfrm>
-            <a:off x="3281939" y="4189809"/>
-            <a:ext cx="689372" cy="157163"/>
-          </a:xfrm>
-          <a:prstGeom prst="rect">
-            <a:avLst/>
-          </a:prstGeom>
-          <a:noFill/>
-          <a:ln/>
-        </p:spPr>
-        <p:txBody>
-          <a:bodyPr wrap="none" lIns="0" tIns="0" rIns="0" bIns="0" rtlCol="0" anchor="t">
-            <a:spAutoFit/>
-          </a:bodyPr>
-          <a:lstStyle/>
-          <a:p>
-            <a:pPr algn="ctr" indent="0" marL="0">
-              <a:buNone/>
-            </a:pPr>
-            <a:r>
-              <a:rPr lang="en-US" sz="900" b="1" dirty="0">
-                <a:solidFill>
-                  <a:srgbClr val="212529"/>
-                </a:solidFill>
-                <a:latin typeface="Montserrat Black" pitchFamily="34" charset="0"/>
-                <a:ea typeface="Montserrat Black" pitchFamily="34" charset="-122"/>
-                <a:cs typeface="Montserrat Black" pitchFamily="34" charset="-120"/>
-              </a:rPr>
-              <a:t>RabbitMQ</a:t>
-            </a:r>
-            <a:endParaRPr lang="en-US" sz="900" dirty="0"/>
-          </a:p>
-        </p:txBody>
-      </p:sp>
-      <p:pic>
-        <p:nvPicPr>
-          <p:cNvPr id="25" name="Image 9" descr="preencoded.png">    </p:cNvPr>
-          <p:cNvPicPr>
-            <a:picLocks noChangeAspect="1"/>
-          </p:cNvPicPr>
-          <p:nvPr/>
-        </p:nvPicPr>
-        <p:blipFill>
-          <a:blip r:embed="rId10"/>
-          <a:stretch>
-            <a:fillRect/>
-          </a:stretch>
-        </p:blipFill>
-        <p:spPr>
-          <a:xfrm>
-            <a:off x="5105967" y="3889772"/>
-            <a:ext cx="762595" cy="228600"/>
-          </a:xfrm>
-          <a:prstGeom prst="rect">
-            <a:avLst/>
-          </a:prstGeom>
-        </p:spPr>
-      </p:pic>
-      <p:sp>
-        <p:nvSpPr>
-          <p:cNvPr id="26" name="Text 14"/>
-          <p:cNvSpPr/>
-          <p:nvPr/>
-        </p:nvSpPr>
-        <p:spPr>
-          <a:xfrm>
-            <a:off x="5105967" y="4189809"/>
-            <a:ext cx="762595" cy="157163"/>
-          </a:xfrm>
-          <a:prstGeom prst="rect">
-            <a:avLst/>
-          </a:prstGeom>
-          <a:noFill/>
-          <a:ln/>
-        </p:spPr>
-        <p:txBody>
-          <a:bodyPr wrap="none" lIns="0" tIns="0" rIns="0" bIns="0" rtlCol="0" anchor="t">
-            <a:spAutoFit/>
-          </a:bodyPr>
-          <a:lstStyle/>
-          <a:p>
-            <a:pPr algn="ctr" indent="0" marL="0">
-              <a:buNone/>
-            </a:pPr>
-            <a:r>
-              <a:rPr lang="en-US" sz="900" b="1" dirty="0">
-                <a:solidFill>
-                  <a:srgbClr val="212529"/>
-                </a:solidFill>
-                <a:latin typeface="Montserrat Black" pitchFamily="34" charset="0"/>
-                <a:ea typeface="Montserrat Black" pitchFamily="34" charset="-122"/>
-                <a:cs typeface="Montserrat Black" pitchFamily="34" charset="-120"/>
-              </a:rPr>
-              <a:t>SQL Server</a:t>
-            </a:r>
-            <a:endParaRPr lang="en-US" sz="900" dirty="0"/>
-          </a:p>
-        </p:txBody>
-      </p:sp>
-      <p:pic>
-        <p:nvPicPr>
-          <p:cNvPr id="27" name="Image 10" descr="preencoded.png">    </p:cNvPr>
+          <p:cNvPr id="23" name="Image 8" descr="preencoded.png"/>
           <p:cNvPicPr>
             <a:picLocks noChangeAspect="1"/>
           </p:cNvPicPr>
@@ -6518,6 +6217,136 @@
         </p:blipFill>
         <p:spPr>
           <a:xfrm>
+            <a:off x="3281939" y="3889772"/>
+            <a:ext cx="689372" cy="228600"/>
+          </a:xfrm>
+          <a:prstGeom prst="rect">
+            <a:avLst/>
+          </a:prstGeom>
+        </p:spPr>
+      </p:pic>
+      <p:sp>
+        <p:nvSpPr>
+          <p:cNvPr id="24" name="Text 13"/>
+          <p:cNvSpPr/>
+          <p:nvPr/>
+        </p:nvSpPr>
+        <p:spPr>
+          <a:xfrm>
+            <a:off x="3281939" y="4189809"/>
+            <a:ext cx="689372" cy="157163"/>
+          </a:xfrm>
+          <a:prstGeom prst="rect">
+            <a:avLst/>
+          </a:prstGeom>
+          <a:noFill/>
+          <a:ln/>
+        </p:spPr>
+        <p:txBody>
+          <a:bodyPr wrap="none" lIns="0" tIns="0" rIns="0" bIns="0" rtlCol="0" anchor="t">
+            <a:spAutoFit/>
+          </a:bodyPr>
+          <a:lstStyle/>
+          <a:p>
+            <a:pPr marL="0" indent="0" algn="ctr">
+              <a:buNone/>
+            </a:pPr>
+            <a:r>
+              <a:rPr lang="en-US" sz="900" b="1" dirty="0">
+                <a:solidFill>
+                  <a:srgbClr val="212529"/>
+                </a:solidFill>
+                <a:latin typeface="Montserrat Black" pitchFamily="34" charset="0"/>
+                <a:ea typeface="Montserrat Black" pitchFamily="34" charset="-122"/>
+                <a:cs typeface="Montserrat Black" pitchFamily="34" charset="-120"/>
+              </a:rPr>
+              <a:t>RabbitMQ</a:t>
+            </a:r>
+            <a:endParaRPr lang="en-US" sz="900" dirty="0"/>
+          </a:p>
+        </p:txBody>
+      </p:sp>
+      <p:pic>
+        <p:nvPicPr>
+          <p:cNvPr id="25" name="Image 9" descr="preencoded.png"/>
+          <p:cNvPicPr>
+            <a:picLocks noChangeAspect="1"/>
+          </p:cNvPicPr>
+          <p:nvPr/>
+        </p:nvPicPr>
+        <p:blipFill>
+          <a:blip r:embed="rId12"/>
+          <a:stretch>
+            <a:fillRect/>
+          </a:stretch>
+        </p:blipFill>
+        <p:spPr>
+          <a:xfrm>
+            <a:off x="5105967" y="3889772"/>
+            <a:ext cx="762595" cy="228600"/>
+          </a:xfrm>
+          <a:prstGeom prst="rect">
+            <a:avLst/>
+          </a:prstGeom>
+        </p:spPr>
+      </p:pic>
+      <p:sp>
+        <p:nvSpPr>
+          <p:cNvPr id="26" name="Text 14"/>
+          <p:cNvSpPr/>
+          <p:nvPr/>
+        </p:nvSpPr>
+        <p:spPr>
+          <a:xfrm>
+            <a:off x="5105967" y="4189809"/>
+            <a:ext cx="762595" cy="157163"/>
+          </a:xfrm>
+          <a:prstGeom prst="rect">
+            <a:avLst/>
+          </a:prstGeom>
+          <a:noFill/>
+          <a:ln/>
+        </p:spPr>
+        <p:txBody>
+          <a:bodyPr wrap="none" lIns="0" tIns="0" rIns="0" bIns="0" rtlCol="0" anchor="t">
+            <a:spAutoFit/>
+          </a:bodyPr>
+          <a:lstStyle/>
+          <a:p>
+            <a:pPr marL="0" indent="0" algn="ctr">
+              <a:buNone/>
+            </a:pPr>
+            <a:r>
+              <a:rPr lang="en-US" sz="900" b="1" dirty="0">
+                <a:solidFill>
+                  <a:srgbClr val="212529"/>
+                </a:solidFill>
+                <a:latin typeface="Montserrat Black" pitchFamily="34" charset="0"/>
+                <a:ea typeface="Montserrat Black" pitchFamily="34" charset="-122"/>
+                <a:cs typeface="Montserrat Black" pitchFamily="34" charset="-120"/>
+              </a:rPr>
+              <a:t>SQL Server</a:t>
+            </a:r>
+            <a:endParaRPr lang="en-US" sz="900" dirty="0"/>
+          </a:p>
+        </p:txBody>
+      </p:sp>
+      <p:pic>
+        <p:nvPicPr>
+          <p:cNvPr id="27" name="Image 10" descr="preencoded.png"/>
+          <p:cNvPicPr>
+            <a:picLocks noChangeAspect="1"/>
+          </p:cNvPicPr>
+          <p:nvPr/>
+        </p:nvPicPr>
+        <p:blipFill>
+          <a:blip r:embed="rId13"/>
+          <a:stretch>
+            <a:fillRect/>
+          </a:stretch>
+        </p:blipFill>
+        <p:spPr>
+          <a:xfrm>
             <a:off x="7003219" y="3889772"/>
             <a:ext cx="859036" cy="228600"/>
           </a:xfrm>
@@ -6549,7 +6378,7 @@
           </a:bodyPr>
           <a:lstStyle/>
           <a:p>
-            <a:pPr algn="ctr" indent="0" marL="0">
+            <a:pPr marL="0" indent="0" algn="ctr">
               <a:buNone/>
             </a:pPr>
             <a:r>
@@ -6594,224 +6423,7 @@
       </p:grpSpPr>
       <p:pic>
         <p:nvPicPr>
-          <p:cNvPr id="2" name="Image 0" descr="preencoded.png">    </p:cNvPr>
-          <p:cNvPicPr>
-            <a:picLocks noChangeAspect="1"/>
-          </p:cNvPicPr>
-          <p:nvPr/>
-        </p:nvPicPr>
-        <p:blipFill>
-          <a:blip r:embed="rId1"/>
-          <a:stretch>
-            <a:fillRect/>
-          </a:stretch>
-        </p:blipFill>
-        <p:spPr>
-          <a:xfrm>
-            <a:off x="0" y="0"/>
-            <a:ext cx="9144000" cy="5143500"/>
-          </a:xfrm>
-          <a:prstGeom prst="rect">
-            <a:avLst/>
-          </a:prstGeom>
-        </p:spPr>
-      </p:pic>
-      <p:sp>
-        <p:nvSpPr>
-          <p:cNvPr id="3" name="Text 0"/>
-          <p:cNvSpPr/>
-          <p:nvPr/>
-        </p:nvSpPr>
-        <p:spPr>
-          <a:xfrm>
-            <a:off x="6109692" y="428625"/>
-            <a:ext cx="2319933" cy="1714500"/>
-          </a:xfrm>
-          <a:prstGeom prst="rect">
-            <a:avLst/>
-          </a:prstGeom>
-          <a:noFill/>
-          <a:ln/>
-        </p:spPr>
-        <p:txBody>
-          <a:bodyPr wrap="none" lIns="0" tIns="0" rIns="0" bIns="0" rtlCol="0" anchor="t">
-            <a:spAutoFit/>
-          </a:bodyPr>
-          <a:lstStyle/>
-          <a:p>
-            <a:pPr algn="l" indent="0" marL="0">
-              <a:lnSpc>
-                <a:spcPct val="80000"/>
-              </a:lnSpc>
-              <a:buNone/>
-            </a:pPr>
-            <a:r>
-              <a:rPr lang="en-US" sz="12450" b="1" dirty="0">
-                <a:solidFill>
-                  <a:srgbClr val="212529">
-                    <a:alpha val="5000"/>
-                  </a:srgbClr>
-                </a:solidFill>
-                <a:latin typeface="Montserrat Black" pitchFamily="34" charset="0"/>
-                <a:ea typeface="Montserrat Black" pitchFamily="34" charset="-122"/>
-                <a:cs typeface="Montserrat Black" pitchFamily="34" charset="-120"/>
-              </a:rPr>
-              <a:t>06</a:t>
-            </a:r>
-            <a:endParaRPr lang="en-US" sz="12450" dirty="0"/>
-          </a:p>
-        </p:txBody>
-      </p:sp>
-      <p:sp>
-        <p:nvSpPr>
-          <p:cNvPr id="4" name="Text 1"/>
-          <p:cNvSpPr/>
-          <p:nvPr/>
-        </p:nvSpPr>
-        <p:spPr>
-          <a:xfrm>
-            <a:off x="714375" y="714375"/>
-            <a:ext cx="7715250" cy="557213"/>
-          </a:xfrm>
-          <a:prstGeom prst="rect">
-            <a:avLst/>
-          </a:prstGeom>
-          <a:noFill/>
-          <a:ln/>
-        </p:spPr>
-        <p:txBody>
-          <a:bodyPr wrap="square" lIns="0" tIns="0" rIns="0" bIns="0" rtlCol="0" anchor="t">
-            <a:spAutoFit/>
-          </a:bodyPr>
-          <a:lstStyle/>
-          <a:p>
-            <a:pPr algn="l" indent="0" marL="0">
-              <a:buNone/>
-            </a:pPr>
-            <a:r>
-              <a:rPr lang="en-US" sz="3300" b="1" dirty="0">
-                <a:solidFill>
-                  <a:srgbClr val="212529"/>
-                </a:solidFill>
-                <a:latin typeface="Montserrat Black" pitchFamily="34" charset="0"/>
-                <a:ea typeface="Montserrat Black" pitchFamily="34" charset="-122"/>
-                <a:cs typeface="Montserrat Black" pitchFamily="34" charset="-120"/>
-              </a:rPr>
-              <a:t>COMPLIANCE E GOVERNANÇA</a:t>
-            </a:r>
-            <a:endParaRPr lang="en-US" sz="3300" dirty="0"/>
-          </a:p>
-        </p:txBody>
-      </p:sp>
-      <p:sp>
-        <p:nvSpPr>
-          <p:cNvPr id="5" name="Text 2"/>
-          <p:cNvSpPr/>
-          <p:nvPr/>
-        </p:nvSpPr>
-        <p:spPr>
-          <a:xfrm>
-            <a:off x="714375" y="1700213"/>
-            <a:ext cx="2607469" cy="364331"/>
-          </a:xfrm>
-          <a:prstGeom prst="rect">
-            <a:avLst/>
-          </a:prstGeom>
-          <a:noFill/>
-          <a:ln/>
-        </p:spPr>
-        <p:txBody>
-          <a:bodyPr wrap="square" lIns="0" tIns="0" rIns="0" bIns="85090" rtlCol="0" anchor="t">
-            <a:spAutoFit/>
-          </a:bodyPr>
-          <a:lstStyle/>
-          <a:p>
-            <a:pPr algn="l" indent="0" marL="0">
-              <a:buNone/>
-            </a:pPr>
-            <a:r>
-              <a:rPr lang="en-US" sz="1600" b="1" dirty="0">
-                <a:solidFill>
-                  <a:srgbClr val="E63946"/>
-                </a:solidFill>
-                <a:latin typeface="Montserrat Black" pitchFamily="34" charset="0"/>
-                <a:ea typeface="Montserrat Black" pitchFamily="34" charset="-122"/>
-                <a:cs typeface="Montserrat Black" pitchFamily="34" charset="-120"/>
-              </a:rPr>
-              <a:t>NORMATIVAS BACEN</a:t>
-            </a:r>
-            <a:endParaRPr lang="en-US" sz="1600" dirty="0"/>
-          </a:p>
-        </p:txBody>
-      </p:sp>
-      <p:pic>
-        <p:nvPicPr>
-          <p:cNvPr id="6" name="Image 1" descr="preencoded.png">    </p:cNvPr>
-          <p:cNvPicPr>
-            <a:picLocks noChangeAspect="1"/>
-          </p:cNvPicPr>
-          <p:nvPr/>
-        </p:nvPicPr>
-        <p:blipFill>
-          <a:blip r:embed="rId2"/>
-          <a:stretch>
-            <a:fillRect/>
-          </a:stretch>
-        </p:blipFill>
-        <p:spPr>
-          <a:xfrm>
-            <a:off x="714375" y="2384227"/>
-            <a:ext cx="171450" cy="171450"/>
-          </a:xfrm>
-          <a:prstGeom prst="rect">
-            <a:avLst/>
-          </a:prstGeom>
-        </p:spPr>
-      </p:pic>
-      <p:sp>
-        <p:nvSpPr>
-          <p:cNvPr id="7" name="Text 3"/>
-          <p:cNvSpPr/>
-          <p:nvPr/>
-        </p:nvSpPr>
-        <p:spPr>
-          <a:xfrm>
-            <a:off x="992981" y="2278856"/>
-            <a:ext cx="3293269" cy="382191"/>
-          </a:xfrm>
-          <a:prstGeom prst="rect">
-            <a:avLst/>
-          </a:prstGeom>
-          <a:noFill/>
-          <a:ln/>
-        </p:spPr>
-        <p:txBody>
-          <a:bodyPr wrap="square" lIns="0" tIns="0" rIns="0" bIns="0" rtlCol="0" anchor="t">
-            <a:spAutoFit/>
-          </a:bodyPr>
-          <a:lstStyle/>
-          <a:p>
-            <a:pPr algn="l" indent="0" marL="0">
-              <a:buNone/>
-            </a:pPr>
-            <a:r>
-              <a:rPr lang="en-US" sz="1150" dirty="0">
-                <a:solidFill>
-                  <a:srgbClr val="495057"/>
-                </a:solidFill>
-                <a:latin typeface="Montserrat Medium" pitchFamily="34" charset="0"/>
-                <a:ea typeface="Montserrat Medium" pitchFamily="34" charset="-122"/>
-                <a:cs typeface="Montserrat Medium" pitchFamily="34" charset="-120"/>
-              </a:rPr>
-              <a:t>Alta Disponibilidade em Sistemas Críticos</a:t>
-            </a:r>
-            <a:endParaRPr lang="en-US" sz="1150" dirty="0"/>
-          </a:p>
-        </p:txBody>
-      </p:sp>
-      <p:pic>
-        <p:nvPicPr>
-          <p:cNvPr id="8" name="Image 2" descr="preencoded.png">    </p:cNvPr>
+          <p:cNvPr id="2" name="Image 0" descr="preencoded.png"/>
           <p:cNvPicPr>
             <a:picLocks noChangeAspect="1"/>
           </p:cNvPicPr>
@@ -6825,8 +6437,8 @@
         </p:blipFill>
         <p:spPr>
           <a:xfrm>
-            <a:off x="714375" y="2849463"/>
-            <a:ext cx="214313" cy="171450"/>
+            <a:off x="0" y="0"/>
+            <a:ext cx="9144000" cy="5143500"/>
           </a:xfrm>
           <a:prstGeom prst="rect">
             <a:avLst/>
@@ -6835,14 +6447,60 @@
       </p:pic>
       <p:sp>
         <p:nvSpPr>
-          <p:cNvPr id="9" name="Text 4"/>
-          <p:cNvSpPr/>
-          <p:nvPr/>
-        </p:nvSpPr>
-        <p:spPr>
-          <a:xfrm>
-            <a:off x="1035844" y="2839641"/>
-            <a:ext cx="2623542" cy="191095"/>
+          <p:cNvPr id="3" name="Text 0"/>
+          <p:cNvSpPr/>
+          <p:nvPr/>
+        </p:nvSpPr>
+        <p:spPr>
+          <a:xfrm>
+            <a:off x="6109692" y="428625"/>
+            <a:ext cx="2319933" cy="1714500"/>
+          </a:xfrm>
+          <a:prstGeom prst="rect">
+            <a:avLst/>
+          </a:prstGeom>
+          <a:noFill/>
+          <a:ln/>
+        </p:spPr>
+        <p:txBody>
+          <a:bodyPr wrap="none" lIns="0" tIns="0" rIns="0" bIns="0" rtlCol="0" anchor="t">
+            <a:spAutoFit/>
+          </a:bodyPr>
+          <a:lstStyle/>
+          <a:p>
+            <a:pPr marL="0" indent="0" algn="l">
+              <a:lnSpc>
+                <a:spcPct val="80000"/>
+              </a:lnSpc>
+              <a:buNone/>
+            </a:pPr>
+            <a:r>
+              <a:rPr lang="en-US" sz="12450" b="1" dirty="0">
+                <a:solidFill>
+                  <a:srgbClr val="212529">
+                    <a:alpha val="5000"/>
+                  </a:srgbClr>
+                </a:solidFill>
+                <a:latin typeface="Montserrat Black" pitchFamily="34" charset="0"/>
+                <a:ea typeface="Montserrat Black" pitchFamily="34" charset="-122"/>
+                <a:cs typeface="Montserrat Black" pitchFamily="34" charset="-120"/>
+              </a:rPr>
+              <a:t>06</a:t>
+            </a:r>
+            <a:endParaRPr lang="en-US" sz="12450" dirty="0"/>
+          </a:p>
+        </p:txBody>
+      </p:sp>
+      <p:sp>
+        <p:nvSpPr>
+          <p:cNvPr id="4" name="Text 1"/>
+          <p:cNvSpPr/>
+          <p:nvPr/>
+        </p:nvSpPr>
+        <p:spPr>
+          <a:xfrm>
+            <a:off x="714375" y="714375"/>
+            <a:ext cx="7715250" cy="557213"/>
           </a:xfrm>
           <a:prstGeom prst="rect">
             <a:avLst/>
@@ -6856,27 +6514,68 @@
           </a:bodyPr>
           <a:lstStyle/>
           <a:p>
-            <a:pPr algn="l" indent="0" marL="0">
-              <a:buNone/>
-            </a:pPr>
-            <a:r>
-              <a:rPr lang="en-US" sz="1150" dirty="0">
-                <a:solidFill>
-                  <a:srgbClr val="495057"/>
-                </a:solidFill>
-                <a:latin typeface="Montserrat Medium" pitchFamily="34" charset="0"/>
-                <a:ea typeface="Montserrat Medium" pitchFamily="34" charset="-122"/>
-                <a:cs typeface="Montserrat Medium" pitchFamily="34" charset="-120"/>
-              </a:rPr>
-              <a:t>Isolamento de Falhas (Bulkhead)</a:t>
-            </a:r>
-            <a:endParaRPr lang="en-US" sz="1150" dirty="0"/>
+            <a:pPr marL="0" indent="0" algn="l">
+              <a:buNone/>
+            </a:pPr>
+            <a:r>
+              <a:rPr lang="en-US" sz="3300" b="1" dirty="0">
+                <a:solidFill>
+                  <a:srgbClr val="212529"/>
+                </a:solidFill>
+                <a:latin typeface="Montserrat Black" pitchFamily="34" charset="0"/>
+                <a:ea typeface="Montserrat Black" pitchFamily="34" charset="-122"/>
+                <a:cs typeface="Montserrat Black" pitchFamily="34" charset="-120"/>
+              </a:rPr>
+              <a:t>COMPLIANCE E GOVERNANÇA</a:t>
+            </a:r>
+            <a:endParaRPr lang="en-US" sz="3300" dirty="0"/>
+          </a:p>
+        </p:txBody>
+      </p:sp>
+      <p:sp>
+        <p:nvSpPr>
+          <p:cNvPr id="5" name="Text 2"/>
+          <p:cNvSpPr/>
+          <p:nvPr/>
+        </p:nvSpPr>
+        <p:spPr>
+          <a:xfrm>
+            <a:off x="714375" y="1700213"/>
+            <a:ext cx="2607469" cy="364331"/>
+          </a:xfrm>
+          <a:prstGeom prst="rect">
+            <a:avLst/>
+          </a:prstGeom>
+          <a:noFill/>
+          <a:ln/>
+        </p:spPr>
+        <p:txBody>
+          <a:bodyPr wrap="square" lIns="0" tIns="0" rIns="0" bIns="85090" rtlCol="0" anchor="t">
+            <a:spAutoFit/>
+          </a:bodyPr>
+          <a:lstStyle/>
+          <a:p>
+            <a:pPr marL="0" indent="0" algn="l">
+              <a:buNone/>
+            </a:pPr>
+            <a:r>
+              <a:rPr lang="en-US" sz="1600" b="1" dirty="0">
+                <a:solidFill>
+                  <a:srgbClr val="E63946"/>
+                </a:solidFill>
+                <a:latin typeface="Montserrat Black" pitchFamily="34" charset="0"/>
+                <a:ea typeface="Montserrat Black" pitchFamily="34" charset="-122"/>
+                <a:cs typeface="Montserrat Black" pitchFamily="34" charset="-120"/>
+              </a:rPr>
+              <a:t>NORMATIVAS BACEN</a:t>
+            </a:r>
+            <a:endParaRPr lang="en-US" sz="1600" dirty="0"/>
           </a:p>
         </p:txBody>
       </p:sp>
       <p:pic>
         <p:nvPicPr>
-          <p:cNvPr id="10" name="Image 3" descr="preencoded.png">    </p:cNvPr>
+          <p:cNvPr id="6" name="Image 1" descr="preencoded.png"/>
           <p:cNvPicPr>
             <a:picLocks noChangeAspect="1"/>
           </p:cNvPicPr>
@@ -6890,7 +6589,7 @@
         </p:blipFill>
         <p:spPr>
           <a:xfrm>
-            <a:off x="714375" y="3219152"/>
+            <a:off x="714375" y="2384227"/>
             <a:ext cx="171450" cy="171450"/>
           </a:xfrm>
           <a:prstGeom prst="rect">
@@ -6900,14 +6599,14 @@
       </p:pic>
       <p:sp>
         <p:nvSpPr>
-          <p:cNvPr id="11" name="Text 5"/>
-          <p:cNvSpPr/>
-          <p:nvPr/>
-        </p:nvSpPr>
-        <p:spPr>
-          <a:xfrm>
-            <a:off x="992981" y="3209330"/>
-            <a:ext cx="2852142" cy="191095"/>
+          <p:cNvPr id="7" name="Text 3"/>
+          <p:cNvSpPr/>
+          <p:nvPr/>
+        </p:nvSpPr>
+        <p:spPr>
+          <a:xfrm>
+            <a:off x="992981" y="2278856"/>
+            <a:ext cx="3293269" cy="382191"/>
           </a:xfrm>
           <a:prstGeom prst="rect">
             <a:avLst/>
@@ -6921,7 +6620,7 @@
           </a:bodyPr>
           <a:lstStyle/>
           <a:p>
-            <a:pPr algn="l" indent="0" marL="0">
+            <a:pPr marL="0" indent="0" algn="l">
               <a:buNone/>
             </a:pPr>
             <a:r>
@@ -6933,7 +6632,7 @@
                 <a:ea typeface="Montserrat Medium" pitchFamily="34" charset="-122"/>
                 <a:cs typeface="Montserrat Medium" pitchFamily="34" charset="-120"/>
               </a:rPr>
-              <a:t>Rastreabilidade Total de Transações</a:t>
+              <a:t>Alta Disponibilidade em Sistemas Críticos</a:t>
             </a:r>
             <a:endParaRPr lang="en-US" sz="1150" dirty="0"/>
           </a:p>
@@ -6941,7 +6640,7 @@
       </p:sp>
       <p:pic>
         <p:nvPicPr>
-          <p:cNvPr id="12" name="Image 4" descr="preencoded.png">    </p:cNvPr>
+          <p:cNvPr id="8" name="Image 2" descr="preencoded.png"/>
           <p:cNvPicPr>
             <a:picLocks noChangeAspect="1"/>
           </p:cNvPicPr>
@@ -6955,8 +6654,8 @@
         </p:blipFill>
         <p:spPr>
           <a:xfrm>
-            <a:off x="714375" y="3588841"/>
-            <a:ext cx="171450" cy="171450"/>
+            <a:off x="714375" y="2849463"/>
+            <a:ext cx="214313" cy="171450"/>
           </a:xfrm>
           <a:prstGeom prst="rect">
             <a:avLst/>
@@ -6965,14 +6664,14 @@
       </p:pic>
       <p:sp>
         <p:nvSpPr>
-          <p:cNvPr id="13" name="Text 6"/>
-          <p:cNvSpPr/>
-          <p:nvPr/>
-        </p:nvSpPr>
-        <p:spPr>
-          <a:xfrm>
-            <a:off x="992981" y="3579019"/>
-            <a:ext cx="2700338" cy="191095"/>
+          <p:cNvPr id="9" name="Text 4"/>
+          <p:cNvSpPr/>
+          <p:nvPr/>
+        </p:nvSpPr>
+        <p:spPr>
+          <a:xfrm>
+            <a:off x="1035844" y="2839641"/>
+            <a:ext cx="2623542" cy="191095"/>
           </a:xfrm>
           <a:prstGeom prst="rect">
             <a:avLst/>
@@ -6986,7 +6685,7 @@
           </a:bodyPr>
           <a:lstStyle/>
           <a:p>
-            <a:pPr algn="l" indent="0" marL="0">
+            <a:pPr marL="0" indent="0" algn="l">
               <a:buNone/>
             </a:pPr>
             <a:r>
@@ -6998,56 +6697,15 @@
                 <a:ea typeface="Montserrat Medium" pitchFamily="34" charset="-122"/>
                 <a:cs typeface="Montserrat Medium" pitchFamily="34" charset="-120"/>
               </a:rPr>
-              <a:t>Integridade de Dados Financeiros</a:t>
+              <a:t>Isolamento de Falhas (Bulkhead)</a:t>
             </a:r>
             <a:endParaRPr lang="en-US" sz="1150" dirty="0"/>
-          </a:p>
-        </p:txBody>
-      </p:sp>
-      <p:sp>
-        <p:nvSpPr>
-          <p:cNvPr id="14" name="Text 7"/>
-          <p:cNvSpPr/>
-          <p:nvPr/>
-        </p:nvSpPr>
-        <p:spPr>
-          <a:xfrm>
-            <a:off x="4857750" y="1700213"/>
-            <a:ext cx="2193131" cy="364331"/>
-          </a:xfrm>
-          <a:prstGeom prst="rect">
-            <a:avLst/>
-          </a:prstGeom>
-          <a:noFill/>
-          <a:ln/>
-        </p:spPr>
-        <p:txBody>
-          <a:bodyPr wrap="square" lIns="0" tIns="0" rIns="0" bIns="85090" rtlCol="0" anchor="t">
-            <a:spAutoFit/>
-          </a:bodyPr>
-          <a:lstStyle/>
-          <a:p>
-            <a:pPr algn="l" indent="0" marL="0">
-              <a:buNone/>
-            </a:pPr>
-            <a:r>
-              <a:rPr lang="en-US" sz="1600" b="1" dirty="0">
-                <a:solidFill>
-                  <a:srgbClr val="E63946"/>
-                </a:solidFill>
-                <a:latin typeface="Montserrat Black" pitchFamily="34" charset="0"/>
-                <a:ea typeface="Montserrat Black" pitchFamily="34" charset="-122"/>
-                <a:cs typeface="Montserrat Black" pitchFamily="34" charset="-120"/>
-              </a:rPr>
-              <a:t>DIRETRIZES LGPD</a:t>
-            </a:r>
-            <a:endParaRPr lang="en-US" sz="1600" dirty="0"/>
           </a:p>
         </p:txBody>
       </p:sp>
       <p:pic>
         <p:nvPicPr>
-          <p:cNvPr id="15" name="Image 5" descr="preencoded.png">    </p:cNvPr>
+          <p:cNvPr id="10" name="Image 3" descr="preencoded.png"/>
           <p:cNvPicPr>
             <a:picLocks noChangeAspect="1"/>
           </p:cNvPicPr>
@@ -7061,8 +6719,8 @@
         </p:blipFill>
         <p:spPr>
           <a:xfrm>
-            <a:off x="4857750" y="2288679"/>
-            <a:ext cx="214313" cy="171450"/>
+            <a:off x="714375" y="3219152"/>
+            <a:ext cx="171450" cy="171450"/>
           </a:xfrm>
           <a:prstGeom prst="rect">
             <a:avLst/>
@@ -7071,14 +6729,14 @@
       </p:pic>
       <p:sp>
         <p:nvSpPr>
-          <p:cNvPr id="16" name="Text 8"/>
-          <p:cNvSpPr/>
-          <p:nvPr/>
-        </p:nvSpPr>
-        <p:spPr>
-          <a:xfrm>
-            <a:off x="5179219" y="2278856"/>
-            <a:ext cx="2621756" cy="191095"/>
+          <p:cNvPr id="11" name="Text 5"/>
+          <p:cNvSpPr/>
+          <p:nvPr/>
+        </p:nvSpPr>
+        <p:spPr>
+          <a:xfrm>
+            <a:off x="992981" y="3209330"/>
+            <a:ext cx="2852142" cy="191095"/>
           </a:xfrm>
           <a:prstGeom prst="rect">
             <a:avLst/>
@@ -7092,7 +6750,7 @@
           </a:bodyPr>
           <a:lstStyle/>
           <a:p>
-            <a:pPr algn="l" indent="0" marL="0">
+            <a:pPr marL="0" indent="0" algn="l">
               <a:buNone/>
             </a:pPr>
             <a:r>
@@ -7104,7 +6762,7 @@
                 <a:ea typeface="Montserrat Medium" pitchFamily="34" charset="-122"/>
                 <a:cs typeface="Montserrat Medium" pitchFamily="34" charset="-120"/>
               </a:rPr>
-              <a:t>Privacy by Design na Arquitetura</a:t>
+              <a:t>Rastreabilidade Total de Transações</a:t>
             </a:r>
             <a:endParaRPr lang="en-US" sz="1150" dirty="0"/>
           </a:p>
@@ -7112,7 +6770,7 @@
       </p:sp>
       <p:pic>
         <p:nvPicPr>
-          <p:cNvPr id="17" name="Image 6" descr="preencoded.png">    </p:cNvPr>
+          <p:cNvPr id="12" name="Image 4" descr="preencoded.png"/>
           <p:cNvPicPr>
             <a:picLocks noChangeAspect="1"/>
           </p:cNvPicPr>
@@ -7126,8 +6784,8 @@
         </p:blipFill>
         <p:spPr>
           <a:xfrm>
-            <a:off x="4857750" y="2658368"/>
-            <a:ext cx="150019" cy="171450"/>
+            <a:off x="714375" y="3588841"/>
+            <a:ext cx="171450" cy="171450"/>
           </a:xfrm>
           <a:prstGeom prst="rect">
             <a:avLst/>
@@ -7136,14 +6794,14 @@
       </p:pic>
       <p:sp>
         <p:nvSpPr>
-          <p:cNvPr id="18" name="Text 9"/>
-          <p:cNvSpPr/>
-          <p:nvPr/>
-        </p:nvSpPr>
-        <p:spPr>
-          <a:xfrm>
-            <a:off x="5114925" y="2648545"/>
-            <a:ext cx="2875359" cy="191095"/>
+          <p:cNvPr id="13" name="Text 6"/>
+          <p:cNvSpPr/>
+          <p:nvPr/>
+        </p:nvSpPr>
+        <p:spPr>
+          <a:xfrm>
+            <a:off x="992981" y="3579019"/>
+            <a:ext cx="2700338" cy="191095"/>
           </a:xfrm>
           <a:prstGeom prst="rect">
             <a:avLst/>
@@ -7157,7 +6815,7 @@
           </a:bodyPr>
           <a:lstStyle/>
           <a:p>
-            <a:pPr algn="l" indent="0" marL="0">
+            <a:pPr marL="0" indent="0" algn="l">
               <a:buNone/>
             </a:pPr>
             <a:r>
@@ -7169,15 +6827,56 @@
                 <a:ea typeface="Montserrat Medium" pitchFamily="34" charset="-122"/>
                 <a:cs typeface="Montserrat Medium" pitchFamily="34" charset="-120"/>
               </a:rPr>
-              <a:t>Criptografia de Dados Sensíveis (PII)</a:t>
+              <a:t>Integridade de Dados Financeiros</a:t>
             </a:r>
             <a:endParaRPr lang="en-US" sz="1150" dirty="0"/>
+          </a:p>
+        </p:txBody>
+      </p:sp>
+      <p:sp>
+        <p:nvSpPr>
+          <p:cNvPr id="14" name="Text 7"/>
+          <p:cNvSpPr/>
+          <p:nvPr/>
+        </p:nvSpPr>
+        <p:spPr>
+          <a:xfrm>
+            <a:off x="4857750" y="1700213"/>
+            <a:ext cx="2193131" cy="364331"/>
+          </a:xfrm>
+          <a:prstGeom prst="rect">
+            <a:avLst/>
+          </a:prstGeom>
+          <a:noFill/>
+          <a:ln/>
+        </p:spPr>
+        <p:txBody>
+          <a:bodyPr wrap="square" lIns="0" tIns="0" rIns="0" bIns="85090" rtlCol="0" anchor="t">
+            <a:spAutoFit/>
+          </a:bodyPr>
+          <a:lstStyle/>
+          <a:p>
+            <a:pPr marL="0" indent="0" algn="l">
+              <a:buNone/>
+            </a:pPr>
+            <a:r>
+              <a:rPr lang="en-US" sz="1600" b="1" dirty="0">
+                <a:solidFill>
+                  <a:srgbClr val="E63946"/>
+                </a:solidFill>
+                <a:latin typeface="Montserrat Black" pitchFamily="34" charset="0"/>
+                <a:ea typeface="Montserrat Black" pitchFamily="34" charset="-122"/>
+                <a:cs typeface="Montserrat Black" pitchFamily="34" charset="-120"/>
+              </a:rPr>
+              <a:t>DIRETRIZES LGPD</a:t>
+            </a:r>
+            <a:endParaRPr lang="en-US" sz="1600" dirty="0"/>
           </a:p>
         </p:txBody>
       </p:sp>
       <p:pic>
         <p:nvPicPr>
-          <p:cNvPr id="19" name="Image 7" descr="preencoded.png">    </p:cNvPr>
+          <p:cNvPr id="15" name="Image 5" descr="preencoded.png"/>
           <p:cNvPicPr>
             <a:picLocks noChangeAspect="1"/>
           </p:cNvPicPr>
@@ -7191,7 +6890,7 @@
         </p:blipFill>
         <p:spPr>
           <a:xfrm>
-            <a:off x="4857750" y="3028057"/>
+            <a:off x="4857750" y="2288679"/>
             <a:ext cx="214313" cy="171450"/>
           </a:xfrm>
           <a:prstGeom prst="rect">
@@ -7201,14 +6900,14 @@
       </p:pic>
       <p:sp>
         <p:nvSpPr>
-          <p:cNvPr id="20" name="Text 10"/>
-          <p:cNvSpPr/>
-          <p:nvPr/>
-        </p:nvSpPr>
-        <p:spPr>
-          <a:xfrm>
-            <a:off x="5179219" y="3018234"/>
-            <a:ext cx="2871788" cy="191095"/>
+          <p:cNvPr id="16" name="Text 8"/>
+          <p:cNvSpPr/>
+          <p:nvPr/>
+        </p:nvSpPr>
+        <p:spPr>
+          <a:xfrm>
+            <a:off x="5179219" y="2278856"/>
+            <a:ext cx="2621756" cy="191095"/>
           </a:xfrm>
           <a:prstGeom prst="rect">
             <a:avLst/>
@@ -7222,7 +6921,7 @@
           </a:bodyPr>
           <a:lstStyle/>
           <a:p>
-            <a:pPr algn="l" indent="0" marL="0">
+            <a:pPr marL="0" indent="0" algn="l">
               <a:buNone/>
             </a:pPr>
             <a:r>
@@ -7234,7 +6933,7 @@
                 <a:ea typeface="Montserrat Medium" pitchFamily="34" charset="-122"/>
                 <a:cs typeface="Montserrat Medium" pitchFamily="34" charset="-120"/>
               </a:rPr>
-              <a:t>Controle de Acesso Granular (RBAC)</a:t>
+              <a:t>Privacy by Design na Arquitetura</a:t>
             </a:r>
             <a:endParaRPr lang="en-US" sz="1150" dirty="0"/>
           </a:p>
@@ -7242,7 +6941,7 @@
       </p:sp>
       <p:pic>
         <p:nvPicPr>
-          <p:cNvPr id="21" name="Image 8" descr="preencoded.png">    </p:cNvPr>
+          <p:cNvPr id="17" name="Image 6" descr="preencoded.png"/>
           <p:cNvPicPr>
             <a:picLocks noChangeAspect="1"/>
           </p:cNvPicPr>
@@ -7256,7 +6955,7 @@
         </p:blipFill>
         <p:spPr>
           <a:xfrm>
-            <a:off x="4857750" y="3397746"/>
+            <a:off x="4857750" y="2658368"/>
             <a:ext cx="150019" cy="171450"/>
           </a:xfrm>
           <a:prstGeom prst="rect">
@@ -7266,14 +6965,14 @@
       </p:pic>
       <p:sp>
         <p:nvSpPr>
-          <p:cNvPr id="22" name="Text 11"/>
-          <p:cNvSpPr/>
-          <p:nvPr/>
-        </p:nvSpPr>
-        <p:spPr>
-          <a:xfrm>
-            <a:off x="5114925" y="3387923"/>
-            <a:ext cx="2602111" cy="191095"/>
+          <p:cNvPr id="18" name="Text 9"/>
+          <p:cNvSpPr/>
+          <p:nvPr/>
+        </p:nvSpPr>
+        <p:spPr>
+          <a:xfrm>
+            <a:off x="5114925" y="2648545"/>
+            <a:ext cx="2875359" cy="191095"/>
           </a:xfrm>
           <a:prstGeom prst="rect">
             <a:avLst/>
@@ -7287,7 +6986,7 @@
           </a:bodyPr>
           <a:lstStyle/>
           <a:p>
-            <a:pPr algn="l" indent="0" marL="0">
+            <a:pPr marL="0" indent="0" algn="l">
               <a:buNone/>
             </a:pPr>
             <a:r>
@@ -7299,6 +6998,136 @@
                 <a:ea typeface="Montserrat Medium" pitchFamily="34" charset="-122"/>
                 <a:cs typeface="Montserrat Medium" pitchFamily="34" charset="-120"/>
               </a:rPr>
+              <a:t>Criptografia de Dados Sensíveis (PII)</a:t>
+            </a:r>
+            <a:endParaRPr lang="en-US" sz="1150" dirty="0"/>
+          </a:p>
+        </p:txBody>
+      </p:sp>
+      <p:pic>
+        <p:nvPicPr>
+          <p:cNvPr id="19" name="Image 7" descr="preencoded.png"/>
+          <p:cNvPicPr>
+            <a:picLocks noChangeAspect="1"/>
+          </p:cNvPicPr>
+          <p:nvPr/>
+        </p:nvPicPr>
+        <p:blipFill>
+          <a:blip r:embed="rId10"/>
+          <a:stretch>
+            <a:fillRect/>
+          </a:stretch>
+        </p:blipFill>
+        <p:spPr>
+          <a:xfrm>
+            <a:off x="4857750" y="3028057"/>
+            <a:ext cx="214313" cy="171450"/>
+          </a:xfrm>
+          <a:prstGeom prst="rect">
+            <a:avLst/>
+          </a:prstGeom>
+        </p:spPr>
+      </p:pic>
+      <p:sp>
+        <p:nvSpPr>
+          <p:cNvPr id="20" name="Text 10"/>
+          <p:cNvSpPr/>
+          <p:nvPr/>
+        </p:nvSpPr>
+        <p:spPr>
+          <a:xfrm>
+            <a:off x="5179219" y="3018234"/>
+            <a:ext cx="2871788" cy="191095"/>
+          </a:xfrm>
+          <a:prstGeom prst="rect">
+            <a:avLst/>
+          </a:prstGeom>
+          <a:noFill/>
+          <a:ln/>
+        </p:spPr>
+        <p:txBody>
+          <a:bodyPr wrap="square" lIns="0" tIns="0" rIns="0" bIns="0" rtlCol="0" anchor="t">
+            <a:spAutoFit/>
+          </a:bodyPr>
+          <a:lstStyle/>
+          <a:p>
+            <a:pPr marL="0" indent="0" algn="l">
+              <a:buNone/>
+            </a:pPr>
+            <a:r>
+              <a:rPr lang="en-US" sz="1150" dirty="0">
+                <a:solidFill>
+                  <a:srgbClr val="495057"/>
+                </a:solidFill>
+                <a:latin typeface="Montserrat Medium" pitchFamily="34" charset="0"/>
+                <a:ea typeface="Montserrat Medium" pitchFamily="34" charset="-122"/>
+                <a:cs typeface="Montserrat Medium" pitchFamily="34" charset="-120"/>
+              </a:rPr>
+              <a:t>Controle de Acesso Granular (RBAC)</a:t>
+            </a:r>
+            <a:endParaRPr lang="en-US" sz="1150" dirty="0"/>
+          </a:p>
+        </p:txBody>
+      </p:sp>
+      <p:pic>
+        <p:nvPicPr>
+          <p:cNvPr id="21" name="Image 8" descr="preencoded.png"/>
+          <p:cNvPicPr>
+            <a:picLocks noChangeAspect="1"/>
+          </p:cNvPicPr>
+          <p:nvPr/>
+        </p:nvPicPr>
+        <p:blipFill>
+          <a:blip r:embed="rId11"/>
+          <a:stretch>
+            <a:fillRect/>
+          </a:stretch>
+        </p:blipFill>
+        <p:spPr>
+          <a:xfrm>
+            <a:off x="4857750" y="3397746"/>
+            <a:ext cx="150019" cy="171450"/>
+          </a:xfrm>
+          <a:prstGeom prst="rect">
+            <a:avLst/>
+          </a:prstGeom>
+        </p:spPr>
+      </p:pic>
+      <p:sp>
+        <p:nvSpPr>
+          <p:cNvPr id="22" name="Text 11"/>
+          <p:cNvSpPr/>
+          <p:nvPr/>
+        </p:nvSpPr>
+        <p:spPr>
+          <a:xfrm>
+            <a:off x="5114925" y="3387923"/>
+            <a:ext cx="2602111" cy="191095"/>
+          </a:xfrm>
+          <a:prstGeom prst="rect">
+            <a:avLst/>
+          </a:prstGeom>
+          <a:noFill/>
+          <a:ln/>
+        </p:spPr>
+        <p:txBody>
+          <a:bodyPr wrap="square" lIns="0" tIns="0" rIns="0" bIns="0" rtlCol="0" anchor="t">
+            <a:spAutoFit/>
+          </a:bodyPr>
+          <a:lstStyle/>
+          <a:p>
+            <a:pPr marL="0" indent="0" algn="l">
+              <a:buNone/>
+            </a:pPr>
+            <a:r>
+              <a:rPr lang="en-US" sz="1150" dirty="0">
+                <a:solidFill>
+                  <a:srgbClr val="495057"/>
+                </a:solidFill>
+                <a:latin typeface="Montserrat Medium" pitchFamily="34" charset="0"/>
+                <a:ea typeface="Montserrat Medium" pitchFamily="34" charset="-122"/>
+                <a:cs typeface="Montserrat Medium" pitchFamily="34" charset="-120"/>
+              </a:rPr>
               <a:t>Gestão de Ciclo de Vida do Dado</a:t>
             </a:r>
             <a:endParaRPr lang="en-US" sz="1150" dirty="0"/>
@@ -7328,7 +7157,7 @@
           </a:bodyPr>
           <a:lstStyle/>
           <a:p>
-            <a:pPr algn="l" indent="0" marL="0">
+            <a:pPr marL="0" indent="0" algn="l">
               <a:buNone/>
             </a:pPr>
             <a:r>
@@ -7373,227 +7202,7 @@
       </p:grpSpPr>
       <p:pic>
         <p:nvPicPr>
-          <p:cNvPr id="2" name="Image 0" descr="preencoded.png">    </p:cNvPr>
-          <p:cNvPicPr>
-            <a:picLocks noChangeAspect="1"/>
-          </p:cNvPicPr>
-          <p:nvPr/>
-        </p:nvPicPr>
-        <p:blipFill>
-          <a:blip r:embed="rId1"/>
-          <a:stretch>
-            <a:fillRect/>
-          </a:stretch>
-        </p:blipFill>
-        <p:spPr>
-          <a:xfrm>
-            <a:off x="0" y="0"/>
-            <a:ext cx="9144000" cy="5143500"/>
-          </a:xfrm>
-          <a:prstGeom prst="rect">
-            <a:avLst/>
-          </a:prstGeom>
-        </p:spPr>
-      </p:pic>
-      <p:sp>
-        <p:nvSpPr>
-          <p:cNvPr id="3" name="Text 0"/>
-          <p:cNvSpPr/>
-          <p:nvPr/>
-        </p:nvSpPr>
-        <p:spPr>
-          <a:xfrm>
-            <a:off x="6138267" y="428625"/>
-            <a:ext cx="2291358" cy="1714500"/>
-          </a:xfrm>
-          <a:prstGeom prst="rect">
-            <a:avLst/>
-          </a:prstGeom>
-          <a:noFill/>
-          <a:ln/>
-        </p:spPr>
-        <p:txBody>
-          <a:bodyPr wrap="none" lIns="0" tIns="0" rIns="0" bIns="0" rtlCol="0" anchor="t">
-            <a:spAutoFit/>
-          </a:bodyPr>
-          <a:lstStyle/>
-          <a:p>
-            <a:pPr algn="l" indent="0" marL="0">
-              <a:lnSpc>
-                <a:spcPct val="80000"/>
-              </a:lnSpc>
-              <a:buNone/>
-            </a:pPr>
-            <a:r>
-              <a:rPr lang="en-US" sz="12450" b="1" dirty="0">
-                <a:solidFill>
-                  <a:srgbClr val="212529">
-                    <a:alpha val="5000"/>
-                  </a:srgbClr>
-                </a:solidFill>
-                <a:latin typeface="Montserrat Black" pitchFamily="34" charset="0"/>
-                <a:ea typeface="Montserrat Black" pitchFamily="34" charset="-122"/>
-                <a:cs typeface="Montserrat Black" pitchFamily="34" charset="-120"/>
-              </a:rPr>
-              <a:t>07</a:t>
-            </a:r>
-            <a:endParaRPr lang="en-US" sz="12450" dirty="0"/>
-          </a:p>
-        </p:txBody>
-      </p:sp>
-      <p:sp>
-        <p:nvSpPr>
-          <p:cNvPr id="4" name="Text 1"/>
-          <p:cNvSpPr/>
-          <p:nvPr/>
-        </p:nvSpPr>
-        <p:spPr>
-          <a:xfrm>
-            <a:off x="714375" y="714375"/>
-            <a:ext cx="7715250" cy="557213"/>
-          </a:xfrm>
-          <a:prstGeom prst="rect">
-            <a:avLst/>
-          </a:prstGeom>
-          <a:noFill/>
-          <a:ln/>
-        </p:spPr>
-        <p:txBody>
-          <a:bodyPr wrap="square" lIns="0" tIns="0" rIns="0" bIns="0" rtlCol="0" anchor="t">
-            <a:spAutoFit/>
-          </a:bodyPr>
-          <a:lstStyle/>
-          <a:p>
-            <a:pPr algn="l" indent="0" marL="0">
-              <a:buNone/>
-            </a:pPr>
-            <a:r>
-              <a:rPr lang="en-US" sz="3300" b="1" dirty="0">
-                <a:solidFill>
-                  <a:srgbClr val="212529"/>
-                </a:solidFill>
-                <a:latin typeface="Montserrat Black" pitchFamily="34" charset="0"/>
-                <a:ea typeface="Montserrat Black" pitchFamily="34" charset="-122"/>
-                <a:cs typeface="Montserrat Black" pitchFamily="34" charset="-120"/>
-              </a:rPr>
-              <a:t>ESTRATÉGIAS DE RESILIÊNCIA</a:t>
-            </a:r>
-            <a:endParaRPr lang="en-US" sz="3300" dirty="0"/>
-          </a:p>
-        </p:txBody>
-      </p:sp>
-      <p:pic>
-        <p:nvPicPr>
-          <p:cNvPr id="5" name="Image 1" descr="preencoded.png">    </p:cNvPr>
-          <p:cNvPicPr>
-            <a:picLocks noChangeAspect="1"/>
-          </p:cNvPicPr>
-          <p:nvPr/>
-        </p:nvPicPr>
-        <p:blipFill>
-          <a:blip r:embed="rId2"/>
-          <a:stretch>
-            <a:fillRect/>
-          </a:stretch>
-        </p:blipFill>
-        <p:spPr>
-          <a:xfrm>
-            <a:off x="714375" y="1768078"/>
-            <a:ext cx="342900" cy="342900"/>
-          </a:xfrm>
-          <a:prstGeom prst="rect">
-            <a:avLst/>
-          </a:prstGeom>
-        </p:spPr>
-      </p:pic>
-      <p:sp>
-        <p:nvSpPr>
-          <p:cNvPr id="6" name="Text 2"/>
-          <p:cNvSpPr/>
-          <p:nvPr/>
-        </p:nvSpPr>
-        <p:spPr>
-          <a:xfrm>
-            <a:off x="1271588" y="1700213"/>
-            <a:ext cx="3086100" cy="557213"/>
-          </a:xfrm>
-          <a:prstGeom prst="rect">
-            <a:avLst/>
-          </a:prstGeom>
-          <a:noFill/>
-          <a:ln/>
-        </p:spPr>
-        <p:txBody>
-          <a:bodyPr wrap="square" lIns="0" tIns="0" rIns="0" bIns="0" rtlCol="0" anchor="t">
-            <a:spAutoFit/>
-          </a:bodyPr>
-          <a:lstStyle/>
-          <a:p>
-            <a:pPr algn="l" indent="0" marL="0">
-              <a:buNone/>
-            </a:pPr>
-            <a:r>
-              <a:rPr lang="en-US" sz="1600" b="1" dirty="0">
-                <a:solidFill>
-                  <a:srgbClr val="212529"/>
-                </a:solidFill>
-                <a:latin typeface="Montserrat Black" pitchFamily="34" charset="0"/>
-                <a:ea typeface="Montserrat Black" pitchFamily="34" charset="-122"/>
-                <a:cs typeface="Montserrat Black" pitchFamily="34" charset="-120"/>
-              </a:rPr>
-              <a:t>ISOLAMENTO DE CONTEXTOS</a:t>
-            </a:r>
-            <a:endParaRPr lang="en-US" sz="1600" dirty="0"/>
-          </a:p>
-        </p:txBody>
-      </p:sp>
-      <p:sp>
-        <p:nvSpPr>
-          <p:cNvPr id="7" name="Text 3"/>
-          <p:cNvSpPr/>
-          <p:nvPr/>
-        </p:nvSpPr>
-        <p:spPr>
-          <a:xfrm>
-            <a:off x="1271588" y="2364581"/>
-            <a:ext cx="3086100" cy="685800"/>
-          </a:xfrm>
-          <a:prstGeom prst="rect">
-            <a:avLst/>
-          </a:prstGeom>
-          <a:noFill/>
-          <a:ln/>
-        </p:spPr>
-        <p:txBody>
-          <a:bodyPr wrap="square" lIns="0" tIns="0" rIns="0" bIns="0" rtlCol="0" anchor="t">
-            <a:spAutoFit/>
-          </a:bodyPr>
-          <a:lstStyle/>
-          <a:p>
-            <a:pPr algn="l" indent="0" marL="0">
-              <a:lnSpc>
-                <a:spcPct val="128000"/>
-              </a:lnSpc>
-              <a:buNone/>
-            </a:pPr>
-            <a:r>
-              <a:rPr lang="en-US" sz="1050" dirty="0">
-                <a:solidFill>
-                  <a:srgbClr val="495057"/>
-                </a:solidFill>
-                <a:latin typeface="Montserrat Medium" pitchFamily="34" charset="0"/>
-                <a:ea typeface="Montserrat Medium" pitchFamily="34" charset="-122"/>
-                <a:cs typeface="Montserrat Medium" pitchFamily="34" charset="-120"/>
-              </a:rPr>
-              <a:t>Falhas no serviço de Relatórios não impactam a capacidade crítica de registro de Lançamentos.</a:t>
-            </a:r>
-            <a:endParaRPr lang="en-US" sz="1050" dirty="0"/>
-          </a:p>
-        </p:txBody>
-      </p:sp>
-      <p:pic>
-        <p:nvPicPr>
-          <p:cNvPr id="8" name="Image 2" descr="preencoded.png">    </p:cNvPr>
+          <p:cNvPr id="2" name="Image 0" descr="preencoded.png"/>
           <p:cNvPicPr>
             <a:picLocks noChangeAspect="1"/>
           </p:cNvPicPr>
@@ -7607,8 +7216,8 @@
         </p:blipFill>
         <p:spPr>
           <a:xfrm>
-            <a:off x="4786313" y="1768078"/>
-            <a:ext cx="342900" cy="342900"/>
+            <a:off x="0" y="0"/>
+            <a:ext cx="9144000" cy="5143500"/>
           </a:xfrm>
           <a:prstGeom prst="rect">
             <a:avLst/>
@@ -7617,55 +7226,60 @@
       </p:pic>
       <p:sp>
         <p:nvSpPr>
-          <p:cNvPr id="9" name="Text 4"/>
-          <p:cNvSpPr/>
-          <p:nvPr/>
-        </p:nvSpPr>
-        <p:spPr>
-          <a:xfrm>
-            <a:off x="5343525" y="1700213"/>
-            <a:ext cx="3086100" cy="557213"/>
-          </a:xfrm>
-          <a:prstGeom prst="rect">
-            <a:avLst/>
-          </a:prstGeom>
-          <a:noFill/>
-          <a:ln/>
-        </p:spPr>
-        <p:txBody>
-          <a:bodyPr wrap="square" lIns="0" tIns="0" rIns="0" bIns="0" rtlCol="0" anchor="t">
-            <a:spAutoFit/>
-          </a:bodyPr>
-          <a:lstStyle/>
-          <a:p>
-            <a:pPr algn="l" indent="0" marL="0">
-              <a:buNone/>
-            </a:pPr>
-            <a:r>
-              <a:rPr lang="en-US" sz="1600" b="1" dirty="0">
-                <a:solidFill>
-                  <a:srgbClr val="212529"/>
+          <p:cNvPr id="3" name="Text 0"/>
+          <p:cNvSpPr/>
+          <p:nvPr/>
+        </p:nvSpPr>
+        <p:spPr>
+          <a:xfrm>
+            <a:off x="6138267" y="428625"/>
+            <a:ext cx="2291358" cy="1714500"/>
+          </a:xfrm>
+          <a:prstGeom prst="rect">
+            <a:avLst/>
+          </a:prstGeom>
+          <a:noFill/>
+          <a:ln/>
+        </p:spPr>
+        <p:txBody>
+          <a:bodyPr wrap="none" lIns="0" tIns="0" rIns="0" bIns="0" rtlCol="0" anchor="t">
+            <a:spAutoFit/>
+          </a:bodyPr>
+          <a:lstStyle/>
+          <a:p>
+            <a:pPr marL="0" indent="0" algn="l">
+              <a:lnSpc>
+                <a:spcPct val="80000"/>
+              </a:lnSpc>
+              <a:buNone/>
+            </a:pPr>
+            <a:r>
+              <a:rPr lang="en-US" sz="12450" b="1" dirty="0">
+                <a:solidFill>
+                  <a:srgbClr val="212529">
+                    <a:alpha val="5000"/>
+                  </a:srgbClr>
                 </a:solidFill>
                 <a:latin typeface="Montserrat Black" pitchFamily="34" charset="0"/>
                 <a:ea typeface="Montserrat Black" pitchFamily="34" charset="-122"/>
                 <a:cs typeface="Montserrat Black" pitchFamily="34" charset="-120"/>
               </a:rPr>
-              <a:t>TOLERÂNCIA A FALHAS (DLQ)</a:t>
-            </a:r>
-            <a:endParaRPr lang="en-US" sz="1600" dirty="0"/>
-          </a:p>
-        </p:txBody>
-      </p:sp>
-      <p:sp>
-        <p:nvSpPr>
-          <p:cNvPr id="10" name="Text 5"/>
-          <p:cNvSpPr/>
-          <p:nvPr/>
-        </p:nvSpPr>
-        <p:spPr>
-          <a:xfrm>
-            <a:off x="5343525" y="2364581"/>
-            <a:ext cx="3086100" cy="685800"/>
+              <a:t>07</a:t>
+            </a:r>
+            <a:endParaRPr lang="en-US" sz="12450" dirty="0"/>
+          </a:p>
+        </p:txBody>
+      </p:sp>
+      <p:sp>
+        <p:nvSpPr>
+          <p:cNvPr id="4" name="Text 1"/>
+          <p:cNvSpPr/>
+          <p:nvPr/>
+        </p:nvSpPr>
+        <p:spPr>
+          <a:xfrm>
+            <a:off x="714375" y="714375"/>
+            <a:ext cx="7715250" cy="557213"/>
           </a:xfrm>
           <a:prstGeom prst="rect">
             <a:avLst/>
@@ -7679,30 +7293,27 @@
           </a:bodyPr>
           <a:lstStyle/>
           <a:p>
-            <a:pPr algn="l" indent="0" marL="0">
-              <a:lnSpc>
-                <a:spcPct val="128000"/>
-              </a:lnSpc>
-              <a:buNone/>
-            </a:pPr>
-            <a:r>
-              <a:rPr lang="en-US" sz="1050" dirty="0">
-                <a:solidFill>
-                  <a:srgbClr val="495057"/>
-                </a:solidFill>
-                <a:latin typeface="Montserrat Medium" pitchFamily="34" charset="0"/>
-                <a:ea typeface="Montserrat Medium" pitchFamily="34" charset="-122"/>
-                <a:cs typeface="Montserrat Medium" pitchFamily="34" charset="-120"/>
-              </a:rPr>
-              <a:t>Uso de Dead Letter Queues para garantir que mensagens não processadas sejam retidas para análise e reprocessamento.</a:t>
-            </a:r>
-            <a:endParaRPr lang="en-US" sz="1050" dirty="0"/>
+            <a:pPr marL="0" indent="0" algn="l">
+              <a:buNone/>
+            </a:pPr>
+            <a:r>
+              <a:rPr lang="en-US" sz="3300" b="1" dirty="0">
+                <a:solidFill>
+                  <a:srgbClr val="212529"/>
+                </a:solidFill>
+                <a:latin typeface="Montserrat Black" pitchFamily="34" charset="0"/>
+                <a:ea typeface="Montserrat Black" pitchFamily="34" charset="-122"/>
+                <a:cs typeface="Montserrat Black" pitchFamily="34" charset="-120"/>
+              </a:rPr>
+              <a:t>ESTRATÉGIAS DE RESILIÊNCIA</a:t>
+            </a:r>
+            <a:endParaRPr lang="en-US" sz="3300" dirty="0"/>
           </a:p>
         </p:txBody>
       </p:sp>
       <p:pic>
         <p:nvPicPr>
-          <p:cNvPr id="11" name="Image 3" descr="preencoded.png">    </p:cNvPr>
+          <p:cNvPr id="5" name="Image 1" descr="preencoded.png"/>
           <p:cNvPicPr>
             <a:picLocks noChangeAspect="1"/>
           </p:cNvPicPr>
@@ -7716,8 +7327,8 @@
         </p:blipFill>
         <p:spPr>
           <a:xfrm>
-            <a:off x="714375" y="3546872"/>
-            <a:ext cx="300038" cy="342900"/>
+            <a:off x="714375" y="1768078"/>
+            <a:ext cx="342900" cy="342900"/>
           </a:xfrm>
           <a:prstGeom prst="rect">
             <a:avLst/>
@@ -7726,14 +7337,14 @@
       </p:pic>
       <p:sp>
         <p:nvSpPr>
-          <p:cNvPr id="12" name="Text 6"/>
-          <p:cNvSpPr/>
-          <p:nvPr/>
-        </p:nvSpPr>
-        <p:spPr>
-          <a:xfrm>
-            <a:off x="1228725" y="3479006"/>
-            <a:ext cx="3128963" cy="557213"/>
+          <p:cNvPr id="6" name="Text 2"/>
+          <p:cNvSpPr/>
+          <p:nvPr/>
+        </p:nvSpPr>
+        <p:spPr>
+          <a:xfrm>
+            <a:off x="1271588" y="1700213"/>
+            <a:ext cx="3086100" cy="557213"/>
           </a:xfrm>
           <a:prstGeom prst="rect">
             <a:avLst/>
@@ -7747,7 +7358,7 @@
           </a:bodyPr>
           <a:lstStyle/>
           <a:p>
-            <a:pPr algn="l" indent="0" marL="0">
+            <a:pPr marL="0" indent="0" algn="l">
               <a:buNone/>
             </a:pPr>
             <a:r>
@@ -7759,7 +7370,7 @@
                 <a:ea typeface="Montserrat Black" pitchFamily="34" charset="-122"/>
                 <a:cs typeface="Montserrat Black" pitchFamily="34" charset="-120"/>
               </a:rPr>
-              <a:t>ELASTICIDADE HORIZONTAL</a:t>
+              <a:t>ISOLAMENTO DE CONTEXTOS</a:t>
             </a:r>
             <a:endParaRPr lang="en-US" sz="1600" dirty="0"/>
           </a:p>
@@ -7767,14 +7378,14 @@
       </p:sp>
       <p:sp>
         <p:nvSpPr>
-          <p:cNvPr id="13" name="Text 7"/>
-          <p:cNvSpPr/>
-          <p:nvPr/>
-        </p:nvSpPr>
-        <p:spPr>
-          <a:xfrm>
-            <a:off x="1228725" y="4143375"/>
-            <a:ext cx="3128963" cy="685800"/>
+          <p:cNvPr id="7" name="Text 3"/>
+          <p:cNvSpPr/>
+          <p:nvPr/>
+        </p:nvSpPr>
+        <p:spPr>
+          <a:xfrm>
+            <a:off x="1271588" y="2364581"/>
+            <a:ext cx="3086100" cy="685800"/>
           </a:xfrm>
           <a:prstGeom prst="rect">
             <a:avLst/>
@@ -7788,7 +7399,7 @@
           </a:bodyPr>
           <a:lstStyle/>
           <a:p>
-            <a:pPr algn="l" indent="0" marL="0">
+            <a:pPr marL="0" indent="0" algn="l">
               <a:lnSpc>
                 <a:spcPct val="128000"/>
               </a:lnSpc>
@@ -7803,7 +7414,7 @@
                 <a:ea typeface="Montserrat Medium" pitchFamily="34" charset="-122"/>
                 <a:cs typeface="Montserrat Medium" pitchFamily="34" charset="-120"/>
               </a:rPr>
-              <a:t>Autoscaling via KEDA baseado na carga de mensagens e CPU, garantindo performance sob demanda.</a:t>
+              <a:t>Falhas no serviço de Relatórios não impactam a capacidade crítica de registro de Lançamentos.</a:t>
             </a:r>
             <a:endParaRPr lang="en-US" sz="1050" dirty="0"/>
           </a:p>
@@ -7811,7 +7422,7 @@
       </p:sp>
       <p:pic>
         <p:nvPicPr>
-          <p:cNvPr id="14" name="Image 4" descr="preencoded.png">    </p:cNvPr>
+          <p:cNvPr id="8" name="Image 2" descr="preencoded.png"/>
           <p:cNvPicPr>
             <a:picLocks noChangeAspect="1"/>
           </p:cNvPicPr>
@@ -7825,8 +7436,8 @@
         </p:blipFill>
         <p:spPr>
           <a:xfrm>
-            <a:off x="4786313" y="3546872"/>
-            <a:ext cx="257175" cy="342900"/>
+            <a:off x="4786313" y="1768078"/>
+            <a:ext cx="342900" cy="342900"/>
           </a:xfrm>
           <a:prstGeom prst="rect">
             <a:avLst/>
@@ -7835,14 +7446,14 @@
       </p:pic>
       <p:sp>
         <p:nvSpPr>
-          <p:cNvPr id="15" name="Text 8"/>
-          <p:cNvSpPr/>
-          <p:nvPr/>
-        </p:nvSpPr>
-        <p:spPr>
-          <a:xfrm>
-            <a:off x="5257800" y="3479006"/>
-            <a:ext cx="3171825" cy="278606"/>
+          <p:cNvPr id="9" name="Text 4"/>
+          <p:cNvSpPr/>
+          <p:nvPr/>
+        </p:nvSpPr>
+        <p:spPr>
+          <a:xfrm>
+            <a:off x="5343525" y="1700213"/>
+            <a:ext cx="3086100" cy="557213"/>
           </a:xfrm>
           <a:prstGeom prst="rect">
             <a:avLst/>
@@ -7856,7 +7467,7 @@
           </a:bodyPr>
           <a:lstStyle/>
           <a:p>
-            <a:pPr algn="l" indent="0" marL="0">
+            <a:pPr marL="0" indent="0" algn="l">
               <a:buNone/>
             </a:pPr>
             <a:r>
@@ -7868,6 +7479,224 @@
                 <a:ea typeface="Montserrat Black" pitchFamily="34" charset="-122"/>
                 <a:cs typeface="Montserrat Black" pitchFamily="34" charset="-120"/>
               </a:rPr>
+              <a:t>TOLERÂNCIA A FALHAS (DLQ)</a:t>
+            </a:r>
+            <a:endParaRPr lang="en-US" sz="1600" dirty="0"/>
+          </a:p>
+        </p:txBody>
+      </p:sp>
+      <p:sp>
+        <p:nvSpPr>
+          <p:cNvPr id="10" name="Text 5"/>
+          <p:cNvSpPr/>
+          <p:nvPr/>
+        </p:nvSpPr>
+        <p:spPr>
+          <a:xfrm>
+            <a:off x="5343525" y="2364581"/>
+            <a:ext cx="3086100" cy="685800"/>
+          </a:xfrm>
+          <a:prstGeom prst="rect">
+            <a:avLst/>
+          </a:prstGeom>
+          <a:noFill/>
+          <a:ln/>
+        </p:spPr>
+        <p:txBody>
+          <a:bodyPr wrap="square" lIns="0" tIns="0" rIns="0" bIns="0" rtlCol="0" anchor="t">
+            <a:spAutoFit/>
+          </a:bodyPr>
+          <a:lstStyle/>
+          <a:p>
+            <a:pPr marL="0" indent="0" algn="l">
+              <a:lnSpc>
+                <a:spcPct val="128000"/>
+              </a:lnSpc>
+              <a:buNone/>
+            </a:pPr>
+            <a:r>
+              <a:rPr lang="en-US" sz="1050" dirty="0">
+                <a:solidFill>
+                  <a:srgbClr val="495057"/>
+                </a:solidFill>
+                <a:latin typeface="Montserrat Medium" pitchFamily="34" charset="0"/>
+                <a:ea typeface="Montserrat Medium" pitchFamily="34" charset="-122"/>
+                <a:cs typeface="Montserrat Medium" pitchFamily="34" charset="-120"/>
+              </a:rPr>
+              <a:t>Uso de Dead Letter Queues para garantir que mensagens não processadas sejam retidas para análise e reprocessamento.</a:t>
+            </a:r>
+            <a:endParaRPr lang="en-US" sz="1050" dirty="0"/>
+          </a:p>
+        </p:txBody>
+      </p:sp>
+      <p:pic>
+        <p:nvPicPr>
+          <p:cNvPr id="11" name="Image 3" descr="preencoded.png"/>
+          <p:cNvPicPr>
+            <a:picLocks noChangeAspect="1"/>
+          </p:cNvPicPr>
+          <p:nvPr/>
+        </p:nvPicPr>
+        <p:blipFill>
+          <a:blip r:embed="rId6"/>
+          <a:stretch>
+            <a:fillRect/>
+          </a:stretch>
+        </p:blipFill>
+        <p:spPr>
+          <a:xfrm>
+            <a:off x="714375" y="3546872"/>
+            <a:ext cx="300038" cy="342900"/>
+          </a:xfrm>
+          <a:prstGeom prst="rect">
+            <a:avLst/>
+          </a:prstGeom>
+        </p:spPr>
+      </p:pic>
+      <p:sp>
+        <p:nvSpPr>
+          <p:cNvPr id="12" name="Text 6"/>
+          <p:cNvSpPr/>
+          <p:nvPr/>
+        </p:nvSpPr>
+        <p:spPr>
+          <a:xfrm>
+            <a:off x="1228725" y="3479006"/>
+            <a:ext cx="3128963" cy="557213"/>
+          </a:xfrm>
+          <a:prstGeom prst="rect">
+            <a:avLst/>
+          </a:prstGeom>
+          <a:noFill/>
+          <a:ln/>
+        </p:spPr>
+        <p:txBody>
+          <a:bodyPr wrap="square" lIns="0" tIns="0" rIns="0" bIns="0" rtlCol="0" anchor="t">
+            <a:spAutoFit/>
+          </a:bodyPr>
+          <a:lstStyle/>
+          <a:p>
+            <a:pPr marL="0" indent="0" algn="l">
+              <a:buNone/>
+            </a:pPr>
+            <a:r>
+              <a:rPr lang="en-US" sz="1600" b="1" dirty="0">
+                <a:solidFill>
+                  <a:srgbClr val="212529"/>
+                </a:solidFill>
+                <a:latin typeface="Montserrat Black" pitchFamily="34" charset="0"/>
+                <a:ea typeface="Montserrat Black" pitchFamily="34" charset="-122"/>
+                <a:cs typeface="Montserrat Black" pitchFamily="34" charset="-120"/>
+              </a:rPr>
+              <a:t>ELASTICIDADE HORIZONTAL</a:t>
+            </a:r>
+            <a:endParaRPr lang="en-US" sz="1600" dirty="0"/>
+          </a:p>
+        </p:txBody>
+      </p:sp>
+      <p:sp>
+        <p:nvSpPr>
+          <p:cNvPr id="13" name="Text 7"/>
+          <p:cNvSpPr/>
+          <p:nvPr/>
+        </p:nvSpPr>
+        <p:spPr>
+          <a:xfrm>
+            <a:off x="1228725" y="4143375"/>
+            <a:ext cx="3128963" cy="685800"/>
+          </a:xfrm>
+          <a:prstGeom prst="rect">
+            <a:avLst/>
+          </a:prstGeom>
+          <a:noFill/>
+          <a:ln/>
+        </p:spPr>
+        <p:txBody>
+          <a:bodyPr wrap="square" lIns="0" tIns="0" rIns="0" bIns="0" rtlCol="0" anchor="t">
+            <a:spAutoFit/>
+          </a:bodyPr>
+          <a:lstStyle/>
+          <a:p>
+            <a:pPr marL="0" indent="0" algn="l">
+              <a:lnSpc>
+                <a:spcPct val="128000"/>
+              </a:lnSpc>
+              <a:buNone/>
+            </a:pPr>
+            <a:r>
+              <a:rPr lang="en-US" sz="1050" dirty="0">
+                <a:solidFill>
+                  <a:srgbClr val="495057"/>
+                </a:solidFill>
+                <a:latin typeface="Montserrat Medium" pitchFamily="34" charset="0"/>
+                <a:ea typeface="Montserrat Medium" pitchFamily="34" charset="-122"/>
+                <a:cs typeface="Montserrat Medium" pitchFamily="34" charset="-120"/>
+              </a:rPr>
+              <a:t>Autoscaling via KEDA baseado na carga de mensagens e CPU, garantindo performance sob demanda.</a:t>
+            </a:r>
+            <a:endParaRPr lang="en-US" sz="1050" dirty="0"/>
+          </a:p>
+        </p:txBody>
+      </p:sp>
+      <p:pic>
+        <p:nvPicPr>
+          <p:cNvPr id="14" name="Image 4" descr="preencoded.png"/>
+          <p:cNvPicPr>
+            <a:picLocks noChangeAspect="1"/>
+          </p:cNvPicPr>
+          <p:nvPr/>
+        </p:nvPicPr>
+        <p:blipFill>
+          <a:blip r:embed="rId7"/>
+          <a:stretch>
+            <a:fillRect/>
+          </a:stretch>
+        </p:blipFill>
+        <p:spPr>
+          <a:xfrm>
+            <a:off x="4786313" y="3546872"/>
+            <a:ext cx="257175" cy="342900"/>
+          </a:xfrm>
+          <a:prstGeom prst="rect">
+            <a:avLst/>
+          </a:prstGeom>
+        </p:spPr>
+      </p:pic>
+      <p:sp>
+        <p:nvSpPr>
+          <p:cNvPr id="15" name="Text 8"/>
+          <p:cNvSpPr/>
+          <p:nvPr/>
+        </p:nvSpPr>
+        <p:spPr>
+          <a:xfrm>
+            <a:off x="5257800" y="3479006"/>
+            <a:ext cx="3171825" cy="278606"/>
+          </a:xfrm>
+          <a:prstGeom prst="rect">
+            <a:avLst/>
+          </a:prstGeom>
+          <a:noFill/>
+          <a:ln/>
+        </p:spPr>
+        <p:txBody>
+          <a:bodyPr wrap="square" lIns="0" tIns="0" rIns="0" bIns="0" rtlCol="0" anchor="t">
+            <a:spAutoFit/>
+          </a:bodyPr>
+          <a:lstStyle/>
+          <a:p>
+            <a:pPr marL="0" indent="0" algn="l">
+              <a:buNone/>
+            </a:pPr>
+            <a:r>
+              <a:rPr lang="en-US" sz="1600" b="1" dirty="0">
+                <a:solidFill>
+                  <a:srgbClr val="212529"/>
+                </a:solidFill>
+                <a:latin typeface="Montserrat Black" pitchFamily="34" charset="0"/>
+                <a:ea typeface="Montserrat Black" pitchFamily="34" charset="-122"/>
+                <a:cs typeface="Montserrat Black" pitchFamily="34" charset="-120"/>
+              </a:rPr>
               <a:t>CIRCUIT BREAKER</a:t>
             </a:r>
             <a:endParaRPr lang="en-US" sz="1600" dirty="0"/>
@@ -7897,7 +7726,7 @@
           </a:bodyPr>
           <a:lstStyle/>
           <a:p>
-            <a:pPr algn="l" indent="0" marL="0">
+            <a:pPr marL="0" indent="0" algn="l">
               <a:lnSpc>
                 <a:spcPct val="128000"/>
               </a:lnSpc>
@@ -7945,288 +7774,7 @@
       </p:grpSpPr>
       <p:pic>
         <p:nvPicPr>
-          <p:cNvPr id="2" name="Image 0" descr="preencoded.png">    </p:cNvPr>
-          <p:cNvPicPr>
-            <a:picLocks noChangeAspect="1"/>
-          </p:cNvPicPr>
-          <p:nvPr/>
-        </p:nvPicPr>
-        <p:blipFill>
-          <a:blip r:embed="rId1"/>
-          <a:stretch>
-            <a:fillRect/>
-          </a:stretch>
-        </p:blipFill>
-        <p:spPr>
-          <a:xfrm>
-            <a:off x="0" y="0"/>
-            <a:ext cx="9144000" cy="5143500"/>
-          </a:xfrm>
-          <a:prstGeom prst="rect">
-            <a:avLst/>
-          </a:prstGeom>
-        </p:spPr>
-      </p:pic>
-      <p:sp>
-        <p:nvSpPr>
-          <p:cNvPr id="3" name="Text 0"/>
-          <p:cNvSpPr/>
-          <p:nvPr/>
-        </p:nvSpPr>
-        <p:spPr>
-          <a:xfrm>
-            <a:off x="6081117" y="428625"/>
-            <a:ext cx="2348508" cy="1714500"/>
-          </a:xfrm>
-          <a:prstGeom prst="rect">
-            <a:avLst/>
-          </a:prstGeom>
-          <a:noFill/>
-          <a:ln/>
-        </p:spPr>
-        <p:txBody>
-          <a:bodyPr wrap="none" lIns="0" tIns="0" rIns="0" bIns="0" rtlCol="0" anchor="t">
-            <a:spAutoFit/>
-          </a:bodyPr>
-          <a:lstStyle/>
-          <a:p>
-            <a:pPr algn="l" indent="0" marL="0">
-              <a:lnSpc>
-                <a:spcPct val="80000"/>
-              </a:lnSpc>
-              <a:buNone/>
-            </a:pPr>
-            <a:r>
-              <a:rPr lang="en-US" sz="12450" b="1" dirty="0">
-                <a:solidFill>
-                  <a:srgbClr val="212529">
-                    <a:alpha val="5000"/>
-                  </a:srgbClr>
-                </a:solidFill>
-                <a:latin typeface="Montserrat Black" pitchFamily="34" charset="0"/>
-                <a:ea typeface="Montserrat Black" pitchFamily="34" charset="-122"/>
-                <a:cs typeface="Montserrat Black" pitchFamily="34" charset="-120"/>
-              </a:rPr>
-              <a:t>08</a:t>
-            </a:r>
-            <a:endParaRPr lang="en-US" sz="12450" dirty="0"/>
-          </a:p>
-        </p:txBody>
-      </p:sp>
-      <p:sp>
-        <p:nvSpPr>
-          <p:cNvPr id="4" name="Text 1"/>
-          <p:cNvSpPr/>
-          <p:nvPr/>
-        </p:nvSpPr>
-        <p:spPr>
-          <a:xfrm>
-            <a:off x="714375" y="714375"/>
-            <a:ext cx="7715250" cy="557213"/>
-          </a:xfrm>
-          <a:prstGeom prst="rect">
-            <a:avLst/>
-          </a:prstGeom>
-          <a:noFill/>
-          <a:ln/>
-        </p:spPr>
-        <p:txBody>
-          <a:bodyPr wrap="square" lIns="0" tIns="0" rIns="0" bIns="0" rtlCol="0" anchor="t">
-            <a:spAutoFit/>
-          </a:bodyPr>
-          <a:lstStyle/>
-          <a:p>
-            <a:pPr algn="l" indent="0" marL="0">
-              <a:buNone/>
-            </a:pPr>
-            <a:r>
-              <a:rPr lang="en-US" sz="3300" b="1" dirty="0">
-                <a:solidFill>
-                  <a:srgbClr val="212529"/>
-                </a:solidFill>
-                <a:latin typeface="Montserrat Black" pitchFamily="34" charset="0"/>
-                <a:ea typeface="Montserrat Black" pitchFamily="34" charset="-122"/>
-                <a:cs typeface="Montserrat Black" pitchFamily="34" charset="-120"/>
-              </a:rPr>
-              <a:t>DADOS E PERFORMANCE</a:t>
-            </a:r>
-            <a:endParaRPr lang="en-US" sz="3300" dirty="0"/>
-          </a:p>
-        </p:txBody>
-      </p:sp>
-      <p:pic>
-        <p:nvPicPr>
-          <p:cNvPr id="5" name="Image 1" descr="preencoded.png">    </p:cNvPr>
-          <p:cNvPicPr>
-            <a:picLocks noChangeAspect="1"/>
-          </p:cNvPicPr>
-          <p:nvPr/>
-        </p:nvPicPr>
-        <p:blipFill>
-          <a:blip r:embed="rId2"/>
-          <a:stretch>
-            <a:fillRect/>
-          </a:stretch>
-        </p:blipFill>
-        <p:spPr>
-          <a:xfrm>
-            <a:off x="714375" y="1732359"/>
-            <a:ext cx="300038" cy="342900"/>
-          </a:xfrm>
-          <a:prstGeom prst="rect">
-            <a:avLst/>
-          </a:prstGeom>
-        </p:spPr>
-      </p:pic>
-      <p:sp>
-        <p:nvSpPr>
-          <p:cNvPr id="6" name="Text 2"/>
-          <p:cNvSpPr/>
-          <p:nvPr/>
-        </p:nvSpPr>
-        <p:spPr>
-          <a:xfrm>
-            <a:off x="714375" y="2260997"/>
-            <a:ext cx="2381241" cy="242888"/>
-          </a:xfrm>
-          <a:prstGeom prst="rect">
-            <a:avLst/>
-          </a:prstGeom>
-          <a:noFill/>
-          <a:ln/>
-        </p:spPr>
-        <p:txBody>
-          <a:bodyPr wrap="square" lIns="0" tIns="0" rIns="0" bIns="0" rtlCol="0" anchor="t">
-            <a:spAutoFit/>
-          </a:bodyPr>
-          <a:lstStyle/>
-          <a:p>
-            <a:pPr algn="l" indent="0" marL="0">
-              <a:buNone/>
-            </a:pPr>
-            <a:r>
-              <a:rPr lang="en-US" sz="1400" b="1" dirty="0">
-                <a:solidFill>
-                  <a:srgbClr val="212529"/>
-                </a:solidFill>
-                <a:latin typeface="Montserrat Black" pitchFamily="34" charset="0"/>
-                <a:ea typeface="Montserrat Black" pitchFamily="34" charset="-122"/>
-                <a:cs typeface="Montserrat Black" pitchFamily="34" charset="-120"/>
-              </a:rPr>
-              <a:t>CQRS &amp; SQL SERVER</a:t>
-            </a:r>
-            <a:endParaRPr lang="en-US" sz="1400" dirty="0"/>
-          </a:p>
-        </p:txBody>
-      </p:sp>
-      <p:sp>
-        <p:nvSpPr>
-          <p:cNvPr id="7" name="Text 3"/>
-          <p:cNvSpPr/>
-          <p:nvPr/>
-        </p:nvSpPr>
-        <p:spPr>
-          <a:xfrm>
-            <a:off x="714375" y="2611041"/>
-            <a:ext cx="2381241" cy="822871"/>
-          </a:xfrm>
-          <a:prstGeom prst="rect">
-            <a:avLst/>
-          </a:prstGeom>
-          <a:noFill/>
-          <a:ln/>
-        </p:spPr>
-        <p:txBody>
-          <a:bodyPr wrap="square" lIns="0" tIns="0" rIns="0" bIns="0" rtlCol="0" anchor="t">
-            <a:spAutoFit/>
-          </a:bodyPr>
-          <a:lstStyle/>
-          <a:p>
-            <a:pPr algn="l" indent="0" marL="0">
-              <a:lnSpc>
-                <a:spcPct val="128000"/>
-              </a:lnSpc>
-              <a:buNone/>
-            </a:pPr>
-            <a:r>
-              <a:rPr lang="en-US" sz="950" dirty="0">
-                <a:solidFill>
-                  <a:srgbClr val="495057"/>
-                </a:solidFill>
-                <a:latin typeface="Montserrat Medium" pitchFamily="34" charset="0"/>
-                <a:ea typeface="Montserrat Medium" pitchFamily="34" charset="-122"/>
-                <a:cs typeface="Montserrat Medium" pitchFamily="34" charset="-120"/>
-              </a:rPr>
-              <a:t>Separação de modelos de escrita e leitura. Uso de UPSERT atômico para garantir consistência do consolidado diário.</a:t>
-            </a:r>
-            <a:endParaRPr lang="en-US" sz="950" dirty="0"/>
-          </a:p>
-        </p:txBody>
-      </p:sp>
-      <p:sp>
-        <p:nvSpPr>
-          <p:cNvPr id="8" name="Shape 4"/>
-          <p:cNvSpPr/>
-          <p:nvPr/>
-        </p:nvSpPr>
-        <p:spPr>
-          <a:xfrm>
-            <a:off x="714375" y="3541068"/>
-            <a:ext cx="1307306" cy="192881"/>
-          </a:xfrm>
-          <a:prstGeom prst="rect">
-            <a:avLst/>
-          </a:prstGeom>
-          <a:solidFill>
-            <a:srgbClr val="212529"/>
-          </a:solidFill>
-          <a:ln/>
-        </p:spPr>
-      </p:sp>
-      <p:sp>
-        <p:nvSpPr>
-          <p:cNvPr id="9" name="Text 5"/>
-          <p:cNvSpPr/>
-          <p:nvPr/>
-        </p:nvSpPr>
-        <p:spPr>
-          <a:xfrm>
-            <a:off x="714375" y="3541068"/>
-            <a:ext cx="1307306" cy="192881"/>
-          </a:xfrm>
-          <a:prstGeom prst="rect">
-            <a:avLst/>
-          </a:prstGeom>
-          <a:noFill/>
-          <a:ln/>
-        </p:spPr>
-        <p:txBody>
-          <a:bodyPr wrap="square" lIns="102108" tIns="42545" rIns="102108" bIns="42545" rtlCol="0" anchor="t">
-            <a:spAutoFit/>
-          </a:bodyPr>
-          <a:lstStyle/>
-          <a:p>
-            <a:pPr algn="l" indent="0" marL="0">
-              <a:buNone/>
-            </a:pPr>
-            <a:r>
-              <a:rPr lang="en-US" sz="700" b="1" dirty="0">
-                <a:solidFill>
-                  <a:srgbClr val="FFFFFF"/>
-                </a:solidFill>
-                <a:latin typeface="Montserrat Black" pitchFamily="34" charset="0"/>
-                <a:ea typeface="Montserrat Black" pitchFamily="34" charset="-122"/>
-                <a:cs typeface="Montserrat Black" pitchFamily="34" charset="-120"/>
-              </a:rPr>
-              <a:t>WRITE/READ MODEL</a:t>
-            </a:r>
-            <a:endParaRPr lang="en-US" sz="700" dirty="0"/>
-          </a:p>
-        </p:txBody>
-      </p:sp>
-      <p:pic>
-        <p:nvPicPr>
-          <p:cNvPr id="10" name="Image 2" descr="preencoded.png">    </p:cNvPr>
+          <p:cNvPr id="2" name="Image 0" descr="preencoded.png"/>
           <p:cNvPicPr>
             <a:picLocks noChangeAspect="1"/>
           </p:cNvPicPr>
@@ -8240,8 +7788,8 @@
         </p:blipFill>
         <p:spPr>
           <a:xfrm>
-            <a:off x="3381366" y="1732359"/>
-            <a:ext cx="257175" cy="342900"/>
+            <a:off x="0" y="0"/>
+            <a:ext cx="9144000" cy="5143500"/>
           </a:xfrm>
           <a:prstGeom prst="rect">
             <a:avLst/>
@@ -8250,55 +7798,60 @@
       </p:pic>
       <p:sp>
         <p:nvSpPr>
-          <p:cNvPr id="11" name="Text 6"/>
-          <p:cNvSpPr/>
-          <p:nvPr/>
-        </p:nvSpPr>
-        <p:spPr>
-          <a:xfrm>
-            <a:off x="3381366" y="2260997"/>
-            <a:ext cx="2381241" cy="242888"/>
-          </a:xfrm>
-          <a:prstGeom prst="rect">
-            <a:avLst/>
-          </a:prstGeom>
-          <a:noFill/>
-          <a:ln/>
-        </p:spPr>
-        <p:txBody>
-          <a:bodyPr wrap="square" lIns="0" tIns="0" rIns="0" bIns="0" rtlCol="0" anchor="t">
-            <a:spAutoFit/>
-          </a:bodyPr>
-          <a:lstStyle/>
-          <a:p>
-            <a:pPr algn="l" indent="0" marL="0">
-              <a:buNone/>
-            </a:pPr>
-            <a:r>
-              <a:rPr lang="en-US" sz="1400" b="1" dirty="0">
-                <a:solidFill>
-                  <a:srgbClr val="212529"/>
+          <p:cNvPr id="3" name="Text 0"/>
+          <p:cNvSpPr/>
+          <p:nvPr/>
+        </p:nvSpPr>
+        <p:spPr>
+          <a:xfrm>
+            <a:off x="6081117" y="428625"/>
+            <a:ext cx="2348508" cy="1714500"/>
+          </a:xfrm>
+          <a:prstGeom prst="rect">
+            <a:avLst/>
+          </a:prstGeom>
+          <a:noFill/>
+          <a:ln/>
+        </p:spPr>
+        <p:txBody>
+          <a:bodyPr wrap="none" lIns="0" tIns="0" rIns="0" bIns="0" rtlCol="0" anchor="t">
+            <a:spAutoFit/>
+          </a:bodyPr>
+          <a:lstStyle/>
+          <a:p>
+            <a:pPr marL="0" indent="0" algn="l">
+              <a:lnSpc>
+                <a:spcPct val="80000"/>
+              </a:lnSpc>
+              <a:buNone/>
+            </a:pPr>
+            <a:r>
+              <a:rPr lang="en-US" sz="12450" b="1" dirty="0">
+                <a:solidFill>
+                  <a:srgbClr val="212529">
+                    <a:alpha val="5000"/>
+                  </a:srgbClr>
                 </a:solidFill>
                 <a:latin typeface="Montserrat Black" pitchFamily="34" charset="0"/>
                 <a:ea typeface="Montserrat Black" pitchFamily="34" charset="-122"/>
                 <a:cs typeface="Montserrat Black" pitchFamily="34" charset="-120"/>
               </a:rPr>
-              <a:t>REDIS CACHE</a:t>
-            </a:r>
-            <a:endParaRPr lang="en-US" sz="1400" dirty="0"/>
-          </a:p>
-        </p:txBody>
-      </p:sp>
-      <p:sp>
-        <p:nvSpPr>
-          <p:cNvPr id="12" name="Text 7"/>
-          <p:cNvSpPr/>
-          <p:nvPr/>
-        </p:nvSpPr>
-        <p:spPr>
-          <a:xfrm>
-            <a:off x="3381366" y="2611041"/>
-            <a:ext cx="2381241" cy="822871"/>
+              <a:t>08</a:t>
+            </a:r>
+            <a:endParaRPr lang="en-US" sz="12450" dirty="0"/>
+          </a:p>
+        </p:txBody>
+      </p:sp>
+      <p:sp>
+        <p:nvSpPr>
+          <p:cNvPr id="4" name="Text 1"/>
+          <p:cNvSpPr/>
+          <p:nvPr/>
+        </p:nvSpPr>
+        <p:spPr>
+          <a:xfrm>
+            <a:off x="714375" y="714375"/>
+            <a:ext cx="7715250" cy="557213"/>
           </a:xfrm>
           <a:prstGeom prst="rect">
             <a:avLst/>
@@ -8312,91 +7865,27 @@
           </a:bodyPr>
           <a:lstStyle/>
           <a:p>
-            <a:pPr algn="l" indent="0" marL="0">
-              <a:lnSpc>
-                <a:spcPct val="128000"/>
-              </a:lnSpc>
-              <a:buNone/>
-            </a:pPr>
-            <a:r>
-              <a:rPr lang="en-US" sz="950" dirty="0">
-                <a:solidFill>
-                  <a:srgbClr val="495057"/>
-                </a:solidFill>
-                <a:latin typeface="Montserrat Medium" pitchFamily="34" charset="0"/>
-                <a:ea typeface="Montserrat Medium" pitchFamily="34" charset="-122"/>
-                <a:cs typeface="Montserrat Medium" pitchFamily="34" charset="-120"/>
-              </a:rPr>
-              <a:t>Cache distribuído com TTL inteligente para relatórios, reduzindo a carga no banco e garantindo p95 &lt; 100ms.</a:t>
-            </a:r>
-            <a:endParaRPr lang="en-US" sz="950" dirty="0"/>
-          </a:p>
-        </p:txBody>
-      </p:sp>
-      <p:sp>
-        <p:nvSpPr>
-          <p:cNvPr id="13" name="Shape 8"/>
-          <p:cNvSpPr/>
-          <p:nvPr/>
-        </p:nvSpPr>
-        <p:spPr>
-          <a:xfrm>
-            <a:off x="3381366" y="3541068"/>
-            <a:ext cx="1301948" cy="192881"/>
-          </a:xfrm>
-          <a:prstGeom prst="rect">
-            <a:avLst/>
-          </a:prstGeom>
-          <a:solidFill>
-            <a:srgbClr val="212529"/>
-          </a:solidFill>
-          <a:ln/>
-        </p:spPr>
-      </p:sp>
-      <p:sp>
-        <p:nvSpPr>
-          <p:cNvPr id="14" name="Text 9"/>
-          <p:cNvSpPr/>
-          <p:nvPr/>
-        </p:nvSpPr>
-        <p:spPr>
-          <a:xfrm>
-            <a:off x="3381366" y="3541068"/>
-            <a:ext cx="1301948" cy="192881"/>
-          </a:xfrm>
-          <a:prstGeom prst="rect">
-            <a:avLst/>
-          </a:prstGeom>
-          <a:noFill/>
-          <a:ln/>
-        </p:spPr>
-        <p:txBody>
-          <a:bodyPr wrap="square" lIns="102108" tIns="42545" rIns="102108" bIns="42545" rtlCol="0" anchor="t">
-            <a:spAutoFit/>
-          </a:bodyPr>
-          <a:lstStyle/>
-          <a:p>
-            <a:pPr algn="l" indent="0" marL="0">
-              <a:buNone/>
-            </a:pPr>
-            <a:r>
-              <a:rPr lang="en-US" sz="700" b="1" dirty="0">
-                <a:solidFill>
-                  <a:srgbClr val="FFFFFF"/>
+            <a:pPr marL="0" indent="0" algn="l">
+              <a:buNone/>
+            </a:pPr>
+            <a:r>
+              <a:rPr lang="en-US" sz="3300" b="1" dirty="0">
+                <a:solidFill>
+                  <a:srgbClr val="212529"/>
                 </a:solidFill>
                 <a:latin typeface="Montserrat Black" pitchFamily="34" charset="0"/>
                 <a:ea typeface="Montserrat Black" pitchFamily="34" charset="-122"/>
                 <a:cs typeface="Montserrat Black" pitchFamily="34" charset="-120"/>
               </a:rPr>
-              <a:t>DISTRIBUTED CACHE</a:t>
-            </a:r>
-            <a:endParaRPr lang="en-US" sz="700" dirty="0"/>
+              <a:t>DADOS E PERFORMANCE</a:t>
+            </a:r>
+            <a:endParaRPr lang="en-US" sz="3300" dirty="0"/>
           </a:p>
         </p:txBody>
       </p:sp>
       <p:pic>
         <p:nvPicPr>
-          <p:cNvPr id="15" name="Image 3" descr="preencoded.png">    </p:cNvPr>
+          <p:cNvPr id="5" name="Image 1" descr="preencoded.png"/>
           <p:cNvPicPr>
             <a:picLocks noChangeAspect="1"/>
           </p:cNvPicPr>
@@ -8410,8 +7899,8 @@
         </p:blipFill>
         <p:spPr>
           <a:xfrm>
-            <a:off x="6048356" y="1732359"/>
-            <a:ext cx="342900" cy="342900"/>
+            <a:off x="714375" y="1732359"/>
+            <a:ext cx="300038" cy="342900"/>
           </a:xfrm>
           <a:prstGeom prst="rect">
             <a:avLst/>
@@ -8420,14 +7909,14 @@
       </p:pic>
       <p:sp>
         <p:nvSpPr>
-          <p:cNvPr id="16" name="Text 10"/>
-          <p:cNvSpPr/>
-          <p:nvPr/>
-        </p:nvSpPr>
-        <p:spPr>
-          <a:xfrm>
-            <a:off x="6048356" y="2260997"/>
-            <a:ext cx="2381269" cy="242888"/>
+          <p:cNvPr id="6" name="Text 2"/>
+          <p:cNvSpPr/>
+          <p:nvPr/>
+        </p:nvSpPr>
+        <p:spPr>
+          <a:xfrm>
+            <a:off x="714375" y="2260997"/>
+            <a:ext cx="2381241" cy="242888"/>
           </a:xfrm>
           <a:prstGeom prst="rect">
             <a:avLst/>
@@ -8441,7 +7930,7 @@
           </a:bodyPr>
           <a:lstStyle/>
           <a:p>
-            <a:pPr algn="l" indent="0" marL="0">
+            <a:pPr marL="0" indent="0" algn="l">
               <a:buNone/>
             </a:pPr>
             <a:r>
@@ -8453,7 +7942,7 @@
                 <a:ea typeface="Montserrat Black" pitchFamily="34" charset="-122"/>
                 <a:cs typeface="Montserrat Black" pitchFamily="34" charset="-120"/>
               </a:rPr>
-              <a:t>DAPPER MICRO-ORM</a:t>
+              <a:t>CQRS &amp; SQL SERVER</a:t>
             </a:r>
             <a:endParaRPr lang="en-US" sz="1400" dirty="0"/>
           </a:p>
@@ -8461,14 +7950,14 @@
       </p:sp>
       <p:sp>
         <p:nvSpPr>
-          <p:cNvPr id="17" name="Text 11"/>
-          <p:cNvSpPr/>
-          <p:nvPr/>
-        </p:nvSpPr>
-        <p:spPr>
-          <a:xfrm>
-            <a:off x="6048356" y="2611041"/>
-            <a:ext cx="2381269" cy="822871"/>
+          <p:cNvPr id="7" name="Text 3"/>
+          <p:cNvSpPr/>
+          <p:nvPr/>
+        </p:nvSpPr>
+        <p:spPr>
+          <a:xfrm>
+            <a:off x="714375" y="2611041"/>
+            <a:ext cx="2381241" cy="822871"/>
           </a:xfrm>
           <a:prstGeom prst="rect">
             <a:avLst/>
@@ -8482,7 +7971,7 @@
           </a:bodyPr>
           <a:lstStyle/>
           <a:p>
-            <a:pPr algn="l" indent="0" marL="0">
+            <a:pPr marL="0" indent="0" algn="l">
               <a:lnSpc>
                 <a:spcPct val="128000"/>
               </a:lnSpc>
@@ -8497,7 +7986,7 @@
                 <a:ea typeface="Montserrat Medium" pitchFamily="34" charset="-122"/>
                 <a:cs typeface="Montserrat Medium" pitchFamily="34" charset="-120"/>
               </a:rPr>
-              <a:t>Acesso a dados de alta performance, evitando o overhead de ORMs pesados em consultas críticas.</a:t>
+              <a:t>Separação de modelos de escrita e leitura. Uso de UPSERT atômico para garantir consistência do consolidado diário.</a:t>
             </a:r>
             <a:endParaRPr lang="en-US" sz="950" dirty="0"/>
           </a:p>
@@ -8505,14 +7994,14 @@
       </p:sp>
       <p:sp>
         <p:nvSpPr>
-          <p:cNvPr id="18" name="Shape 12"/>
-          <p:cNvSpPr/>
-          <p:nvPr/>
-        </p:nvSpPr>
-        <p:spPr>
-          <a:xfrm>
-            <a:off x="6048356" y="3541068"/>
-            <a:ext cx="1207294" cy="192881"/>
+          <p:cNvPr id="8" name="Shape 4"/>
+          <p:cNvSpPr/>
+          <p:nvPr/>
+        </p:nvSpPr>
+        <p:spPr>
+          <a:xfrm>
+            <a:off x="714375" y="3541068"/>
+            <a:ext cx="1307306" cy="192881"/>
           </a:xfrm>
           <a:prstGeom prst="rect">
             <a:avLst/>
@@ -8522,10 +8011,344 @@
           </a:solidFill>
           <a:ln/>
         </p:spPr>
-      </p:sp>
-      <p:sp>
-        <p:nvSpPr>
-          <p:cNvPr id="19" name="Text 13"/>
+        <p:txBody>
+          <a:bodyPr/>
+          <a:lstStyle/>
+          <a:p>
+            <a:endParaRPr lang="pt-BR"/>
+          </a:p>
+        </p:txBody>
+      </p:sp>
+      <p:sp>
+        <p:nvSpPr>
+          <p:cNvPr id="9" name="Text 5"/>
+          <p:cNvSpPr/>
+          <p:nvPr/>
+        </p:nvSpPr>
+        <p:spPr>
+          <a:xfrm>
+            <a:off x="714375" y="3541068"/>
+            <a:ext cx="1307306" cy="192881"/>
+          </a:xfrm>
+          <a:prstGeom prst="rect">
+            <a:avLst/>
+          </a:prstGeom>
+          <a:noFill/>
+          <a:ln/>
+        </p:spPr>
+        <p:txBody>
+          <a:bodyPr wrap="square" lIns="102108" tIns="42545" rIns="102108" bIns="42545" rtlCol="0" anchor="t">
+            <a:spAutoFit/>
+          </a:bodyPr>
+          <a:lstStyle/>
+          <a:p>
+            <a:pPr marL="0" indent="0" algn="l">
+              <a:buNone/>
+            </a:pPr>
+            <a:r>
+              <a:rPr lang="en-US" sz="700" b="1" dirty="0">
+                <a:solidFill>
+                  <a:srgbClr val="FFFFFF"/>
+                </a:solidFill>
+                <a:latin typeface="Montserrat Black" pitchFamily="34" charset="0"/>
+                <a:ea typeface="Montserrat Black" pitchFamily="34" charset="-122"/>
+                <a:cs typeface="Montserrat Black" pitchFamily="34" charset="-120"/>
+              </a:rPr>
+              <a:t>WRITE/READ MODEL</a:t>
+            </a:r>
+            <a:endParaRPr lang="en-US" sz="700" dirty="0"/>
+          </a:p>
+        </p:txBody>
+      </p:sp>
+      <p:pic>
+        <p:nvPicPr>
+          <p:cNvPr id="10" name="Image 2" descr="preencoded.png"/>
+          <p:cNvPicPr>
+            <a:picLocks noChangeAspect="1"/>
+          </p:cNvPicPr>
+          <p:nvPr/>
+        </p:nvPicPr>
+        <p:blipFill>
+          <a:blip r:embed="rId5"/>
+          <a:stretch>
+            <a:fillRect/>
+          </a:stretch>
+        </p:blipFill>
+        <p:spPr>
+          <a:xfrm>
+            <a:off x="3381366" y="1732359"/>
+            <a:ext cx="257175" cy="342900"/>
+          </a:xfrm>
+          <a:prstGeom prst="rect">
+            <a:avLst/>
+          </a:prstGeom>
+        </p:spPr>
+      </p:pic>
+      <p:sp>
+        <p:nvSpPr>
+          <p:cNvPr id="11" name="Text 6"/>
+          <p:cNvSpPr/>
+          <p:nvPr/>
+        </p:nvSpPr>
+        <p:spPr>
+          <a:xfrm>
+            <a:off x="3381366" y="2260997"/>
+            <a:ext cx="2381241" cy="242888"/>
+          </a:xfrm>
+          <a:prstGeom prst="rect">
+            <a:avLst/>
+          </a:prstGeom>
+          <a:noFill/>
+          <a:ln/>
+        </p:spPr>
+        <p:txBody>
+          <a:bodyPr wrap="square" lIns="0" tIns="0" rIns="0" bIns="0" rtlCol="0" anchor="t">
+            <a:spAutoFit/>
+          </a:bodyPr>
+          <a:lstStyle/>
+          <a:p>
+            <a:pPr marL="0" indent="0" algn="l">
+              <a:buNone/>
+            </a:pPr>
+            <a:r>
+              <a:rPr lang="en-US" sz="1400" b="1" dirty="0">
+                <a:solidFill>
+                  <a:srgbClr val="212529"/>
+                </a:solidFill>
+                <a:latin typeface="Montserrat Black" pitchFamily="34" charset="0"/>
+                <a:ea typeface="Montserrat Black" pitchFamily="34" charset="-122"/>
+                <a:cs typeface="Montserrat Black" pitchFamily="34" charset="-120"/>
+              </a:rPr>
+              <a:t>REDIS CACHE</a:t>
+            </a:r>
+            <a:endParaRPr lang="en-US" sz="1400" dirty="0"/>
+          </a:p>
+        </p:txBody>
+      </p:sp>
+      <p:sp>
+        <p:nvSpPr>
+          <p:cNvPr id="12" name="Text 7"/>
+          <p:cNvSpPr/>
+          <p:nvPr/>
+        </p:nvSpPr>
+        <p:spPr>
+          <a:xfrm>
+            <a:off x="3381366" y="2611041"/>
+            <a:ext cx="2381241" cy="822871"/>
+          </a:xfrm>
+          <a:prstGeom prst="rect">
+            <a:avLst/>
+          </a:prstGeom>
+          <a:noFill/>
+          <a:ln/>
+        </p:spPr>
+        <p:txBody>
+          <a:bodyPr wrap="square" lIns="0" tIns="0" rIns="0" bIns="0" rtlCol="0" anchor="t">
+            <a:spAutoFit/>
+          </a:bodyPr>
+          <a:lstStyle/>
+          <a:p>
+            <a:pPr marL="0" indent="0" algn="l">
+              <a:lnSpc>
+                <a:spcPct val="128000"/>
+              </a:lnSpc>
+              <a:buNone/>
+            </a:pPr>
+            <a:r>
+              <a:rPr lang="en-US" sz="950" dirty="0">
+                <a:solidFill>
+                  <a:srgbClr val="495057"/>
+                </a:solidFill>
+                <a:latin typeface="Montserrat Medium" pitchFamily="34" charset="0"/>
+                <a:ea typeface="Montserrat Medium" pitchFamily="34" charset="-122"/>
+                <a:cs typeface="Montserrat Medium" pitchFamily="34" charset="-120"/>
+              </a:rPr>
+              <a:t>Cache distribuído com TTL inteligente para relatórios, reduzindo a carga no banco e garantindo p95 &lt; 100ms.</a:t>
+            </a:r>
+            <a:endParaRPr lang="en-US" sz="950" dirty="0"/>
+          </a:p>
+        </p:txBody>
+      </p:sp>
+      <p:sp>
+        <p:nvSpPr>
+          <p:cNvPr id="13" name="Shape 8"/>
+          <p:cNvSpPr/>
+          <p:nvPr/>
+        </p:nvSpPr>
+        <p:spPr>
+          <a:xfrm>
+            <a:off x="3381366" y="3541068"/>
+            <a:ext cx="1301948" cy="192881"/>
+          </a:xfrm>
+          <a:prstGeom prst="rect">
+            <a:avLst/>
+          </a:prstGeom>
+          <a:solidFill>
+            <a:srgbClr val="212529"/>
+          </a:solidFill>
+          <a:ln/>
+        </p:spPr>
+        <p:txBody>
+          <a:bodyPr/>
+          <a:lstStyle/>
+          <a:p>
+            <a:endParaRPr lang="pt-BR"/>
+          </a:p>
+        </p:txBody>
+      </p:sp>
+      <p:sp>
+        <p:nvSpPr>
+          <p:cNvPr id="14" name="Text 9"/>
+          <p:cNvSpPr/>
+          <p:nvPr/>
+        </p:nvSpPr>
+        <p:spPr>
+          <a:xfrm>
+            <a:off x="3381366" y="3541068"/>
+            <a:ext cx="1301948" cy="192881"/>
+          </a:xfrm>
+          <a:prstGeom prst="rect">
+            <a:avLst/>
+          </a:prstGeom>
+          <a:noFill/>
+          <a:ln/>
+        </p:spPr>
+        <p:txBody>
+          <a:bodyPr wrap="square" lIns="102108" tIns="42545" rIns="102108" bIns="42545" rtlCol="0" anchor="t">
+            <a:spAutoFit/>
+          </a:bodyPr>
+          <a:lstStyle/>
+          <a:p>
+            <a:pPr marL="0" indent="0" algn="l">
+              <a:buNone/>
+            </a:pPr>
+            <a:r>
+              <a:rPr lang="en-US" sz="700" b="1" dirty="0">
+                <a:solidFill>
+                  <a:srgbClr val="FFFFFF"/>
+                </a:solidFill>
+                <a:latin typeface="Montserrat Black" pitchFamily="34" charset="0"/>
+                <a:ea typeface="Montserrat Black" pitchFamily="34" charset="-122"/>
+                <a:cs typeface="Montserrat Black" pitchFamily="34" charset="-120"/>
+              </a:rPr>
+              <a:t>DISTRIBUTED CACHE</a:t>
+            </a:r>
+            <a:endParaRPr lang="en-US" sz="700" dirty="0"/>
+          </a:p>
+        </p:txBody>
+      </p:sp>
+      <p:pic>
+        <p:nvPicPr>
+          <p:cNvPr id="15" name="Image 3" descr="preencoded.png"/>
+          <p:cNvPicPr>
+            <a:picLocks noChangeAspect="1"/>
+          </p:cNvPicPr>
+          <p:nvPr/>
+        </p:nvPicPr>
+        <p:blipFill>
+          <a:blip r:embed="rId6"/>
+          <a:stretch>
+            <a:fillRect/>
+          </a:stretch>
+        </p:blipFill>
+        <p:spPr>
+          <a:xfrm>
+            <a:off x="6048356" y="1732359"/>
+            <a:ext cx="342900" cy="342900"/>
+          </a:xfrm>
+          <a:prstGeom prst="rect">
+            <a:avLst/>
+          </a:prstGeom>
+        </p:spPr>
+      </p:pic>
+      <p:sp>
+        <p:nvSpPr>
+          <p:cNvPr id="16" name="Text 10"/>
+          <p:cNvSpPr/>
+          <p:nvPr/>
+        </p:nvSpPr>
+        <p:spPr>
+          <a:xfrm>
+            <a:off x="6048356" y="2260997"/>
+            <a:ext cx="2381269" cy="242888"/>
+          </a:xfrm>
+          <a:prstGeom prst="rect">
+            <a:avLst/>
+          </a:prstGeom>
+          <a:noFill/>
+          <a:ln/>
+        </p:spPr>
+        <p:txBody>
+          <a:bodyPr wrap="square" lIns="0" tIns="0" rIns="0" bIns="0" rtlCol="0" anchor="t">
+            <a:spAutoFit/>
+          </a:bodyPr>
+          <a:lstStyle/>
+          <a:p>
+            <a:pPr marL="0" indent="0" algn="l">
+              <a:buNone/>
+            </a:pPr>
+            <a:r>
+              <a:rPr lang="en-US" sz="1400" b="1" dirty="0">
+                <a:solidFill>
+                  <a:srgbClr val="212529"/>
+                </a:solidFill>
+                <a:latin typeface="Montserrat Black" pitchFamily="34" charset="0"/>
+                <a:ea typeface="Montserrat Black" pitchFamily="34" charset="-122"/>
+                <a:cs typeface="Montserrat Black" pitchFamily="34" charset="-120"/>
+              </a:rPr>
+              <a:t>DAPPER MICRO-ORM</a:t>
+            </a:r>
+            <a:endParaRPr lang="en-US" sz="1400" dirty="0"/>
+          </a:p>
+        </p:txBody>
+      </p:sp>
+      <p:sp>
+        <p:nvSpPr>
+          <p:cNvPr id="17" name="Text 11"/>
+          <p:cNvSpPr/>
+          <p:nvPr/>
+        </p:nvSpPr>
+        <p:spPr>
+          <a:xfrm>
+            <a:off x="6048356" y="2611041"/>
+            <a:ext cx="2381269" cy="822871"/>
+          </a:xfrm>
+          <a:prstGeom prst="rect">
+            <a:avLst/>
+          </a:prstGeom>
+          <a:noFill/>
+          <a:ln/>
+        </p:spPr>
+        <p:txBody>
+          <a:bodyPr wrap="square" lIns="0" tIns="0" rIns="0" bIns="0" rtlCol="0" anchor="t">
+            <a:spAutoFit/>
+          </a:bodyPr>
+          <a:lstStyle/>
+          <a:p>
+            <a:pPr marL="0" indent="0" algn="l">
+              <a:lnSpc>
+                <a:spcPct val="128000"/>
+              </a:lnSpc>
+              <a:buNone/>
+            </a:pPr>
+            <a:r>
+              <a:rPr lang="en-US" sz="950" dirty="0">
+                <a:solidFill>
+                  <a:srgbClr val="495057"/>
+                </a:solidFill>
+                <a:latin typeface="Montserrat Medium" pitchFamily="34" charset="0"/>
+                <a:ea typeface="Montserrat Medium" pitchFamily="34" charset="-122"/>
+                <a:cs typeface="Montserrat Medium" pitchFamily="34" charset="-120"/>
+              </a:rPr>
+              <a:t>Acesso a dados de alta performance, evitando o overhead de ORMs pesados em consultas críticas.</a:t>
+            </a:r>
+            <a:endParaRPr lang="en-US" sz="950" dirty="0"/>
+          </a:p>
+        </p:txBody>
+      </p:sp>
+      <p:sp>
+        <p:nvSpPr>
+          <p:cNvPr id="18" name="Shape 12"/>
           <p:cNvSpPr/>
           <p:nvPr/>
         </p:nvSpPr>
@@ -8537,6 +8360,33 @@
           <a:prstGeom prst="rect">
             <a:avLst/>
           </a:prstGeom>
+          <a:solidFill>
+            <a:srgbClr val="212529"/>
+          </a:solidFill>
+          <a:ln/>
+        </p:spPr>
+        <p:txBody>
+          <a:bodyPr/>
+          <a:lstStyle/>
+          <a:p>
+            <a:endParaRPr lang="pt-BR"/>
+          </a:p>
+        </p:txBody>
+      </p:sp>
+      <p:sp>
+        <p:nvSpPr>
+          <p:cNvPr id="19" name="Text 13"/>
+          <p:cNvSpPr/>
+          <p:nvPr/>
+        </p:nvSpPr>
+        <p:spPr>
+          <a:xfrm>
+            <a:off x="6048356" y="3541068"/>
+            <a:ext cx="1207294" cy="192881"/>
+          </a:xfrm>
+          <a:prstGeom prst="rect">
+            <a:avLst/>
+          </a:prstGeom>
           <a:noFill/>
           <a:ln/>
         </p:spPr>
@@ -8546,7 +8396,7 @@
           </a:bodyPr>
           <a:lstStyle/>
           <a:p>
-            <a:pPr algn="l" indent="0" marL="0">
+            <a:pPr marL="0" indent="0" algn="l">
               <a:buNone/>
             </a:pPr>
             <a:r>
@@ -8591,227 +8441,7 @@
       </p:grpSpPr>
       <p:pic>
         <p:nvPicPr>
-          <p:cNvPr id="2" name="Image 0" descr="preencoded.png">    </p:cNvPr>
-          <p:cNvPicPr>
-            <a:picLocks noChangeAspect="1"/>
-          </p:cNvPicPr>
-          <p:nvPr/>
-        </p:nvPicPr>
-        <p:blipFill>
-          <a:blip r:embed="rId1"/>
-          <a:stretch>
-            <a:fillRect/>
-          </a:stretch>
-        </p:blipFill>
-        <p:spPr>
-          <a:xfrm>
-            <a:off x="0" y="0"/>
-            <a:ext cx="9144000" cy="5143500"/>
-          </a:xfrm>
-          <a:prstGeom prst="rect">
-            <a:avLst/>
-          </a:prstGeom>
-        </p:spPr>
-      </p:pic>
-      <p:sp>
-        <p:nvSpPr>
-          <p:cNvPr id="3" name="Text 0"/>
-          <p:cNvSpPr/>
-          <p:nvPr/>
-        </p:nvSpPr>
-        <p:spPr>
-          <a:xfrm>
-            <a:off x="6109692" y="428625"/>
-            <a:ext cx="2319933" cy="1714500"/>
-          </a:xfrm>
-          <a:prstGeom prst="rect">
-            <a:avLst/>
-          </a:prstGeom>
-          <a:noFill/>
-          <a:ln/>
-        </p:spPr>
-        <p:txBody>
-          <a:bodyPr wrap="none" lIns="0" tIns="0" rIns="0" bIns="0" rtlCol="0" anchor="t">
-            <a:spAutoFit/>
-          </a:bodyPr>
-          <a:lstStyle/>
-          <a:p>
-            <a:pPr algn="l" indent="0" marL="0">
-              <a:lnSpc>
-                <a:spcPct val="80000"/>
-              </a:lnSpc>
-              <a:buNone/>
-            </a:pPr>
-            <a:r>
-              <a:rPr lang="en-US" sz="12450" b="1" dirty="0">
-                <a:solidFill>
-                  <a:srgbClr val="212529">
-                    <a:alpha val="5000"/>
-                  </a:srgbClr>
-                </a:solidFill>
-                <a:latin typeface="Montserrat Black" pitchFamily="34" charset="0"/>
-                <a:ea typeface="Montserrat Black" pitchFamily="34" charset="-122"/>
-                <a:cs typeface="Montserrat Black" pitchFamily="34" charset="-120"/>
-              </a:rPr>
-              <a:t>09</a:t>
-            </a:r>
-            <a:endParaRPr lang="en-US" sz="12450" dirty="0"/>
-          </a:p>
-        </p:txBody>
-      </p:sp>
-      <p:sp>
-        <p:nvSpPr>
-          <p:cNvPr id="4" name="Text 1"/>
-          <p:cNvSpPr/>
-          <p:nvPr/>
-        </p:nvSpPr>
-        <p:spPr>
-          <a:xfrm>
-            <a:off x="714375" y="714375"/>
-            <a:ext cx="7715250" cy="557213"/>
-          </a:xfrm>
-          <a:prstGeom prst="rect">
-            <a:avLst/>
-          </a:prstGeom>
-          <a:noFill/>
-          <a:ln/>
-        </p:spPr>
-        <p:txBody>
-          <a:bodyPr wrap="square" lIns="0" tIns="0" rIns="0" bIns="0" rtlCol="0" anchor="t">
-            <a:spAutoFit/>
-          </a:bodyPr>
-          <a:lstStyle/>
-          <a:p>
-            <a:pPr algn="l" indent="0" marL="0">
-              <a:buNone/>
-            </a:pPr>
-            <a:r>
-              <a:rPr lang="en-US" sz="3300" b="1" dirty="0">
-                <a:solidFill>
-                  <a:srgbClr val="212529"/>
-                </a:solidFill>
-                <a:latin typeface="Montserrat Black" pitchFamily="34" charset="0"/>
-                <a:ea typeface="Montserrat Black" pitchFamily="34" charset="-122"/>
-                <a:cs typeface="Montserrat Black" pitchFamily="34" charset="-120"/>
-              </a:rPr>
-              <a:t>OBSERVABILIDADE</a:t>
-            </a:r>
-            <a:endParaRPr lang="en-US" sz="3300" dirty="0"/>
-          </a:p>
-        </p:txBody>
-      </p:sp>
-      <p:pic>
-        <p:nvPicPr>
-          <p:cNvPr id="5" name="Image 1" descr="preencoded.png">    </p:cNvPr>
-          <p:cNvPicPr>
-            <a:picLocks noChangeAspect="1"/>
-          </p:cNvPicPr>
-          <p:nvPr/>
-        </p:nvPicPr>
-        <p:blipFill>
-          <a:blip r:embed="rId2"/>
-          <a:stretch>
-            <a:fillRect/>
-          </a:stretch>
-        </p:blipFill>
-        <p:spPr>
-          <a:xfrm>
-            <a:off x="771525" y="2012389"/>
-            <a:ext cx="257175" cy="257175"/>
-          </a:xfrm>
-          <a:prstGeom prst="rect">
-            <a:avLst/>
-          </a:prstGeom>
-        </p:spPr>
-      </p:pic>
-      <p:sp>
-        <p:nvSpPr>
-          <p:cNvPr id="6" name="Text 2"/>
-          <p:cNvSpPr/>
-          <p:nvPr/>
-        </p:nvSpPr>
-        <p:spPr>
-          <a:xfrm>
-            <a:off x="1085878" y="1843088"/>
-            <a:ext cx="3307528" cy="208955"/>
-          </a:xfrm>
-          <a:prstGeom prst="rect">
-            <a:avLst/>
-          </a:prstGeom>
-          <a:noFill/>
-          <a:ln/>
-        </p:spPr>
-        <p:txBody>
-          <a:bodyPr wrap="square" lIns="0" tIns="0" rIns="0" bIns="0" rtlCol="0" anchor="t">
-            <a:spAutoFit/>
-          </a:bodyPr>
-          <a:lstStyle/>
-          <a:p>
-            <a:pPr algn="l" indent="0" marL="0">
-              <a:buNone/>
-            </a:pPr>
-            <a:r>
-              <a:rPr lang="en-US" sz="1200" b="1" dirty="0">
-                <a:solidFill>
-                  <a:srgbClr val="212529"/>
-                </a:solidFill>
-                <a:latin typeface="Montserrat Black" pitchFamily="34" charset="0"/>
-                <a:ea typeface="Montserrat Black" pitchFamily="34" charset="-122"/>
-                <a:cs typeface="Montserrat Black" pitchFamily="34" charset="-120"/>
-              </a:rPr>
-              <a:t>LOGS ESTRUTURADOS</a:t>
-            </a:r>
-            <a:endParaRPr lang="en-US" sz="1200" dirty="0"/>
-          </a:p>
-        </p:txBody>
-      </p:sp>
-      <p:sp>
-        <p:nvSpPr>
-          <p:cNvPr id="7" name="Text 3"/>
-          <p:cNvSpPr/>
-          <p:nvPr/>
-        </p:nvSpPr>
-        <p:spPr>
-          <a:xfrm>
-            <a:off x="1085878" y="2087761"/>
-            <a:ext cx="3307528" cy="360034"/>
-          </a:xfrm>
-          <a:prstGeom prst="rect">
-            <a:avLst/>
-          </a:prstGeom>
-          <a:noFill/>
-          <a:ln/>
-        </p:spPr>
-        <p:txBody>
-          <a:bodyPr wrap="square" lIns="0" tIns="0" rIns="0" bIns="0" rtlCol="0" anchor="t">
-            <a:spAutoFit/>
-          </a:bodyPr>
-          <a:lstStyle/>
-          <a:p>
-            <a:pPr algn="l" indent="0" marL="0">
-              <a:lnSpc>
-                <a:spcPct val="112000"/>
-              </a:lnSpc>
-              <a:buNone/>
-            </a:pPr>
-            <a:r>
-              <a:rPr lang="en-US" sz="950" dirty="0">
-                <a:solidFill>
-                  <a:srgbClr val="495057"/>
-                </a:solidFill>
-                <a:latin typeface="Montserrat Medium" pitchFamily="34" charset="0"/>
-                <a:ea typeface="Montserrat Medium" pitchFamily="34" charset="-122"/>
-                <a:cs typeface="Montserrat Medium" pitchFamily="34" charset="-120"/>
-              </a:rPr>
-              <a:t>Rastreabilidade via Correlation ID entre microsserviços para depuração rápida.</a:t>
-            </a:r>
-            <a:endParaRPr lang="en-US" sz="950" dirty="0"/>
-          </a:p>
-        </p:txBody>
-      </p:sp>
-      <p:pic>
-        <p:nvPicPr>
-          <p:cNvPr id="8" name="Image 2" descr="preencoded.png">    </p:cNvPr>
+          <p:cNvPr id="2" name="Image 0" descr="preencoded.png"/>
           <p:cNvPicPr>
             <a:picLocks noChangeAspect="1"/>
           </p:cNvPicPr>
@@ -8825,8 +8455,8 @@
         </p:blipFill>
         <p:spPr>
           <a:xfrm>
-            <a:off x="4814748" y="2012389"/>
-            <a:ext cx="257175" cy="257175"/>
+            <a:off x="0" y="0"/>
+            <a:ext cx="9144000" cy="5143500"/>
           </a:xfrm>
           <a:prstGeom prst="rect">
             <a:avLst/>
@@ -8835,55 +8465,60 @@
       </p:pic>
       <p:sp>
         <p:nvSpPr>
-          <p:cNvPr id="9" name="Text 4"/>
-          <p:cNvSpPr/>
-          <p:nvPr/>
-        </p:nvSpPr>
-        <p:spPr>
-          <a:xfrm>
-            <a:off x="5136077" y="1843088"/>
-            <a:ext cx="3293548" cy="208955"/>
-          </a:xfrm>
-          <a:prstGeom prst="rect">
-            <a:avLst/>
-          </a:prstGeom>
-          <a:noFill/>
-          <a:ln/>
-        </p:spPr>
-        <p:txBody>
-          <a:bodyPr wrap="square" lIns="0" tIns="0" rIns="0" bIns="0" rtlCol="0" anchor="t">
-            <a:spAutoFit/>
-          </a:bodyPr>
-          <a:lstStyle/>
-          <a:p>
-            <a:pPr algn="l" indent="0" marL="0">
-              <a:buNone/>
-            </a:pPr>
-            <a:r>
-              <a:rPr lang="en-US" sz="1200" b="1" dirty="0">
-                <a:solidFill>
-                  <a:srgbClr val="212529"/>
+          <p:cNvPr id="3" name="Text 0"/>
+          <p:cNvSpPr/>
+          <p:nvPr/>
+        </p:nvSpPr>
+        <p:spPr>
+          <a:xfrm>
+            <a:off x="6109692" y="428625"/>
+            <a:ext cx="2319933" cy="1714500"/>
+          </a:xfrm>
+          <a:prstGeom prst="rect">
+            <a:avLst/>
+          </a:prstGeom>
+          <a:noFill/>
+          <a:ln/>
+        </p:spPr>
+        <p:txBody>
+          <a:bodyPr wrap="none" lIns="0" tIns="0" rIns="0" bIns="0" rtlCol="0" anchor="t">
+            <a:spAutoFit/>
+          </a:bodyPr>
+          <a:lstStyle/>
+          <a:p>
+            <a:pPr marL="0" indent="0" algn="l">
+              <a:lnSpc>
+                <a:spcPct val="80000"/>
+              </a:lnSpc>
+              <a:buNone/>
+            </a:pPr>
+            <a:r>
+              <a:rPr lang="en-US" sz="12450" b="1" dirty="0">
+                <a:solidFill>
+                  <a:srgbClr val="212529">
+                    <a:alpha val="5000"/>
+                  </a:srgbClr>
                 </a:solidFill>
                 <a:latin typeface="Montserrat Black" pitchFamily="34" charset="0"/>
                 <a:ea typeface="Montserrat Black" pitchFamily="34" charset="-122"/>
                 <a:cs typeface="Montserrat Black" pitchFamily="34" charset="-120"/>
               </a:rPr>
-              <a:t>MÉTRICAS (SLO)</a:t>
-            </a:r>
-            <a:endParaRPr lang="en-US" sz="1200" dirty="0"/>
-          </a:p>
-        </p:txBody>
-      </p:sp>
-      <p:sp>
-        <p:nvSpPr>
-          <p:cNvPr id="10" name="Text 5"/>
-          <p:cNvSpPr/>
-          <p:nvPr/>
-        </p:nvSpPr>
-        <p:spPr>
-          <a:xfrm>
-            <a:off x="5136077" y="2087761"/>
-            <a:ext cx="3293548" cy="360034"/>
+              <a:t>09</a:t>
+            </a:r>
+            <a:endParaRPr lang="en-US" sz="12450" dirty="0"/>
+          </a:p>
+        </p:txBody>
+      </p:sp>
+      <p:sp>
+        <p:nvSpPr>
+          <p:cNvPr id="4" name="Text 1"/>
+          <p:cNvSpPr/>
+          <p:nvPr/>
+        </p:nvSpPr>
+        <p:spPr>
+          <a:xfrm>
+            <a:off x="714375" y="714375"/>
+            <a:ext cx="7715250" cy="557213"/>
           </a:xfrm>
           <a:prstGeom prst="rect">
             <a:avLst/>
@@ -8897,30 +8532,27 @@
           </a:bodyPr>
           <a:lstStyle/>
           <a:p>
-            <a:pPr algn="l" indent="0" marL="0">
-              <a:lnSpc>
-                <a:spcPct val="112000"/>
-              </a:lnSpc>
-              <a:buNone/>
-            </a:pPr>
-            <a:r>
-              <a:rPr lang="en-US" sz="950" dirty="0">
-                <a:solidFill>
-                  <a:srgbClr val="495057"/>
-                </a:solidFill>
-                <a:latin typeface="Montserrat Medium" pitchFamily="34" charset="0"/>
-                <a:ea typeface="Montserrat Medium" pitchFamily="34" charset="-122"/>
-                <a:cs typeface="Montserrat Medium" pitchFamily="34" charset="-120"/>
-              </a:rPr>
-              <a:t>Monitoramento de throughput, taxas de erro e latência via OpenTelemetry.</a:t>
-            </a:r>
-            <a:endParaRPr lang="en-US" sz="950" dirty="0"/>
+            <a:pPr marL="0" indent="0" algn="l">
+              <a:buNone/>
+            </a:pPr>
+            <a:r>
+              <a:rPr lang="en-US" sz="3300" b="1" dirty="0">
+                <a:solidFill>
+                  <a:srgbClr val="212529"/>
+                </a:solidFill>
+                <a:latin typeface="Montserrat Black" pitchFamily="34" charset="0"/>
+                <a:ea typeface="Montserrat Black" pitchFamily="34" charset="-122"/>
+                <a:cs typeface="Montserrat Black" pitchFamily="34" charset="-120"/>
+              </a:rPr>
+              <a:t>OBSERVABILIDADE</a:t>
+            </a:r>
+            <a:endParaRPr lang="en-US" sz="3300" dirty="0"/>
           </a:p>
         </p:txBody>
       </p:sp>
       <p:pic>
         <p:nvPicPr>
-          <p:cNvPr id="11" name="Image 3" descr="preencoded.png">    </p:cNvPr>
+          <p:cNvPr id="5" name="Image 1" descr="preencoded.png"/>
           <p:cNvPicPr>
             <a:picLocks noChangeAspect="1"/>
           </p:cNvPicPr>
@@ -8934,8 +8566,8 @@
         </p:blipFill>
         <p:spPr>
           <a:xfrm>
-            <a:off x="773032" y="3274321"/>
-            <a:ext cx="289322" cy="257175"/>
+            <a:off x="771525" y="2012389"/>
+            <a:ext cx="257175" cy="257175"/>
           </a:xfrm>
           <a:prstGeom prst="rect">
             <a:avLst/>
@@ -8944,14 +8576,14 @@
       </p:pic>
       <p:sp>
         <p:nvSpPr>
-          <p:cNvPr id="12" name="Text 6"/>
-          <p:cNvSpPr/>
-          <p:nvPr/>
-        </p:nvSpPr>
-        <p:spPr>
-          <a:xfrm>
-            <a:off x="1121039" y="3105020"/>
-            <a:ext cx="3272368" cy="208955"/>
+          <p:cNvPr id="6" name="Text 2"/>
+          <p:cNvSpPr/>
+          <p:nvPr/>
+        </p:nvSpPr>
+        <p:spPr>
+          <a:xfrm>
+            <a:off x="1085878" y="1843088"/>
+            <a:ext cx="3307528" cy="208955"/>
           </a:xfrm>
           <a:prstGeom prst="rect">
             <a:avLst/>
@@ -8965,7 +8597,7 @@
           </a:bodyPr>
           <a:lstStyle/>
           <a:p>
-            <a:pPr algn="l" indent="0" marL="0">
+            <a:pPr marL="0" indent="0" algn="l">
               <a:buNone/>
             </a:pPr>
             <a:r>
@@ -8977,7 +8609,7 @@
                 <a:ea typeface="Montserrat Black" pitchFamily="34" charset="-122"/>
                 <a:cs typeface="Montserrat Black" pitchFamily="34" charset="-120"/>
               </a:rPr>
-              <a:t>TRACES DISTRIBUÍDOS</a:t>
+              <a:t>LOGS ESTRUTURADOS</a:t>
             </a:r>
             <a:endParaRPr lang="en-US" sz="1200" dirty="0"/>
           </a:p>
@@ -8985,14 +8617,14 @@
       </p:sp>
       <p:sp>
         <p:nvSpPr>
-          <p:cNvPr id="13" name="Text 7"/>
-          <p:cNvSpPr/>
-          <p:nvPr/>
-        </p:nvSpPr>
-        <p:spPr>
-          <a:xfrm>
-            <a:off x="1121039" y="3349693"/>
-            <a:ext cx="3272368" cy="360034"/>
+          <p:cNvPr id="7" name="Text 3"/>
+          <p:cNvSpPr/>
+          <p:nvPr/>
+        </p:nvSpPr>
+        <p:spPr>
+          <a:xfrm>
+            <a:off x="1085878" y="2087761"/>
+            <a:ext cx="3307528" cy="360034"/>
           </a:xfrm>
           <a:prstGeom prst="rect">
             <a:avLst/>
@@ -9006,7 +8638,7 @@
           </a:bodyPr>
           <a:lstStyle/>
           <a:p>
-            <a:pPr algn="l" indent="0" marL="0">
+            <a:pPr marL="0" indent="0" algn="l">
               <a:lnSpc>
                 <a:spcPct val="112000"/>
               </a:lnSpc>
@@ -9021,7 +8653,7 @@
                 <a:ea typeface="Montserrat Medium" pitchFamily="34" charset="-122"/>
                 <a:cs typeface="Montserrat Medium" pitchFamily="34" charset="-120"/>
               </a:rPr>
-              <a:t>Visibilidade total do ciclo de vida da requisição em todo o ecossistema.</a:t>
+              <a:t>Rastreabilidade via Correlation ID entre microsserviços para depuração rápida.</a:t>
             </a:r>
             <a:endParaRPr lang="en-US" sz="950" dirty="0"/>
           </a:p>
@@ -9029,7 +8661,7 @@
       </p:sp>
       <p:pic>
         <p:nvPicPr>
-          <p:cNvPr id="14" name="Image 4" descr="preencoded.png">    </p:cNvPr>
+          <p:cNvPr id="8" name="Image 2" descr="preencoded.png"/>
           <p:cNvPicPr>
             <a:picLocks noChangeAspect="1"/>
           </p:cNvPicPr>
@@ -9043,8 +8675,8 @@
         </p:blipFill>
         <p:spPr>
           <a:xfrm>
-            <a:off x="4802805" y="3274321"/>
-            <a:ext cx="289322" cy="257175"/>
+            <a:off x="4814748" y="2012389"/>
+            <a:ext cx="257175" cy="257175"/>
           </a:xfrm>
           <a:prstGeom prst="rect">
             <a:avLst/>
@@ -9053,14 +8685,14 @@
       </p:pic>
       <p:sp>
         <p:nvSpPr>
-          <p:cNvPr id="15" name="Text 8"/>
-          <p:cNvSpPr/>
-          <p:nvPr/>
-        </p:nvSpPr>
-        <p:spPr>
-          <a:xfrm>
-            <a:off x="5144337" y="3105020"/>
-            <a:ext cx="3285288" cy="208955"/>
+          <p:cNvPr id="9" name="Text 4"/>
+          <p:cNvSpPr/>
+          <p:nvPr/>
+        </p:nvSpPr>
+        <p:spPr>
+          <a:xfrm>
+            <a:off x="5136077" y="1843088"/>
+            <a:ext cx="3293548" cy="208955"/>
           </a:xfrm>
           <a:prstGeom prst="rect">
             <a:avLst/>
@@ -9074,7 +8706,7 @@
           </a:bodyPr>
           <a:lstStyle/>
           <a:p>
-            <a:pPr algn="l" indent="0" marL="0">
+            <a:pPr marL="0" indent="0" algn="l">
               <a:buNone/>
             </a:pPr>
             <a:r>
@@ -9086,6 +8718,224 @@
                 <a:ea typeface="Montserrat Black" pitchFamily="34" charset="-122"/>
                 <a:cs typeface="Montserrat Black" pitchFamily="34" charset="-120"/>
               </a:rPr>
+              <a:t>MÉTRICAS (SLO)</a:t>
+            </a:r>
+            <a:endParaRPr lang="en-US" sz="1200" dirty="0"/>
+          </a:p>
+        </p:txBody>
+      </p:sp>
+      <p:sp>
+        <p:nvSpPr>
+          <p:cNvPr id="10" name="Text 5"/>
+          <p:cNvSpPr/>
+          <p:nvPr/>
+        </p:nvSpPr>
+        <p:spPr>
+          <a:xfrm>
+            <a:off x="5136077" y="2087761"/>
+            <a:ext cx="3293548" cy="360034"/>
+          </a:xfrm>
+          <a:prstGeom prst="rect">
+            <a:avLst/>
+          </a:prstGeom>
+          <a:noFill/>
+          <a:ln/>
+        </p:spPr>
+        <p:txBody>
+          <a:bodyPr wrap="square" lIns="0" tIns="0" rIns="0" bIns="0" rtlCol="0" anchor="t">
+            <a:spAutoFit/>
+          </a:bodyPr>
+          <a:lstStyle/>
+          <a:p>
+            <a:pPr marL="0" indent="0" algn="l">
+              <a:lnSpc>
+                <a:spcPct val="112000"/>
+              </a:lnSpc>
+              <a:buNone/>
+            </a:pPr>
+            <a:r>
+              <a:rPr lang="en-US" sz="950" dirty="0">
+                <a:solidFill>
+                  <a:srgbClr val="495057"/>
+                </a:solidFill>
+                <a:latin typeface="Montserrat Medium" pitchFamily="34" charset="0"/>
+                <a:ea typeface="Montserrat Medium" pitchFamily="34" charset="-122"/>
+                <a:cs typeface="Montserrat Medium" pitchFamily="34" charset="-120"/>
+              </a:rPr>
+              <a:t>Monitoramento de throughput, taxas de erro e latência via OpenTelemetry.</a:t>
+            </a:r>
+            <a:endParaRPr lang="en-US" sz="950" dirty="0"/>
+          </a:p>
+        </p:txBody>
+      </p:sp>
+      <p:pic>
+        <p:nvPicPr>
+          <p:cNvPr id="11" name="Image 3" descr="preencoded.png"/>
+          <p:cNvPicPr>
+            <a:picLocks noChangeAspect="1"/>
+          </p:cNvPicPr>
+          <p:nvPr/>
+        </p:nvPicPr>
+        <p:blipFill>
+          <a:blip r:embed="rId6"/>
+          <a:stretch>
+            <a:fillRect/>
+          </a:stretch>
+        </p:blipFill>
+        <p:spPr>
+          <a:xfrm>
+            <a:off x="773032" y="3274321"/>
+            <a:ext cx="289322" cy="257175"/>
+          </a:xfrm>
+          <a:prstGeom prst="rect">
+            <a:avLst/>
+          </a:prstGeom>
+        </p:spPr>
+      </p:pic>
+      <p:sp>
+        <p:nvSpPr>
+          <p:cNvPr id="12" name="Text 6"/>
+          <p:cNvSpPr/>
+          <p:nvPr/>
+        </p:nvSpPr>
+        <p:spPr>
+          <a:xfrm>
+            <a:off x="1121039" y="3105020"/>
+            <a:ext cx="3272368" cy="208955"/>
+          </a:xfrm>
+          <a:prstGeom prst="rect">
+            <a:avLst/>
+          </a:prstGeom>
+          <a:noFill/>
+          <a:ln/>
+        </p:spPr>
+        <p:txBody>
+          <a:bodyPr wrap="square" lIns="0" tIns="0" rIns="0" bIns="0" rtlCol="0" anchor="t">
+            <a:spAutoFit/>
+          </a:bodyPr>
+          <a:lstStyle/>
+          <a:p>
+            <a:pPr marL="0" indent="0" algn="l">
+              <a:buNone/>
+            </a:pPr>
+            <a:r>
+              <a:rPr lang="en-US" sz="1200" b="1" dirty="0">
+                <a:solidFill>
+                  <a:srgbClr val="212529"/>
+                </a:solidFill>
+                <a:latin typeface="Montserrat Black" pitchFamily="34" charset="0"/>
+                <a:ea typeface="Montserrat Black" pitchFamily="34" charset="-122"/>
+                <a:cs typeface="Montserrat Black" pitchFamily="34" charset="-120"/>
+              </a:rPr>
+              <a:t>TRACES DISTRIBUÍDOS</a:t>
+            </a:r>
+            <a:endParaRPr lang="en-US" sz="1200" dirty="0"/>
+          </a:p>
+        </p:txBody>
+      </p:sp>
+      <p:sp>
+        <p:nvSpPr>
+          <p:cNvPr id="13" name="Text 7"/>
+          <p:cNvSpPr/>
+          <p:nvPr/>
+        </p:nvSpPr>
+        <p:spPr>
+          <a:xfrm>
+            <a:off x="1121039" y="3349693"/>
+            <a:ext cx="3272368" cy="360034"/>
+          </a:xfrm>
+          <a:prstGeom prst="rect">
+            <a:avLst/>
+          </a:prstGeom>
+          <a:noFill/>
+          <a:ln/>
+        </p:spPr>
+        <p:txBody>
+          <a:bodyPr wrap="square" lIns="0" tIns="0" rIns="0" bIns="0" rtlCol="0" anchor="t">
+            <a:spAutoFit/>
+          </a:bodyPr>
+          <a:lstStyle/>
+          <a:p>
+            <a:pPr marL="0" indent="0" algn="l">
+              <a:lnSpc>
+                <a:spcPct val="112000"/>
+              </a:lnSpc>
+              <a:buNone/>
+            </a:pPr>
+            <a:r>
+              <a:rPr lang="en-US" sz="950" dirty="0">
+                <a:solidFill>
+                  <a:srgbClr val="495057"/>
+                </a:solidFill>
+                <a:latin typeface="Montserrat Medium" pitchFamily="34" charset="0"/>
+                <a:ea typeface="Montserrat Medium" pitchFamily="34" charset="-122"/>
+                <a:cs typeface="Montserrat Medium" pitchFamily="34" charset="-120"/>
+              </a:rPr>
+              <a:t>Visibilidade total do ciclo de vida da requisição em todo o ecossistema.</a:t>
+            </a:r>
+            <a:endParaRPr lang="en-US" sz="950" dirty="0"/>
+          </a:p>
+        </p:txBody>
+      </p:sp>
+      <p:pic>
+        <p:nvPicPr>
+          <p:cNvPr id="14" name="Image 4" descr="preencoded.png"/>
+          <p:cNvPicPr>
+            <a:picLocks noChangeAspect="1"/>
+          </p:cNvPicPr>
+          <p:nvPr/>
+        </p:nvPicPr>
+        <p:blipFill>
+          <a:blip r:embed="rId7"/>
+          <a:stretch>
+            <a:fillRect/>
+          </a:stretch>
+        </p:blipFill>
+        <p:spPr>
+          <a:xfrm>
+            <a:off x="4802805" y="3274321"/>
+            <a:ext cx="289322" cy="257175"/>
+          </a:xfrm>
+          <a:prstGeom prst="rect">
+            <a:avLst/>
+          </a:prstGeom>
+        </p:spPr>
+      </p:pic>
+      <p:sp>
+        <p:nvSpPr>
+          <p:cNvPr id="15" name="Text 8"/>
+          <p:cNvSpPr/>
+          <p:nvPr/>
+        </p:nvSpPr>
+        <p:spPr>
+          <a:xfrm>
+            <a:off x="5144337" y="3105020"/>
+            <a:ext cx="3285288" cy="208955"/>
+          </a:xfrm>
+          <a:prstGeom prst="rect">
+            <a:avLst/>
+          </a:prstGeom>
+          <a:noFill/>
+          <a:ln/>
+        </p:spPr>
+        <p:txBody>
+          <a:bodyPr wrap="square" lIns="0" tIns="0" rIns="0" bIns="0" rtlCol="0" anchor="t">
+            <a:spAutoFit/>
+          </a:bodyPr>
+          <a:lstStyle/>
+          <a:p>
+            <a:pPr marL="0" indent="0" algn="l">
+              <a:buNone/>
+            </a:pPr>
+            <a:r>
+              <a:rPr lang="en-US" sz="1200" b="1" dirty="0">
+                <a:solidFill>
+                  <a:srgbClr val="212529"/>
+                </a:solidFill>
+                <a:latin typeface="Montserrat Black" pitchFamily="34" charset="0"/>
+                <a:ea typeface="Montserrat Black" pitchFamily="34" charset="-122"/>
+                <a:cs typeface="Montserrat Black" pitchFamily="34" charset="-120"/>
+              </a:rPr>
               <a:t>HEALTH CHECKS</a:t>
             </a:r>
             <a:endParaRPr lang="en-US" sz="1200" dirty="0"/>
@@ -9115,7 +8965,7 @@
           </a:bodyPr>
           <a:lstStyle/>
           <a:p>
-            <a:pPr algn="l" indent="0" marL="0">
+            <a:pPr marL="0" indent="0" algn="l">
               <a:lnSpc>
                 <a:spcPct val="112000"/>
               </a:lnSpc>
@@ -9437,4 +9287,319 @@
     </a:ext>
   </a:extLst>
 </a:theme>
+</file>
+
+<file path=ppt/theme/theme2.xml><?xml version="1.0" encoding="utf-8"?>
+<a:theme xmlns:a="http://schemas.openxmlformats.org/drawingml/2006/main" name="Office Theme">
+  <a:themeElements>
+    <a:clrScheme name="Office">
+      <a:dk1>
+        <a:sysClr val="windowText" lastClr="000000"/>
+      </a:dk1>
+      <a:lt1>
+        <a:sysClr val="window" lastClr="FFFFFF"/>
+      </a:lt1>
+      <a:dk2>
+        <a:srgbClr val="0E2841"/>
+      </a:dk2>
+      <a:lt2>
+        <a:srgbClr val="E8E8E8"/>
+      </a:lt2>
+      <a:accent1>
+        <a:srgbClr val="156082"/>
+      </a:accent1>
+      <a:accent2>
+        <a:srgbClr val="E97132"/>
+      </a:accent2>
+      <a:accent3>
+        <a:srgbClr val="196B24"/>
+      </a:accent3>
+      <a:accent4>
+        <a:srgbClr val="0F9ED5"/>
+      </a:accent4>
+      <a:accent5>
+        <a:srgbClr val="A02B93"/>
+      </a:accent5>
+      <a:accent6>
+        <a:srgbClr val="4EA72E"/>
+      </a:accent6>
+      <a:hlink>
+        <a:srgbClr val="467886"/>
+      </a:hlink>
+      <a:folHlink>
+        <a:srgbClr val="96607D"/>
+      </a:folHlink>
+    </a:clrScheme>
+    <a:fontScheme name="Office">
+      <a:majorFont>
+        <a:latin typeface="Aptos Display" panose="02110004020202020204"/>
+        <a:ea typeface=""/>
+        <a:cs typeface=""/>
+        <a:font script="Jpan" typeface="游ゴシック Light"/>
+        <a:font script="Hang" typeface="맑은 고딕"/>
+        <a:font script="Hans" typeface="等线 Light"/>
+        <a:font script="Hant" typeface="新細明體"/>
+        <a:font script="Arab" typeface="Times New Roman"/>
+        <a:font script="Hebr" typeface="Times New Roman"/>
+        <a:font script="Thai" typeface="Angsana New"/>
+        <a:font script="Ethi" typeface="Nyala"/>
+        <a:font script="Beng" typeface="Vrinda"/>
+        <a:font script="Gujr" typeface="Shruti"/>
+        <a:font script="Khmr" typeface="MoolBoran"/>
+        <a:font script="Knda" typeface="Tunga"/>
+        <a:font script="Guru" typeface="Raavi"/>
+        <a:font script="Cans" typeface="Euphemia"/>
+        <a:font script="Cher" typeface="Plantagenet Cherokee"/>
+        <a:font script="Yiii" typeface="Microsoft Yi Baiti"/>
+        <a:font script="Tibt" typeface="Microsoft Himalaya"/>
+        <a:font script="Thaa" typeface="MV Boli"/>
+        <a:font script="Deva" typeface="Mangal"/>
+        <a:font script="Telu" typeface="Gautami"/>
+        <a:font script="Taml" typeface="Latha"/>
+        <a:font script="Syrc" typeface="Estrangelo Edessa"/>
+        <a:font script="Orya" typeface="Kalinga"/>
+        <a:font script="Mlym" typeface="Kartika"/>
+        <a:font script="Laoo" typeface="DokChampa"/>
+        <a:font script="Sinh" typeface="Iskoola Pota"/>
+        <a:font script="Mong" typeface="Mongolian Baiti"/>
+        <a:font script="Viet" typeface="Times New Roman"/>
+        <a:font script="Uigh" typeface="Microsoft Uighur"/>
+        <a:font script="Geor" typeface="Sylfaen"/>
+        <a:font script="Armn" typeface="Arial"/>
+        <a:font script="Bugi" typeface="Leelawadee UI"/>
+        <a:font script="Bopo" typeface="Microsoft JhengHei"/>
+        <a:font script="Java" typeface="Javanese Text"/>
+        <a:font script="Lisu" typeface="Segoe UI"/>
+        <a:font script="Mymr" typeface="Myanmar Text"/>
+        <a:font script="Nkoo" typeface="Ebrima"/>
+        <a:font script="Olck" typeface="Nirmala UI"/>
+        <a:font script="Osma" typeface="Ebrima"/>
+        <a:font script="Phag" typeface="Phagspa"/>
+        <a:font script="Syrn" typeface="Estrangelo Edessa"/>
+        <a:font script="Syrj" typeface="Estrangelo Edessa"/>
+        <a:font script="Syre" typeface="Estrangelo Edessa"/>
+        <a:font script="Sora" typeface="Nirmala UI"/>
+        <a:font script="Tale" typeface="Microsoft Tai Le"/>
+        <a:font script="Talu" typeface="Microsoft New Tai Lue"/>
+        <a:font script="Tfng" typeface="Ebrima"/>
+      </a:majorFont>
+      <a:minorFont>
+        <a:latin typeface="Aptos" panose="02110004020202020204"/>
+        <a:ea typeface=""/>
+        <a:cs typeface=""/>
+        <a:font script="Jpan" typeface="游ゴシック"/>
+        <a:font script="Hang" typeface="맑은 고딕"/>
+        <a:font script="Hans" typeface="等线"/>
+        <a:font script="Hant" typeface="新細明體"/>
+        <a:font script="Arab" typeface="Arial"/>
+        <a:font script="Hebr" typeface="Arial"/>
+        <a:font script="Thai" typeface="Cordia New"/>
+        <a:font script="Ethi" typeface="Nyala"/>
+        <a:font script="Beng" typeface="Vrinda"/>
+        <a:font script="Gujr" typeface="Shruti"/>
+        <a:font script="Khmr" typeface="DaunPenh"/>
+        <a:font script="Knda" typeface="Tunga"/>
+        <a:font script="Guru" typeface="Raavi"/>
+        <a:font script="Cans" typeface="Euphemia"/>
+        <a:font script="Cher" typeface="Plantagenet Cherokee"/>
+        <a:font script="Yiii" typeface="Microsoft Yi Baiti"/>
+        <a:font script="Tibt" typeface="Microsoft Himalaya"/>
+        <a:font script="Thaa" typeface="MV Boli"/>
+        <a:font script="Deva" typeface="Mangal"/>
+        <a:font script="Telu" typeface="Gautami"/>
+        <a:font script="Taml" typeface="Latha"/>
+        <a:font script="Syrc" typeface="Estrangelo Edessa"/>
+        <a:font script="Orya" typeface="Kalinga"/>
+        <a:font script="Mlym" typeface="Kartika"/>
+        <a:font script="Laoo" typeface="DokChampa"/>
+        <a:font script="Sinh" typeface="Iskoola Pota"/>
+        <a:font script="Mong" typeface="Mongolian Baiti"/>
+        <a:font script="Viet" typeface="Arial"/>
+        <a:font script="Uigh" typeface="Microsoft Uighur"/>
+        <a:font script="Geor" typeface="Sylfaen"/>
+        <a:font script="Armn" typeface="Arial"/>
+        <a:font script="Bugi" typeface="Leelawadee UI"/>
+        <a:font script="Bopo" typeface="Microsoft JhengHei"/>
+        <a:font script="Java" typeface="Javanese Text"/>
+        <a:font script="Lisu" typeface="Segoe UI"/>
+        <a:font script="Mymr" typeface="Myanmar Text"/>
+        <a:font script="Nkoo" typeface="Ebrima"/>
+        <a:font script="Olck" typeface="Nirmala UI"/>
+        <a:font script="Osma" typeface="Ebrima"/>
+        <a:font script="Phag" typeface="Phagspa"/>
+        <a:font script="Syrn" typeface="Estrangelo Edessa"/>
+        <a:font script="Syrj" typeface="Estrangelo Edessa"/>
+        <a:font script="Syre" typeface="Estrangelo Edessa"/>
+        <a:font script="Sora" typeface="Nirmala UI"/>
+        <a:font script="Tale" typeface="Microsoft Tai Le"/>
+        <a:font script="Talu" typeface="Microsoft New Tai Lue"/>
+        <a:font script="Tfng" typeface="Ebrima"/>
+      </a:minorFont>
+    </a:fontScheme>
+    <a:fmtScheme name="Office">
+      <a:fillStyleLst>
+        <a:solidFill>
+          <a:schemeClr val="phClr"/>
+        </a:solidFill>
+        <a:gradFill rotWithShape="1">
+          <a:gsLst>
+            <a:gs pos="0">
+              <a:schemeClr val="phClr">
+                <a:lumMod val="110000"/>
+                <a:satMod val="105000"/>
+                <a:tint val="67000"/>
+              </a:schemeClr>
+            </a:gs>
+            <a:gs pos="50000">
+              <a:schemeClr val="phClr">
+                <a:lumMod val="105000"/>
+                <a:satMod val="103000"/>
+                <a:tint val="73000"/>
+              </a:schemeClr>
+            </a:gs>
+            <a:gs pos="100000">
+              <a:schemeClr val="phClr">
+                <a:lumMod val="105000"/>
+                <a:satMod val="109000"/>
+                <a:tint val="81000"/>
+              </a:schemeClr>
+            </a:gs>
+          </a:gsLst>
+          <a:lin ang="5400000" scaled="0"/>
+        </a:gradFill>
+        <a:gradFill rotWithShape="1">
+          <a:gsLst>
+            <a:gs pos="0">
+              <a:schemeClr val="phClr">
+                <a:satMod val="103000"/>
+                <a:lumMod val="102000"/>
+                <a:tint val="94000"/>
+              </a:schemeClr>
+            </a:gs>
+            <a:gs pos="50000">
+              <a:schemeClr val="phClr">
+                <a:satMod val="110000"/>
+                <a:lumMod val="100000"/>
+                <a:shade val="100000"/>
+              </a:schemeClr>
+            </a:gs>
+            <a:gs pos="100000">
+              <a:schemeClr val="phClr">
+                <a:lumMod val="99000"/>
+                <a:satMod val="120000"/>
+                <a:shade val="78000"/>
+              </a:schemeClr>
+            </a:gs>
+          </a:gsLst>
+          <a:lin ang="5400000" scaled="0"/>
+        </a:gradFill>
+      </a:fillStyleLst>
+      <a:lnStyleLst>
+        <a:ln w="12700" cap="flat" cmpd="sng" algn="ctr">
+          <a:solidFill>
+            <a:schemeClr val="phClr"/>
+          </a:solidFill>
+          <a:prstDash val="solid"/>
+          <a:miter lim="800000"/>
+        </a:ln>
+        <a:ln w="19050" cap="flat" cmpd="sng" algn="ctr">
+          <a:solidFill>
+            <a:schemeClr val="phClr"/>
+          </a:solidFill>
+          <a:prstDash val="solid"/>
+          <a:miter lim="800000"/>
+        </a:ln>
+        <a:ln w="25400" cap="flat" cmpd="sng" algn="ctr">
+          <a:solidFill>
+            <a:schemeClr val="phClr"/>
+          </a:solidFill>
+          <a:prstDash val="solid"/>
+          <a:miter lim="800000"/>
+        </a:ln>
+      </a:lnStyleLst>
+      <a:effectStyleLst>
+        <a:effectStyle>
+          <a:effectLst/>
+        </a:effectStyle>
+        <a:effectStyle>
+          <a:effectLst/>
+        </a:effectStyle>
+        <a:effectStyle>
+          <a:effectLst>
+            <a:outerShdw blurRad="57150" dist="19050" dir="5400000" algn="ctr" rotWithShape="0">
+              <a:srgbClr val="000000">
+                <a:alpha val="63000"/>
+              </a:srgbClr>
+            </a:outerShdw>
+          </a:effectLst>
+        </a:effectStyle>
+      </a:effectStyleLst>
+      <a:bgFillStyleLst>
+        <a:solidFill>
+          <a:schemeClr val="phClr"/>
+        </a:solidFill>
+        <a:solidFill>
+          <a:schemeClr val="phClr">
+            <a:tint val="95000"/>
+            <a:satMod val="170000"/>
+          </a:schemeClr>
+        </a:solidFill>
+        <a:gradFill rotWithShape="1">
+          <a:gsLst>
+            <a:gs pos="0">
+              <a:schemeClr val="phClr">
+                <a:tint val="93000"/>
+                <a:satMod val="150000"/>
+                <a:shade val="98000"/>
+                <a:lumMod val="102000"/>
+              </a:schemeClr>
+            </a:gs>
+            <a:gs pos="50000">
+              <a:schemeClr val="phClr">
+                <a:tint val="98000"/>
+                <a:satMod val="130000"/>
+                <a:shade val="90000"/>
+                <a:lumMod val="103000"/>
+              </a:schemeClr>
+            </a:gs>
+            <a:gs pos="100000">
+              <a:schemeClr val="phClr">
+                <a:shade val="63000"/>
+                <a:satMod val="120000"/>
+              </a:schemeClr>
+            </a:gs>
+          </a:gsLst>
+          <a:lin ang="5400000" scaled="0"/>
+        </a:gradFill>
+      </a:bgFillStyleLst>
+    </a:fmtScheme>
+  </a:themeElements>
+  <a:objectDefaults>
+    <a:lnDef>
+      <a:spPr/>
+      <a:bodyPr/>
+      <a:lstStyle/>
+      <a:style>
+        <a:lnRef idx="2">
+          <a:schemeClr val="accent1"/>
+        </a:lnRef>
+        <a:fillRef idx="0">
+          <a:schemeClr val="accent1"/>
+        </a:fillRef>
+        <a:effectRef idx="1">
+          <a:schemeClr val="accent1"/>
+        </a:effectRef>
+        <a:fontRef idx="minor">
+          <a:schemeClr val="tx1"/>
+        </a:fontRef>
+      </a:style>
+    </a:lnDef>
+  </a:objectDefaults>
+  <a:extraClrSchemeLst/>
+  <a:extLst>
+    <a:ext uri="{05A4C25C-085E-4340-85A3-A5531E510DB2}">
+      <thm15:themeFamily xmlns:thm15="http://schemas.microsoft.com/office/thememl/2012/main" name="Office Theme" id="{2E142A2C-CD16-42D6-873A-C26D2A0506FA}" vid="{1BDDFF52-6CD6-40A5-AB3C-68EB2F1E4D0A}"/>
+    </a:ext>
+  </a:extLst>
+</a:theme>
 </file>